--- a/paper/thesis_slides.pptx
+++ b/paper/thesis_slides.pptx
@@ -31,6 +31,7 @@
     <p:sldId id="279" r:id="rId30"/>
     <p:sldId id="280" r:id="rId31"/>
     <p:sldId id="281" r:id="rId32"/>
+    <p:sldId id="282" r:id="rId33"/>
   </p:sldIdLst>
   <p:sldSz cx="12191695" cy="6858000" type="screen4x3"/>
   <p:notesSz cx="6858000" cy="9144000"/>
@@ -3919,7 +3920,7 @@
                 <a:ea typeface="Malgun Gothic"/>
                 <a:latin typeface="Malgun Gothic"/>
               </a:rPr>
-              <a:t>10 / 26</a:t>
+              <a:t>10 / 27</a:t>
             </a:r>
           </a:p>
         </p:txBody>
@@ -4600,7 +4601,7 @@
                 <a:ea typeface="Malgun Gothic"/>
                 <a:latin typeface="Malgun Gothic"/>
               </a:rPr>
-              <a:t>11 / 26</a:t>
+              <a:t>11 / 27</a:t>
             </a:r>
           </a:p>
         </p:txBody>
@@ -5257,7 +5258,7 @@
                 <a:ea typeface="Malgun Gothic"/>
                 <a:latin typeface="Malgun Gothic"/>
               </a:rPr>
-              <a:t>12 / 26</a:t>
+              <a:t>12 / 27</a:t>
             </a:r>
           </a:p>
         </p:txBody>
@@ -6581,7 +6582,7 @@
                 <a:ea typeface="Malgun Gothic"/>
                 <a:latin typeface="Malgun Gothic"/>
               </a:rPr>
-              <a:t>13 / 26</a:t>
+              <a:t>13 / 27</a:t>
             </a:r>
           </a:p>
         </p:txBody>
@@ -6960,7 +6961,7 @@
                 <a:ea typeface="Malgun Gothic"/>
                 <a:latin typeface="Malgun Gothic"/>
               </a:rPr>
-              <a:t>14 / 26</a:t>
+              <a:t>14 / 27</a:t>
             </a:r>
           </a:p>
         </p:txBody>
@@ -8361,7 +8362,7 @@
                 <a:ea typeface="Malgun Gothic"/>
                 <a:latin typeface="Malgun Gothic"/>
               </a:rPr>
-              <a:t>15 / 26</a:t>
+              <a:t>15 / 27</a:t>
             </a:r>
           </a:p>
         </p:txBody>
@@ -9683,7 +9684,7 @@
                 <a:ea typeface="Malgun Gothic"/>
                 <a:latin typeface="Malgun Gothic"/>
               </a:rPr>
-              <a:t>16 / 26</a:t>
+              <a:t>16 / 27</a:t>
             </a:r>
           </a:p>
         </p:txBody>
@@ -11173,7 +11174,7 @@
                 <a:ea typeface="Malgun Gothic"/>
                 <a:latin typeface="Malgun Gothic"/>
               </a:rPr>
-              <a:t>17 / 26</a:t>
+              <a:t>17 / 27</a:t>
             </a:r>
           </a:p>
         </p:txBody>
@@ -11551,7 +11552,7 @@
                 <a:ea typeface="Malgun Gothic"/>
                 <a:latin typeface="Malgun Gothic"/>
               </a:rPr>
-              <a:t>18 / 26</a:t>
+              <a:t>18 / 27</a:t>
             </a:r>
           </a:p>
         </p:txBody>
@@ -12955,7 +12956,7 @@
                 <a:ea typeface="Malgun Gothic"/>
                 <a:latin typeface="Malgun Gothic"/>
               </a:rPr>
-              <a:t>19 / 26</a:t>
+              <a:t>19 / 27</a:t>
             </a:r>
           </a:p>
         </p:txBody>
@@ -13692,7 +13693,7 @@
                 <a:ea typeface="Malgun Gothic"/>
                 <a:latin typeface="Malgun Gothic"/>
               </a:rPr>
-              <a:t>2 / 26</a:t>
+              <a:t>2 / 27</a:t>
             </a:r>
           </a:p>
         </p:txBody>
@@ -15336,7 +15337,7 @@
                 <a:ea typeface="Malgun Gothic"/>
                 <a:latin typeface="Malgun Gothic"/>
               </a:rPr>
-              <a:t>20 / 26</a:t>
+              <a:t>20 / 27</a:t>
             </a:r>
           </a:p>
         </p:txBody>
@@ -16925,7 +16926,7 @@
                 <a:ea typeface="Malgun Gothic"/>
                 <a:latin typeface="Malgun Gothic"/>
               </a:rPr>
-              <a:t>21 / 26</a:t>
+              <a:t>21 / 27</a:t>
             </a:r>
           </a:p>
         </p:txBody>
@@ -17021,7 +17022,7 @@
                 <a:ea typeface="Malgun Gothic"/>
                 <a:latin typeface="Malgun Gothic"/>
               </a:rPr>
-              <a:t>20. 핵심 발견 통합</a:t>
+              <a:t>20. 정량 결과 종합</a:t>
             </a:r>
           </a:p>
         </p:txBody>
@@ -17056,7 +17057,7 @@
                 <a:ea typeface="Malgun Gothic"/>
                 <a:latin typeface="Malgun Gothic"/>
               </a:rPr>
-              <a:t>본 연구가 학술적으로 정량 입증한 3 가지</a:t>
+              <a:t>본 연구가 학술적으로 입증한 모든 핵심 수치 — 한 눈에</a:t>
             </a:r>
           </a:p>
         </p:txBody>
@@ -17106,67 +17107,14 @@
       </p:sp>
       <p:sp>
         <p:nvSpPr>
-          <p:cNvPr id="6" name="Oval 5"/>
-          <p:cNvSpPr/>
-          <p:nvPr/>
-        </p:nvSpPr>
-        <p:spPr>
-          <a:xfrm>
-            <a:off x="540000" y="1260000"/>
-            <a:ext cx="792000" cy="792000"/>
-          </a:xfrm>
-          <a:prstGeom prst="ellipse">
-            <a:avLst/>
-          </a:prstGeom>
-          <a:solidFill>
-            <a:srgbClr val="55A868"/>
-          </a:solidFill>
-          <a:ln>
-            <a:noFill/>
-          </a:ln>
-        </p:spPr>
-        <p:style>
-          <a:lnRef idx="1">
-            <a:schemeClr val="accent1"/>
-          </a:lnRef>
-          <a:fillRef idx="3">
-            <a:schemeClr val="accent1"/>
-          </a:fillRef>
-          <a:effectRef idx="2">
-            <a:schemeClr val="accent1"/>
-          </a:effectRef>
-          <a:fontRef idx="minor">
-            <a:schemeClr val="lt1"/>
-          </a:fontRef>
-        </p:style>
-        <p:txBody>
-          <a:bodyPr rtlCol="0" anchor="ctr"/>
-          <a:lstStyle/>
-          <a:p>
-            <a:pPr algn="ctr"/>
-            <a:r>
-              <a:rPr sz="2600" b="1">
-                <a:solidFill>
-                  <a:srgbClr val="FFFFFF"/>
-                </a:solidFill>
-                <a:ea typeface="Malgun Gothic"/>
-                <a:latin typeface="Malgun Gothic"/>
-              </a:rPr>
-              <a:t>①</a:t>
-            </a:r>
-          </a:p>
-        </p:txBody>
-      </p:sp>
-      <p:sp>
-        <p:nvSpPr>
-          <p:cNvPr id="7" name="TextBox 6"/>
+          <p:cNvPr id="6" name="TextBox 5"/>
           <p:cNvSpPr txBox="1"/>
           <p:nvPr/>
         </p:nvSpPr>
         <p:spPr>
           <a:xfrm>
-            <a:off x="1620000" y="1260000"/>
-            <a:ext cx="10080000" cy="360000"/>
+            <a:off x="360000" y="1080000"/>
+            <a:ext cx="11160000" cy="251999"/>
           </a:xfrm>
           <a:prstGeom prst="rect">
             <a:avLst/>
@@ -17180,28 +17128,2778 @@
           <a:lstStyle/>
           <a:p>
             <a:r>
-              <a:rPr sz="1700" b="1">
-                <a:solidFill>
-                  <a:srgbClr val="55A868"/>
-                </a:solidFill>
-                <a:ea typeface="Malgun Gothic"/>
-                <a:latin typeface="Malgun Gothic"/>
-              </a:rPr>
-              <a:t>Fusion 메커니즘은 NLI 사실성에서 일관 1 위</a:t>
-            </a:r>
-          </a:p>
-        </p:txBody>
-      </p:sp>
-      <p:sp>
-        <p:nvSpPr>
-          <p:cNvPr id="8" name="TextBox 7"/>
+              <a:rPr sz="1300" b="1">
+                <a:solidFill>
+                  <a:srgbClr val="1F3A68"/>
+                </a:solidFill>
+                <a:ea typeface="Malgun Gothic"/>
+                <a:latin typeface="Malgun Gothic"/>
+              </a:rPr>
+              <a:t>9 개 영역 × 양 데이터셋 정량 결과 종합표</a:t>
+            </a:r>
+          </a:p>
+        </p:txBody>
+      </p:sp>
+      <p:sp>
+        <p:nvSpPr>
+          <p:cNvPr id="7" name="Rectangle 6"/>
+          <p:cNvSpPr/>
+          <p:nvPr/>
+        </p:nvSpPr>
+        <p:spPr>
+          <a:xfrm>
+            <a:off x="360000" y="1404000"/>
+            <a:ext cx="1800000" cy="342000"/>
+          </a:xfrm>
+          <a:prstGeom prst="rect">
+            <a:avLst/>
+          </a:prstGeom>
+          <a:solidFill>
+            <a:srgbClr val="1F3A68"/>
+          </a:solidFill>
+          <a:ln>
+            <a:solidFill>
+              <a:srgbClr val="CCCCCC"/>
+            </a:solidFill>
+          </a:ln>
+        </p:spPr>
+        <p:style>
+          <a:lnRef idx="1">
+            <a:schemeClr val="accent1"/>
+          </a:lnRef>
+          <a:fillRef idx="3">
+            <a:schemeClr val="accent1"/>
+          </a:fillRef>
+          <a:effectRef idx="2">
+            <a:schemeClr val="accent1"/>
+          </a:effectRef>
+          <a:fontRef idx="minor">
+            <a:schemeClr val="lt1"/>
+          </a:fontRef>
+        </p:style>
+        <p:txBody>
+          <a:bodyPr rtlCol="0" anchor="ctr" lIns="72000" rIns="36000" tIns="28800" bIns="28800"/>
+          <a:lstStyle/>
+          <a:p>
+            <a:pPr algn="ctr"/>
+            <a:r>
+              <a:rPr sz="1000" b="1">
+                <a:solidFill>
+                  <a:srgbClr val="FFFFFF"/>
+                </a:solidFill>
+                <a:ea typeface="Malgun Gothic"/>
+                <a:latin typeface="Malgun Gothic"/>
+              </a:rPr>
+              <a:t>영역</a:t>
+            </a:r>
+          </a:p>
+        </p:txBody>
+      </p:sp>
+      <p:sp>
+        <p:nvSpPr>
+          <p:cNvPr id="8" name="Rectangle 7"/>
+          <p:cNvSpPr/>
+          <p:nvPr/>
+        </p:nvSpPr>
+        <p:spPr>
+          <a:xfrm>
+            <a:off x="2160000" y="1404000"/>
+            <a:ext cx="2520000" cy="342000"/>
+          </a:xfrm>
+          <a:prstGeom prst="rect">
+            <a:avLst/>
+          </a:prstGeom>
+          <a:solidFill>
+            <a:srgbClr val="1F3A68"/>
+          </a:solidFill>
+          <a:ln>
+            <a:solidFill>
+              <a:srgbClr val="CCCCCC"/>
+            </a:solidFill>
+          </a:ln>
+        </p:spPr>
+        <p:style>
+          <a:lnRef idx="1">
+            <a:schemeClr val="accent1"/>
+          </a:lnRef>
+          <a:fillRef idx="3">
+            <a:schemeClr val="accent1"/>
+          </a:fillRef>
+          <a:effectRef idx="2">
+            <a:schemeClr val="accent1"/>
+          </a:effectRef>
+          <a:fontRef idx="minor">
+            <a:schemeClr val="lt1"/>
+          </a:fontRef>
+        </p:style>
+        <p:txBody>
+          <a:bodyPr rtlCol="0" anchor="ctr" lIns="72000" rIns="36000" tIns="28800" bIns="28800"/>
+          <a:lstStyle/>
+          <a:p>
+            <a:pPr algn="ctr"/>
+            <a:r>
+              <a:rPr sz="1000" b="1">
+                <a:solidFill>
+                  <a:srgbClr val="FFFFFF"/>
+                </a:solidFill>
+                <a:ea typeface="Malgun Gothic"/>
+                <a:latin typeface="Malgun Gothic"/>
+              </a:rPr>
+              <a:t>지표</a:t>
+            </a:r>
+          </a:p>
+        </p:txBody>
+      </p:sp>
+      <p:sp>
+        <p:nvSpPr>
+          <p:cNvPr id="9" name="Rectangle 8"/>
+          <p:cNvSpPr/>
+          <p:nvPr/>
+        </p:nvSpPr>
+        <p:spPr>
+          <a:xfrm>
+            <a:off x="4680000" y="1404000"/>
+            <a:ext cx="2088000" cy="342000"/>
+          </a:xfrm>
+          <a:prstGeom prst="rect">
+            <a:avLst/>
+          </a:prstGeom>
+          <a:solidFill>
+            <a:srgbClr val="1F3A68"/>
+          </a:solidFill>
+          <a:ln>
+            <a:solidFill>
+              <a:srgbClr val="CCCCCC"/>
+            </a:solidFill>
+          </a:ln>
+        </p:spPr>
+        <p:style>
+          <a:lnRef idx="1">
+            <a:schemeClr val="accent1"/>
+          </a:lnRef>
+          <a:fillRef idx="3">
+            <a:schemeClr val="accent1"/>
+          </a:fillRef>
+          <a:effectRef idx="2">
+            <a:schemeClr val="accent1"/>
+          </a:effectRef>
+          <a:fontRef idx="minor">
+            <a:schemeClr val="lt1"/>
+          </a:fontRef>
+        </p:style>
+        <p:txBody>
+          <a:bodyPr rtlCol="0" anchor="ctr" lIns="72000" rIns="36000" tIns="28800" bIns="28800"/>
+          <a:lstStyle/>
+          <a:p>
+            <a:pPr algn="ctr"/>
+            <a:r>
+              <a:rPr sz="1000" b="1">
+                <a:solidFill>
+                  <a:srgbClr val="FFFFFF"/>
+                </a:solidFill>
+                <a:ea typeface="Malgun Gothic"/>
+                <a:latin typeface="Malgun Gothic"/>
+              </a:rPr>
+              <a:t>Home Credit</a:t>
+            </a:r>
+          </a:p>
+        </p:txBody>
+      </p:sp>
+      <p:sp>
+        <p:nvSpPr>
+          <p:cNvPr id="10" name="Rectangle 9"/>
+          <p:cNvSpPr/>
+          <p:nvPr/>
+        </p:nvSpPr>
+        <p:spPr>
+          <a:xfrm>
+            <a:off x="6768000" y="1404000"/>
+            <a:ext cx="2088000" cy="342000"/>
+          </a:xfrm>
+          <a:prstGeom prst="rect">
+            <a:avLst/>
+          </a:prstGeom>
+          <a:solidFill>
+            <a:srgbClr val="1F3A68"/>
+          </a:solidFill>
+          <a:ln>
+            <a:solidFill>
+              <a:srgbClr val="CCCCCC"/>
+            </a:solidFill>
+          </a:ln>
+        </p:spPr>
+        <p:style>
+          <a:lnRef idx="1">
+            <a:schemeClr val="accent1"/>
+          </a:lnRef>
+          <a:fillRef idx="3">
+            <a:schemeClr val="accent1"/>
+          </a:fillRef>
+          <a:effectRef idx="2">
+            <a:schemeClr val="accent1"/>
+          </a:effectRef>
+          <a:fontRef idx="minor">
+            <a:schemeClr val="lt1"/>
+          </a:fontRef>
+        </p:style>
+        <p:txBody>
+          <a:bodyPr rtlCol="0" anchor="ctr" lIns="72000" rIns="36000" tIns="28800" bIns="28800"/>
+          <a:lstStyle/>
+          <a:p>
+            <a:pPr algn="ctr"/>
+            <a:r>
+              <a:rPr sz="1000" b="1">
+                <a:solidFill>
+                  <a:srgbClr val="FFFFFF"/>
+                </a:solidFill>
+                <a:ea typeface="Malgun Gothic"/>
+                <a:latin typeface="Malgun Gothic"/>
+              </a:rPr>
+              <a:t>UCI German</a:t>
+            </a:r>
+          </a:p>
+        </p:txBody>
+      </p:sp>
+      <p:sp>
+        <p:nvSpPr>
+          <p:cNvPr id="11" name="Rectangle 10"/>
+          <p:cNvSpPr/>
+          <p:nvPr/>
+        </p:nvSpPr>
+        <p:spPr>
+          <a:xfrm>
+            <a:off x="8856000" y="1404000"/>
+            <a:ext cx="2880000" cy="342000"/>
+          </a:xfrm>
+          <a:prstGeom prst="rect">
+            <a:avLst/>
+          </a:prstGeom>
+          <a:solidFill>
+            <a:srgbClr val="1F3A68"/>
+          </a:solidFill>
+          <a:ln>
+            <a:solidFill>
+              <a:srgbClr val="CCCCCC"/>
+            </a:solidFill>
+          </a:ln>
+        </p:spPr>
+        <p:style>
+          <a:lnRef idx="1">
+            <a:schemeClr val="accent1"/>
+          </a:lnRef>
+          <a:fillRef idx="3">
+            <a:schemeClr val="accent1"/>
+          </a:fillRef>
+          <a:effectRef idx="2">
+            <a:schemeClr val="accent1"/>
+          </a:effectRef>
+          <a:fontRef idx="minor">
+            <a:schemeClr val="lt1"/>
+          </a:fontRef>
+        </p:style>
+        <p:txBody>
+          <a:bodyPr rtlCol="0" anchor="ctr" lIns="72000" rIns="36000" tIns="28800" bIns="28800"/>
+          <a:lstStyle/>
+          <a:p>
+            <a:pPr algn="ctr"/>
+            <a:r>
+              <a:rPr sz="1000" b="1">
+                <a:solidFill>
+                  <a:srgbClr val="FFFFFF"/>
+                </a:solidFill>
+                <a:ea typeface="Malgun Gothic"/>
+                <a:latin typeface="Malgun Gothic"/>
+              </a:rPr>
+              <a:t>결과 해석</a:t>
+            </a:r>
+          </a:p>
+        </p:txBody>
+      </p:sp>
+      <p:sp>
+        <p:nvSpPr>
+          <p:cNvPr id="12" name="Rectangle 11"/>
+          <p:cNvSpPr/>
+          <p:nvPr/>
+        </p:nvSpPr>
+        <p:spPr>
+          <a:xfrm>
+            <a:off x="360000" y="1746000"/>
+            <a:ext cx="1800000" cy="342000"/>
+          </a:xfrm>
+          <a:prstGeom prst="rect">
+            <a:avLst/>
+          </a:prstGeom>
+          <a:solidFill>
+            <a:srgbClr val="F8F9FB"/>
+          </a:solidFill>
+          <a:ln>
+            <a:solidFill>
+              <a:srgbClr val="CCCCCC"/>
+            </a:solidFill>
+          </a:ln>
+        </p:spPr>
+        <p:style>
+          <a:lnRef idx="1">
+            <a:schemeClr val="accent1"/>
+          </a:lnRef>
+          <a:fillRef idx="3">
+            <a:schemeClr val="accent1"/>
+          </a:fillRef>
+          <a:effectRef idx="2">
+            <a:schemeClr val="accent1"/>
+          </a:effectRef>
+          <a:fontRef idx="minor">
+            <a:schemeClr val="lt1"/>
+          </a:fontRef>
+        </p:style>
+        <p:txBody>
+          <a:bodyPr rtlCol="0" anchor="ctr" lIns="72000" rIns="36000" tIns="28800" bIns="28800"/>
+          <a:lstStyle/>
+          <a:p>
+            <a:pPr algn="ctr"/>
+            <a:r>
+              <a:rPr sz="1000" b="0">
+                <a:solidFill>
+                  <a:srgbClr val="222222"/>
+                </a:solidFill>
+                <a:ea typeface="Malgun Gothic"/>
+                <a:latin typeface="Malgun Gothic"/>
+              </a:rPr>
+              <a:t>예측 성능</a:t>
+            </a:r>
+          </a:p>
+        </p:txBody>
+      </p:sp>
+      <p:sp>
+        <p:nvSpPr>
+          <p:cNvPr id="13" name="Rectangle 12"/>
+          <p:cNvSpPr/>
+          <p:nvPr/>
+        </p:nvSpPr>
+        <p:spPr>
+          <a:xfrm>
+            <a:off x="2160000" y="1746000"/>
+            <a:ext cx="2520000" cy="342000"/>
+          </a:xfrm>
+          <a:prstGeom prst="rect">
+            <a:avLst/>
+          </a:prstGeom>
+          <a:solidFill>
+            <a:srgbClr val="F8F9FB"/>
+          </a:solidFill>
+          <a:ln>
+            <a:solidFill>
+              <a:srgbClr val="CCCCCC"/>
+            </a:solidFill>
+          </a:ln>
+        </p:spPr>
+        <p:style>
+          <a:lnRef idx="1">
+            <a:schemeClr val="accent1"/>
+          </a:lnRef>
+          <a:fillRef idx="3">
+            <a:schemeClr val="accent1"/>
+          </a:fillRef>
+          <a:effectRef idx="2">
+            <a:schemeClr val="accent1"/>
+          </a:effectRef>
+          <a:fontRef idx="minor">
+            <a:schemeClr val="lt1"/>
+          </a:fontRef>
+        </p:style>
+        <p:txBody>
+          <a:bodyPr rtlCol="0" anchor="ctr" lIns="72000" rIns="36000" tIns="28800" bIns="28800"/>
+          <a:lstStyle/>
+          <a:p>
+            <a:pPr algn="ctr"/>
+            <a:r>
+              <a:rPr sz="1000" b="0">
+                <a:solidFill>
+                  <a:srgbClr val="222222"/>
+                </a:solidFill>
+                <a:ea typeface="Malgun Gothic"/>
+                <a:latin typeface="Malgun Gothic"/>
+              </a:rPr>
+              <a:t>XGBoost AUROC</a:t>
+            </a:r>
+          </a:p>
+        </p:txBody>
+      </p:sp>
+      <p:sp>
+        <p:nvSpPr>
+          <p:cNvPr id="14" name="Rectangle 13"/>
+          <p:cNvSpPr/>
+          <p:nvPr/>
+        </p:nvSpPr>
+        <p:spPr>
+          <a:xfrm>
+            <a:off x="4680000" y="1746000"/>
+            <a:ext cx="2088000" cy="342000"/>
+          </a:xfrm>
+          <a:prstGeom prst="rect">
+            <a:avLst/>
+          </a:prstGeom>
+          <a:solidFill>
+            <a:srgbClr val="F8F9FB"/>
+          </a:solidFill>
+          <a:ln>
+            <a:solidFill>
+              <a:srgbClr val="CCCCCC"/>
+            </a:solidFill>
+          </a:ln>
+        </p:spPr>
+        <p:style>
+          <a:lnRef idx="1">
+            <a:schemeClr val="accent1"/>
+          </a:lnRef>
+          <a:fillRef idx="3">
+            <a:schemeClr val="accent1"/>
+          </a:fillRef>
+          <a:effectRef idx="2">
+            <a:schemeClr val="accent1"/>
+          </a:effectRef>
+          <a:fontRef idx="minor">
+            <a:schemeClr val="lt1"/>
+          </a:fontRef>
+        </p:style>
+        <p:txBody>
+          <a:bodyPr rtlCol="0" anchor="ctr" lIns="72000" rIns="36000" tIns="28800" bIns="28800"/>
+          <a:lstStyle/>
+          <a:p>
+            <a:pPr algn="ctr"/>
+            <a:r>
+              <a:rPr sz="1000" b="0">
+                <a:solidFill>
+                  <a:srgbClr val="222222"/>
+                </a:solidFill>
+                <a:ea typeface="Malgun Gothic"/>
+                <a:latin typeface="Malgun Gothic"/>
+              </a:rPr>
+              <a:t>0.7587</a:t>
+            </a:r>
+          </a:p>
+        </p:txBody>
+      </p:sp>
+      <p:sp>
+        <p:nvSpPr>
+          <p:cNvPr id="15" name="Rectangle 14"/>
+          <p:cNvSpPr/>
+          <p:nvPr/>
+        </p:nvSpPr>
+        <p:spPr>
+          <a:xfrm>
+            <a:off x="6768000" y="1746000"/>
+            <a:ext cx="2088000" cy="342000"/>
+          </a:xfrm>
+          <a:prstGeom prst="rect">
+            <a:avLst/>
+          </a:prstGeom>
+          <a:solidFill>
+            <a:srgbClr val="F8F9FB"/>
+          </a:solidFill>
+          <a:ln>
+            <a:solidFill>
+              <a:srgbClr val="CCCCCC"/>
+            </a:solidFill>
+          </a:ln>
+        </p:spPr>
+        <p:style>
+          <a:lnRef idx="1">
+            <a:schemeClr val="accent1"/>
+          </a:lnRef>
+          <a:fillRef idx="3">
+            <a:schemeClr val="accent1"/>
+          </a:fillRef>
+          <a:effectRef idx="2">
+            <a:schemeClr val="accent1"/>
+          </a:effectRef>
+          <a:fontRef idx="minor">
+            <a:schemeClr val="lt1"/>
+          </a:fontRef>
+        </p:style>
+        <p:txBody>
+          <a:bodyPr rtlCol="0" anchor="ctr" lIns="72000" rIns="36000" tIns="28800" bIns="28800"/>
+          <a:lstStyle/>
+          <a:p>
+            <a:pPr algn="ctr"/>
+            <a:r>
+              <a:rPr sz="1000" b="0">
+                <a:solidFill>
+                  <a:srgbClr val="222222"/>
+                </a:solidFill>
+                <a:ea typeface="Malgun Gothic"/>
+                <a:latin typeface="Malgun Gothic"/>
+              </a:rPr>
+              <a:t>0.7714</a:t>
+            </a:r>
+          </a:p>
+        </p:txBody>
+      </p:sp>
+      <p:sp>
+        <p:nvSpPr>
+          <p:cNvPr id="16" name="Rectangle 15"/>
+          <p:cNvSpPr/>
+          <p:nvPr/>
+        </p:nvSpPr>
+        <p:spPr>
+          <a:xfrm>
+            <a:off x="8856000" y="1746000"/>
+            <a:ext cx="2880000" cy="342000"/>
+          </a:xfrm>
+          <a:prstGeom prst="rect">
+            <a:avLst/>
+          </a:prstGeom>
+          <a:solidFill>
+            <a:srgbClr val="F8F9FB"/>
+          </a:solidFill>
+          <a:ln>
+            <a:solidFill>
+              <a:srgbClr val="CCCCCC"/>
+            </a:solidFill>
+          </a:ln>
+        </p:spPr>
+        <p:style>
+          <a:lnRef idx="1">
+            <a:schemeClr val="accent1"/>
+          </a:lnRef>
+          <a:fillRef idx="3">
+            <a:schemeClr val="accent1"/>
+          </a:fillRef>
+          <a:effectRef idx="2">
+            <a:schemeClr val="accent1"/>
+          </a:effectRef>
+          <a:fontRef idx="minor">
+            <a:schemeClr val="lt1"/>
+          </a:fontRef>
+        </p:style>
+        <p:txBody>
+          <a:bodyPr rtlCol="0" anchor="ctr" lIns="72000" rIns="36000" tIns="28800" bIns="28800"/>
+          <a:lstStyle/>
+          <a:p>
+            <a:pPr algn="ctr"/>
+            <a:r>
+              <a:rPr sz="1000" b="0">
+                <a:solidFill>
+                  <a:srgbClr val="222222"/>
+                </a:solidFill>
+                <a:ea typeface="Malgun Gothic"/>
+                <a:latin typeface="Malgun Gothic"/>
+              </a:rPr>
+              <a:t>Mainstream 표준 (0.70~0.80)</a:t>
+            </a:r>
+          </a:p>
+        </p:txBody>
+      </p:sp>
+      <p:sp>
+        <p:nvSpPr>
+          <p:cNvPr id="17" name="Rectangle 16"/>
+          <p:cNvSpPr/>
+          <p:nvPr/>
+        </p:nvSpPr>
+        <p:spPr>
+          <a:xfrm>
+            <a:off x="360000" y="2088000"/>
+            <a:ext cx="1800000" cy="342000"/>
+          </a:xfrm>
+          <a:prstGeom prst="rect">
+            <a:avLst/>
+          </a:prstGeom>
+          <a:solidFill>
+            <a:srgbClr val="FFFFFF"/>
+          </a:solidFill>
+          <a:ln>
+            <a:solidFill>
+              <a:srgbClr val="CCCCCC"/>
+            </a:solidFill>
+          </a:ln>
+        </p:spPr>
+        <p:style>
+          <a:lnRef idx="1">
+            <a:schemeClr val="accent1"/>
+          </a:lnRef>
+          <a:fillRef idx="3">
+            <a:schemeClr val="accent1"/>
+          </a:fillRef>
+          <a:effectRef idx="2">
+            <a:schemeClr val="accent1"/>
+          </a:effectRef>
+          <a:fontRef idx="minor">
+            <a:schemeClr val="lt1"/>
+          </a:fontRef>
+        </p:style>
+        <p:txBody>
+          <a:bodyPr rtlCol="0" anchor="ctr" lIns="72000" rIns="36000" tIns="28800" bIns="28800"/>
+          <a:lstStyle/>
+          <a:p>
+            <a:pPr algn="ctr"/>
+            <a:r>
+              <a:rPr sz="1000" b="0">
+                <a:solidFill>
+                  <a:srgbClr val="222222"/>
+                </a:solidFill>
+                <a:ea typeface="Malgun Gothic"/>
+                <a:latin typeface="Malgun Gothic"/>
+              </a:rPr>
+              <a:t>해석 일관성</a:t>
+            </a:r>
+          </a:p>
+        </p:txBody>
+      </p:sp>
+      <p:sp>
+        <p:nvSpPr>
+          <p:cNvPr id="18" name="Rectangle 17"/>
+          <p:cNvSpPr/>
+          <p:nvPr/>
+        </p:nvSpPr>
+        <p:spPr>
+          <a:xfrm>
+            <a:off x="2160000" y="2088000"/>
+            <a:ext cx="2520000" cy="342000"/>
+          </a:xfrm>
+          <a:prstGeom prst="rect">
+            <a:avLst/>
+          </a:prstGeom>
+          <a:solidFill>
+            <a:srgbClr val="FFFFFF"/>
+          </a:solidFill>
+          <a:ln>
+            <a:solidFill>
+              <a:srgbClr val="CCCCCC"/>
+            </a:solidFill>
+          </a:ln>
+        </p:spPr>
+        <p:style>
+          <a:lnRef idx="1">
+            <a:schemeClr val="accent1"/>
+          </a:lnRef>
+          <a:fillRef idx="3">
+            <a:schemeClr val="accent1"/>
+          </a:fillRef>
+          <a:effectRef idx="2">
+            <a:schemeClr val="accent1"/>
+          </a:effectRef>
+          <a:fontRef idx="minor">
+            <a:schemeClr val="lt1"/>
+          </a:fontRef>
+        </p:style>
+        <p:txBody>
+          <a:bodyPr rtlCol="0" anchor="ctr" lIns="72000" rIns="36000" tIns="28800" bIns="28800"/>
+          <a:lstStyle/>
+          <a:p>
+            <a:pPr algn="ctr"/>
+            <a:r>
+              <a:rPr sz="1000" b="0">
+                <a:solidFill>
+                  <a:srgbClr val="222222"/>
+                </a:solidFill>
+                <a:ea typeface="Malgun Gothic"/>
+                <a:latin typeface="Malgun Gothic"/>
+              </a:rPr>
+              <a:t>SHAP × Attn ρ</a:t>
+            </a:r>
+          </a:p>
+        </p:txBody>
+      </p:sp>
+      <p:sp>
+        <p:nvSpPr>
+          <p:cNvPr id="19" name="Rectangle 18"/>
+          <p:cNvSpPr/>
+          <p:nvPr/>
+        </p:nvSpPr>
+        <p:spPr>
+          <a:xfrm>
+            <a:off x="4680000" y="2088000"/>
+            <a:ext cx="2088000" cy="342000"/>
+          </a:xfrm>
+          <a:prstGeom prst="rect">
+            <a:avLst/>
+          </a:prstGeom>
+          <a:solidFill>
+            <a:srgbClr val="FFFFFF"/>
+          </a:solidFill>
+          <a:ln>
+            <a:solidFill>
+              <a:srgbClr val="CCCCCC"/>
+            </a:solidFill>
+          </a:ln>
+        </p:spPr>
+        <p:style>
+          <a:lnRef idx="1">
+            <a:schemeClr val="accent1"/>
+          </a:lnRef>
+          <a:fillRef idx="3">
+            <a:schemeClr val="accent1"/>
+          </a:fillRef>
+          <a:effectRef idx="2">
+            <a:schemeClr val="accent1"/>
+          </a:effectRef>
+          <a:fontRef idx="minor">
+            <a:schemeClr val="lt1"/>
+          </a:fontRef>
+        </p:style>
+        <p:txBody>
+          <a:bodyPr rtlCol="0" anchor="ctr" lIns="72000" rIns="36000" tIns="28800" bIns="28800"/>
+          <a:lstStyle/>
+          <a:p>
+            <a:pPr algn="ctr"/>
+            <a:r>
+              <a:rPr sz="1000" b="0">
+                <a:solidFill>
+                  <a:srgbClr val="222222"/>
+                </a:solidFill>
+                <a:ea typeface="Malgun Gothic"/>
+                <a:latin typeface="Malgun Gothic"/>
+              </a:rPr>
+              <a:t>0.117</a:t>
+            </a:r>
+          </a:p>
+        </p:txBody>
+      </p:sp>
+      <p:sp>
+        <p:nvSpPr>
+          <p:cNvPr id="20" name="Rectangle 19"/>
+          <p:cNvSpPr/>
+          <p:nvPr/>
+        </p:nvSpPr>
+        <p:spPr>
+          <a:xfrm>
+            <a:off x="6768000" y="2088000"/>
+            <a:ext cx="2088000" cy="342000"/>
+          </a:xfrm>
+          <a:prstGeom prst="rect">
+            <a:avLst/>
+          </a:prstGeom>
+          <a:solidFill>
+            <a:srgbClr val="FFFFFF"/>
+          </a:solidFill>
+          <a:ln>
+            <a:solidFill>
+              <a:srgbClr val="CCCCCC"/>
+            </a:solidFill>
+          </a:ln>
+        </p:spPr>
+        <p:style>
+          <a:lnRef idx="1">
+            <a:schemeClr val="accent1"/>
+          </a:lnRef>
+          <a:fillRef idx="3">
+            <a:schemeClr val="accent1"/>
+          </a:fillRef>
+          <a:effectRef idx="2">
+            <a:schemeClr val="accent1"/>
+          </a:effectRef>
+          <a:fontRef idx="minor">
+            <a:schemeClr val="lt1"/>
+          </a:fontRef>
+        </p:style>
+        <p:txBody>
+          <a:bodyPr rtlCol="0" anchor="ctr" lIns="72000" rIns="36000" tIns="28800" bIns="28800"/>
+          <a:lstStyle/>
+          <a:p>
+            <a:pPr algn="ctr"/>
+            <a:r>
+              <a:rPr sz="1000" b="0">
+                <a:solidFill>
+                  <a:srgbClr val="222222"/>
+                </a:solidFill>
+                <a:ea typeface="Malgun Gothic"/>
+                <a:latin typeface="Malgun Gothic"/>
+              </a:rPr>
+              <a:t>0.114</a:t>
+            </a:r>
+          </a:p>
+        </p:txBody>
+      </p:sp>
+      <p:sp>
+        <p:nvSpPr>
+          <p:cNvPr id="21" name="Rectangle 20"/>
+          <p:cNvSpPr/>
+          <p:nvPr/>
+        </p:nvSpPr>
+        <p:spPr>
+          <a:xfrm>
+            <a:off x="8856000" y="2088000"/>
+            <a:ext cx="2880000" cy="342000"/>
+          </a:xfrm>
+          <a:prstGeom prst="rect">
+            <a:avLst/>
+          </a:prstGeom>
+          <a:solidFill>
+            <a:srgbClr val="FFFFFF"/>
+          </a:solidFill>
+          <a:ln>
+            <a:solidFill>
+              <a:srgbClr val="CCCCCC"/>
+            </a:solidFill>
+          </a:ln>
+        </p:spPr>
+        <p:style>
+          <a:lnRef idx="1">
+            <a:schemeClr val="accent1"/>
+          </a:lnRef>
+          <a:fillRef idx="3">
+            <a:schemeClr val="accent1"/>
+          </a:fillRef>
+          <a:effectRef idx="2">
+            <a:schemeClr val="accent1"/>
+          </a:effectRef>
+          <a:fontRef idx="minor">
+            <a:schemeClr val="lt1"/>
+          </a:fontRef>
+        </p:style>
+        <p:txBody>
+          <a:bodyPr rtlCol="0" anchor="ctr" lIns="72000" rIns="36000" tIns="28800" bIns="28800"/>
+          <a:lstStyle/>
+          <a:p>
+            <a:pPr algn="ctr"/>
+            <a:r>
+              <a:rPr sz="1000" b="0">
+                <a:solidFill>
+                  <a:srgbClr val="222222"/>
+                </a:solidFill>
+                <a:ea typeface="Malgun Gothic"/>
+                <a:latin typeface="Malgun Gothic"/>
+              </a:rPr>
+              <a:t>거의 동일 — 메커니즘 일반화 ★</a:t>
+            </a:r>
+          </a:p>
+        </p:txBody>
+      </p:sp>
+      <p:sp>
+        <p:nvSpPr>
+          <p:cNvPr id="22" name="Rectangle 21"/>
+          <p:cNvSpPr/>
+          <p:nvPr/>
+        </p:nvSpPr>
+        <p:spPr>
+          <a:xfrm>
+            <a:off x="360000" y="2430000"/>
+            <a:ext cx="1800000" cy="342000"/>
+          </a:xfrm>
+          <a:prstGeom prst="rect">
+            <a:avLst/>
+          </a:prstGeom>
+          <a:solidFill>
+            <a:srgbClr val="F8F9FB"/>
+          </a:solidFill>
+          <a:ln>
+            <a:solidFill>
+              <a:srgbClr val="CCCCCC"/>
+            </a:solidFill>
+          </a:ln>
+        </p:spPr>
+        <p:style>
+          <a:lnRef idx="1">
+            <a:schemeClr val="accent1"/>
+          </a:lnRef>
+          <a:fillRef idx="3">
+            <a:schemeClr val="accent1"/>
+          </a:fillRef>
+          <a:effectRef idx="2">
+            <a:schemeClr val="accent1"/>
+          </a:effectRef>
+          <a:fontRef idx="minor">
+            <a:schemeClr val="lt1"/>
+          </a:fontRef>
+        </p:style>
+        <p:txBody>
+          <a:bodyPr rtlCol="0" anchor="ctr" lIns="72000" rIns="36000" tIns="28800" bIns="28800"/>
+          <a:lstStyle/>
+          <a:p>
+            <a:pPr algn="ctr"/>
+            <a:r>
+              <a:rPr sz="1000" b="0">
+                <a:solidFill>
+                  <a:srgbClr val="222222"/>
+                </a:solidFill>
+                <a:ea typeface="Malgun Gothic"/>
+                <a:latin typeface="Malgun Gothic"/>
+              </a:rPr>
+              <a:t>환각률 (차원 B)</a:t>
+            </a:r>
+          </a:p>
+        </p:txBody>
+      </p:sp>
+      <p:sp>
+        <p:nvSpPr>
+          <p:cNvPr id="23" name="Rectangle 22"/>
+          <p:cNvSpPr/>
+          <p:nvPr/>
+        </p:nvSpPr>
+        <p:spPr>
+          <a:xfrm>
+            <a:off x="2160000" y="2430000"/>
+            <a:ext cx="2520000" cy="342000"/>
+          </a:xfrm>
+          <a:prstGeom prst="rect">
+            <a:avLst/>
+          </a:prstGeom>
+          <a:solidFill>
+            <a:srgbClr val="F8F9FB"/>
+          </a:solidFill>
+          <a:ln>
+            <a:solidFill>
+              <a:srgbClr val="CCCCCC"/>
+            </a:solidFill>
+          </a:ln>
+        </p:spPr>
+        <p:style>
+          <a:lnRef idx="1">
+            <a:schemeClr val="accent1"/>
+          </a:lnRef>
+          <a:fillRef idx="3">
+            <a:schemeClr val="accent1"/>
+          </a:fillRef>
+          <a:effectRef idx="2">
+            <a:schemeClr val="accent1"/>
+          </a:effectRef>
+          <a:fontRef idx="minor">
+            <a:schemeClr val="lt1"/>
+          </a:fontRef>
+        </p:style>
+        <p:txBody>
+          <a:bodyPr rtlCol="0" anchor="ctr" lIns="72000" rIns="36000" tIns="28800" bIns="28800"/>
+          <a:lstStyle/>
+          <a:p>
+            <a:pPr algn="ctr"/>
+            <a:r>
+              <a:rPr sz="1000" b="0">
+                <a:solidFill>
+                  <a:srgbClr val="222222"/>
+                </a:solidFill>
+                <a:ea typeface="Malgun Gothic"/>
+                <a:latin typeface="Malgun Gothic"/>
+              </a:rPr>
+              <a:t>LLM 변수명 환각</a:t>
+            </a:r>
+          </a:p>
+        </p:txBody>
+      </p:sp>
+      <p:sp>
+        <p:nvSpPr>
+          <p:cNvPr id="24" name="Rectangle 23"/>
+          <p:cNvSpPr/>
+          <p:nvPr/>
+        </p:nvSpPr>
+        <p:spPr>
+          <a:xfrm>
+            <a:off x="4680000" y="2430000"/>
+            <a:ext cx="2088000" cy="342000"/>
+          </a:xfrm>
+          <a:prstGeom prst="rect">
+            <a:avLst/>
+          </a:prstGeom>
+          <a:solidFill>
+            <a:srgbClr val="F8F9FB"/>
+          </a:solidFill>
+          <a:ln>
+            <a:solidFill>
+              <a:srgbClr val="CCCCCC"/>
+            </a:solidFill>
+          </a:ln>
+        </p:spPr>
+        <p:style>
+          <a:lnRef idx="1">
+            <a:schemeClr val="accent1"/>
+          </a:lnRef>
+          <a:fillRef idx="3">
+            <a:schemeClr val="accent1"/>
+          </a:fillRef>
+          <a:effectRef idx="2">
+            <a:schemeClr val="accent1"/>
+          </a:effectRef>
+          <a:fontRef idx="minor">
+            <a:schemeClr val="lt1"/>
+          </a:fontRef>
+        </p:style>
+        <p:txBody>
+          <a:bodyPr rtlCol="0" anchor="ctr" lIns="72000" rIns="36000" tIns="28800" bIns="28800"/>
+          <a:lstStyle/>
+          <a:p>
+            <a:pPr algn="ctr"/>
+            <a:r>
+              <a:rPr sz="1000" b="0">
+                <a:solidFill>
+                  <a:srgbClr val="222222"/>
+                </a:solidFill>
+                <a:ea typeface="Malgun Gothic"/>
+                <a:latin typeface="Malgun Gothic"/>
+              </a:rPr>
+              <a:t>0 / 60</a:t>
+            </a:r>
+          </a:p>
+        </p:txBody>
+      </p:sp>
+      <p:sp>
+        <p:nvSpPr>
+          <p:cNvPr id="25" name="Rectangle 24"/>
+          <p:cNvSpPr/>
+          <p:nvPr/>
+        </p:nvSpPr>
+        <p:spPr>
+          <a:xfrm>
+            <a:off x="6768000" y="2430000"/>
+            <a:ext cx="2088000" cy="342000"/>
+          </a:xfrm>
+          <a:prstGeom prst="rect">
+            <a:avLst/>
+          </a:prstGeom>
+          <a:solidFill>
+            <a:srgbClr val="F8F9FB"/>
+          </a:solidFill>
+          <a:ln>
+            <a:solidFill>
+              <a:srgbClr val="CCCCCC"/>
+            </a:solidFill>
+          </a:ln>
+        </p:spPr>
+        <p:style>
+          <a:lnRef idx="1">
+            <a:schemeClr val="accent1"/>
+          </a:lnRef>
+          <a:fillRef idx="3">
+            <a:schemeClr val="accent1"/>
+          </a:fillRef>
+          <a:effectRef idx="2">
+            <a:schemeClr val="accent1"/>
+          </a:effectRef>
+          <a:fontRef idx="minor">
+            <a:schemeClr val="lt1"/>
+          </a:fontRef>
+        </p:style>
+        <p:txBody>
+          <a:bodyPr rtlCol="0" anchor="ctr" lIns="72000" rIns="36000" tIns="28800" bIns="28800"/>
+          <a:lstStyle/>
+          <a:p>
+            <a:pPr algn="ctr"/>
+            <a:r>
+              <a:rPr sz="1000" b="0">
+                <a:solidFill>
+                  <a:srgbClr val="222222"/>
+                </a:solidFill>
+                <a:ea typeface="Malgun Gothic"/>
+                <a:latin typeface="Malgun Gothic"/>
+              </a:rPr>
+              <a:t>0 / 60</a:t>
+            </a:r>
+          </a:p>
+        </p:txBody>
+      </p:sp>
+      <p:sp>
+        <p:nvSpPr>
+          <p:cNvPr id="26" name="Rectangle 25"/>
+          <p:cNvSpPr/>
+          <p:nvPr/>
+        </p:nvSpPr>
+        <p:spPr>
+          <a:xfrm>
+            <a:off x="8856000" y="2430000"/>
+            <a:ext cx="2880000" cy="342000"/>
+          </a:xfrm>
+          <a:prstGeom prst="rect">
+            <a:avLst/>
+          </a:prstGeom>
+          <a:solidFill>
+            <a:srgbClr val="F8F9FB"/>
+          </a:solidFill>
+          <a:ln>
+            <a:solidFill>
+              <a:srgbClr val="CCCCCC"/>
+            </a:solidFill>
+          </a:ln>
+        </p:spPr>
+        <p:style>
+          <a:lnRef idx="1">
+            <a:schemeClr val="accent1"/>
+          </a:lnRef>
+          <a:fillRef idx="3">
+            <a:schemeClr val="accent1"/>
+          </a:fillRef>
+          <a:effectRef idx="2">
+            <a:schemeClr val="accent1"/>
+          </a:effectRef>
+          <a:fontRef idx="minor">
+            <a:schemeClr val="lt1"/>
+          </a:fontRef>
+        </p:style>
+        <p:txBody>
+          <a:bodyPr rtlCol="0" anchor="ctr" lIns="72000" rIns="36000" tIns="28800" bIns="28800"/>
+          <a:lstStyle/>
+          <a:p>
+            <a:pPr algn="ctr"/>
+            <a:r>
+              <a:rPr sz="1000" b="0">
+                <a:solidFill>
+                  <a:srgbClr val="222222"/>
+                </a:solidFill>
+                <a:ea typeface="Malgun Gothic"/>
+                <a:latin typeface="Malgun Gothic"/>
+              </a:rPr>
+              <a:t>Hard Constraints 견고</a:t>
+            </a:r>
+          </a:p>
+        </p:txBody>
+      </p:sp>
+      <p:sp>
+        <p:nvSpPr>
+          <p:cNvPr id="27" name="Rectangle 26"/>
+          <p:cNvSpPr/>
+          <p:nvPr/>
+        </p:nvSpPr>
+        <p:spPr>
+          <a:xfrm>
+            <a:off x="360000" y="2772000"/>
+            <a:ext cx="1800000" cy="342000"/>
+          </a:xfrm>
+          <a:prstGeom prst="rect">
+            <a:avLst/>
+          </a:prstGeom>
+          <a:solidFill>
+            <a:srgbClr val="FFFFFF"/>
+          </a:solidFill>
+          <a:ln>
+            <a:solidFill>
+              <a:srgbClr val="CCCCCC"/>
+            </a:solidFill>
+          </a:ln>
+        </p:spPr>
+        <p:style>
+          <a:lnRef idx="1">
+            <a:schemeClr val="accent1"/>
+          </a:lnRef>
+          <a:fillRef idx="3">
+            <a:schemeClr val="accent1"/>
+          </a:fillRef>
+          <a:effectRef idx="2">
+            <a:schemeClr val="accent1"/>
+          </a:effectRef>
+          <a:fontRef idx="minor">
+            <a:schemeClr val="lt1"/>
+          </a:fontRef>
+        </p:style>
+        <p:txBody>
+          <a:bodyPr rtlCol="0" anchor="ctr" lIns="72000" rIns="36000" tIns="28800" bIns="28800"/>
+          <a:lstStyle/>
+          <a:p>
+            <a:pPr algn="ctr"/>
+            <a:r>
+              <a:rPr sz="1000" b="0">
+                <a:solidFill>
+                  <a:srgbClr val="222222"/>
+                </a:solidFill>
+                <a:ea typeface="Malgun Gothic"/>
+                <a:latin typeface="Malgun Gothic"/>
+              </a:rPr>
+              <a:t>사실성 (차원 C)</a:t>
+            </a:r>
+          </a:p>
+        </p:txBody>
+      </p:sp>
+      <p:sp>
+        <p:nvSpPr>
+          <p:cNvPr id="28" name="Rectangle 27"/>
+          <p:cNvSpPr/>
+          <p:nvPr/>
+        </p:nvSpPr>
+        <p:spPr>
+          <a:xfrm>
+            <a:off x="2160000" y="2772000"/>
+            <a:ext cx="2520000" cy="342000"/>
+          </a:xfrm>
+          <a:prstGeom prst="rect">
+            <a:avLst/>
+          </a:prstGeom>
+          <a:solidFill>
+            <a:srgbClr val="FFFFFF"/>
+          </a:solidFill>
+          <a:ln>
+            <a:solidFill>
+              <a:srgbClr val="CCCCCC"/>
+            </a:solidFill>
+          </a:ln>
+        </p:spPr>
+        <p:style>
+          <a:lnRef idx="1">
+            <a:schemeClr val="accent1"/>
+          </a:lnRef>
+          <a:fillRef idx="3">
+            <a:schemeClr val="accent1"/>
+          </a:fillRef>
+          <a:effectRef idx="2">
+            <a:schemeClr val="accent1"/>
+          </a:effectRef>
+          <a:fontRef idx="minor">
+            <a:schemeClr val="lt1"/>
+          </a:fontRef>
+        </p:style>
+        <p:txBody>
+          <a:bodyPr rtlCol="0" anchor="ctr" lIns="72000" rIns="36000" tIns="28800" bIns="28800"/>
+          <a:lstStyle/>
+          <a:p>
+            <a:pPr algn="ctr"/>
+            <a:r>
+              <a:rPr sz="1000" b="0">
+                <a:solidFill>
+                  <a:srgbClr val="222222"/>
+                </a:solidFill>
+                <a:ea typeface="Malgun Gothic"/>
+                <a:latin typeface="Malgun Gothic"/>
+              </a:rPr>
+              <a:t>NLI Entailment (fusion)</a:t>
+            </a:r>
+          </a:p>
+        </p:txBody>
+      </p:sp>
+      <p:sp>
+        <p:nvSpPr>
+          <p:cNvPr id="29" name="Rectangle 28"/>
+          <p:cNvSpPr/>
+          <p:nvPr/>
+        </p:nvSpPr>
+        <p:spPr>
+          <a:xfrm>
+            <a:off x="4680000" y="2772000"/>
+            <a:ext cx="2088000" cy="342000"/>
+          </a:xfrm>
+          <a:prstGeom prst="rect">
+            <a:avLst/>
+          </a:prstGeom>
+          <a:solidFill>
+            <a:srgbClr val="FFFFFF"/>
+          </a:solidFill>
+          <a:ln>
+            <a:solidFill>
+              <a:srgbClr val="CCCCCC"/>
+            </a:solidFill>
+          </a:ln>
+        </p:spPr>
+        <p:style>
+          <a:lnRef idx="1">
+            <a:schemeClr val="accent1"/>
+          </a:lnRef>
+          <a:fillRef idx="3">
+            <a:schemeClr val="accent1"/>
+          </a:fillRef>
+          <a:effectRef idx="2">
+            <a:schemeClr val="accent1"/>
+          </a:effectRef>
+          <a:fontRef idx="minor">
+            <a:schemeClr val="lt1"/>
+          </a:fontRef>
+        </p:style>
+        <p:txBody>
+          <a:bodyPr rtlCol="0" anchor="ctr" lIns="72000" rIns="36000" tIns="28800" bIns="28800"/>
+          <a:lstStyle/>
+          <a:p>
+            <a:pPr algn="ctr"/>
+            <a:r>
+              <a:rPr sz="1000" b="0">
+                <a:solidFill>
+                  <a:srgbClr val="222222"/>
+                </a:solidFill>
+                <a:ea typeface="Malgun Gothic"/>
+                <a:latin typeface="Malgun Gothic"/>
+              </a:rPr>
+              <a:t>0.625</a:t>
+            </a:r>
+          </a:p>
+        </p:txBody>
+      </p:sp>
+      <p:sp>
+        <p:nvSpPr>
+          <p:cNvPr id="30" name="Rectangle 29"/>
+          <p:cNvSpPr/>
+          <p:nvPr/>
+        </p:nvSpPr>
+        <p:spPr>
+          <a:xfrm>
+            <a:off x="6768000" y="2772000"/>
+            <a:ext cx="2088000" cy="342000"/>
+          </a:xfrm>
+          <a:prstGeom prst="rect">
+            <a:avLst/>
+          </a:prstGeom>
+          <a:solidFill>
+            <a:srgbClr val="FFFFFF"/>
+          </a:solidFill>
+          <a:ln>
+            <a:solidFill>
+              <a:srgbClr val="CCCCCC"/>
+            </a:solidFill>
+          </a:ln>
+        </p:spPr>
+        <p:style>
+          <a:lnRef idx="1">
+            <a:schemeClr val="accent1"/>
+          </a:lnRef>
+          <a:fillRef idx="3">
+            <a:schemeClr val="accent1"/>
+          </a:fillRef>
+          <a:effectRef idx="2">
+            <a:schemeClr val="accent1"/>
+          </a:effectRef>
+          <a:fontRef idx="minor">
+            <a:schemeClr val="lt1"/>
+          </a:fontRef>
+        </p:style>
+        <p:txBody>
+          <a:bodyPr rtlCol="0" anchor="ctr" lIns="72000" rIns="36000" tIns="28800" bIns="28800"/>
+          <a:lstStyle/>
+          <a:p>
+            <a:pPr algn="ctr"/>
+            <a:r>
+              <a:rPr sz="1000" b="0">
+                <a:solidFill>
+                  <a:srgbClr val="222222"/>
+                </a:solidFill>
+                <a:ea typeface="Malgun Gothic"/>
+                <a:latin typeface="Malgun Gothic"/>
+              </a:rPr>
+              <a:t>0.711</a:t>
+            </a:r>
+          </a:p>
+        </p:txBody>
+      </p:sp>
+      <p:sp>
+        <p:nvSpPr>
+          <p:cNvPr id="31" name="Rectangle 30"/>
+          <p:cNvSpPr/>
+          <p:nvPr/>
+        </p:nvSpPr>
+        <p:spPr>
+          <a:xfrm>
+            <a:off x="8856000" y="2772000"/>
+            <a:ext cx="2880000" cy="342000"/>
+          </a:xfrm>
+          <a:prstGeom prst="rect">
+            <a:avLst/>
+          </a:prstGeom>
+          <a:solidFill>
+            <a:srgbClr val="FFFFFF"/>
+          </a:solidFill>
+          <a:ln>
+            <a:solidFill>
+              <a:srgbClr val="CCCCCC"/>
+            </a:solidFill>
+          </a:ln>
+        </p:spPr>
+        <p:style>
+          <a:lnRef idx="1">
+            <a:schemeClr val="accent1"/>
+          </a:lnRef>
+          <a:fillRef idx="3">
+            <a:schemeClr val="accent1"/>
+          </a:fillRef>
+          <a:effectRef idx="2">
+            <a:schemeClr val="accent1"/>
+          </a:effectRef>
+          <a:fontRef idx="minor">
+            <a:schemeClr val="lt1"/>
+          </a:fontRef>
+        </p:style>
+        <p:txBody>
+          <a:bodyPr rtlCol="0" anchor="ctr" lIns="72000" rIns="36000" tIns="28800" bIns="28800"/>
+          <a:lstStyle/>
+          <a:p>
+            <a:pPr algn="ctr"/>
+            <a:r>
+              <a:rPr sz="1000" b="0">
+                <a:solidFill>
+                  <a:srgbClr val="222222"/>
+                </a:solidFill>
+                <a:ea typeface="Malgun Gothic"/>
+                <a:latin typeface="Malgun Gothic"/>
+              </a:rPr>
+              <a:t>4-mode 1 위 / 단조증가 ★</a:t>
+            </a:r>
+          </a:p>
+        </p:txBody>
+      </p:sp>
+      <p:sp>
+        <p:nvSpPr>
+          <p:cNvPr id="32" name="Rectangle 31"/>
+          <p:cNvSpPr/>
+          <p:nvPr/>
+        </p:nvSpPr>
+        <p:spPr>
+          <a:xfrm>
+            <a:off x="360000" y="3114000"/>
+            <a:ext cx="1800000" cy="342000"/>
+          </a:xfrm>
+          <a:prstGeom prst="rect">
+            <a:avLst/>
+          </a:prstGeom>
+          <a:solidFill>
+            <a:srgbClr val="F8F9FB"/>
+          </a:solidFill>
+          <a:ln>
+            <a:solidFill>
+              <a:srgbClr val="CCCCCC"/>
+            </a:solidFill>
+          </a:ln>
+        </p:spPr>
+        <p:style>
+          <a:lnRef idx="1">
+            <a:schemeClr val="accent1"/>
+          </a:lnRef>
+          <a:fillRef idx="3">
+            <a:schemeClr val="accent1"/>
+          </a:fillRef>
+          <a:effectRef idx="2">
+            <a:schemeClr val="accent1"/>
+          </a:effectRef>
+          <a:fontRef idx="minor">
+            <a:schemeClr val="lt1"/>
+          </a:fontRef>
+        </p:style>
+        <p:txBody>
+          <a:bodyPr rtlCol="0" anchor="ctr" lIns="72000" rIns="36000" tIns="28800" bIns="28800"/>
+          <a:lstStyle/>
+          <a:p>
+            <a:pPr algn="ctr"/>
+            <a:r>
+              <a:rPr sz="1000" b="0">
+                <a:solidFill>
+                  <a:srgbClr val="222222"/>
+                </a:solidFill>
+                <a:ea typeface="Malgun Gothic"/>
+                <a:latin typeface="Malgun Gothic"/>
+              </a:rPr>
+              <a:t>값 정확성</a:t>
+            </a:r>
+          </a:p>
+        </p:txBody>
+      </p:sp>
+      <p:sp>
+        <p:nvSpPr>
+          <p:cNvPr id="33" name="Rectangle 32"/>
+          <p:cNvSpPr/>
+          <p:nvPr/>
+        </p:nvSpPr>
+        <p:spPr>
+          <a:xfrm>
+            <a:off x="2160000" y="3114000"/>
+            <a:ext cx="2520000" cy="342000"/>
+          </a:xfrm>
+          <a:prstGeom prst="rect">
+            <a:avLst/>
+          </a:prstGeom>
+          <a:solidFill>
+            <a:srgbClr val="F8F9FB"/>
+          </a:solidFill>
+          <a:ln>
+            <a:solidFill>
+              <a:srgbClr val="CCCCCC"/>
+            </a:solidFill>
+          </a:ln>
+        </p:spPr>
+        <p:style>
+          <a:lnRef idx="1">
+            <a:schemeClr val="accent1"/>
+          </a:lnRef>
+          <a:fillRef idx="3">
+            <a:schemeClr val="accent1"/>
+          </a:fillRef>
+          <a:effectRef idx="2">
+            <a:schemeClr val="accent1"/>
+          </a:effectRef>
+          <a:fontRef idx="minor">
+            <a:schemeClr val="lt1"/>
+          </a:fontRef>
+        </p:style>
+        <p:txBody>
+          <a:bodyPr rtlCol="0" anchor="ctr" lIns="72000" rIns="36000" tIns="28800" bIns="28800"/>
+          <a:lstStyle/>
+          <a:p>
+            <a:pPr algn="ctr"/>
+            <a:r>
+              <a:rPr sz="1000" b="0">
+                <a:solidFill>
+                  <a:srgbClr val="222222"/>
+                </a:solidFill>
+                <a:ea typeface="Malgun Gothic"/>
+                <a:latin typeface="Malgun Gothic"/>
+              </a:rPr>
+              <a:t>Value Match (fusion)</a:t>
+            </a:r>
+          </a:p>
+        </p:txBody>
+      </p:sp>
+      <p:sp>
+        <p:nvSpPr>
+          <p:cNvPr id="34" name="Rectangle 33"/>
+          <p:cNvSpPr/>
+          <p:nvPr/>
+        </p:nvSpPr>
+        <p:spPr>
+          <a:xfrm>
+            <a:off x="4680000" y="3114000"/>
+            <a:ext cx="2088000" cy="342000"/>
+          </a:xfrm>
+          <a:prstGeom prst="rect">
+            <a:avLst/>
+          </a:prstGeom>
+          <a:solidFill>
+            <a:srgbClr val="F8F9FB"/>
+          </a:solidFill>
+          <a:ln>
+            <a:solidFill>
+              <a:srgbClr val="CCCCCC"/>
+            </a:solidFill>
+          </a:ln>
+        </p:spPr>
+        <p:style>
+          <a:lnRef idx="1">
+            <a:schemeClr val="accent1"/>
+          </a:lnRef>
+          <a:fillRef idx="3">
+            <a:schemeClr val="accent1"/>
+          </a:fillRef>
+          <a:effectRef idx="2">
+            <a:schemeClr val="accent1"/>
+          </a:effectRef>
+          <a:fontRef idx="minor">
+            <a:schemeClr val="lt1"/>
+          </a:fontRef>
+        </p:style>
+        <p:txBody>
+          <a:bodyPr rtlCol="0" anchor="ctr" lIns="72000" rIns="36000" tIns="28800" bIns="28800"/>
+          <a:lstStyle/>
+          <a:p>
+            <a:pPr algn="ctr"/>
+            <a:r>
+              <a:rPr sz="1000" b="0">
+                <a:solidFill>
+                  <a:srgbClr val="222222"/>
+                </a:solidFill>
+                <a:ea typeface="Malgun Gothic"/>
+                <a:latin typeface="Malgun Gothic"/>
+              </a:rPr>
+              <a:t>0.90</a:t>
+            </a:r>
+          </a:p>
+        </p:txBody>
+      </p:sp>
+      <p:sp>
+        <p:nvSpPr>
+          <p:cNvPr id="35" name="Rectangle 34"/>
+          <p:cNvSpPr/>
+          <p:nvPr/>
+        </p:nvSpPr>
+        <p:spPr>
+          <a:xfrm>
+            <a:off x="6768000" y="3114000"/>
+            <a:ext cx="2088000" cy="342000"/>
+          </a:xfrm>
+          <a:prstGeom prst="rect">
+            <a:avLst/>
+          </a:prstGeom>
+          <a:solidFill>
+            <a:srgbClr val="F8F9FB"/>
+          </a:solidFill>
+          <a:ln>
+            <a:solidFill>
+              <a:srgbClr val="CCCCCC"/>
+            </a:solidFill>
+          </a:ln>
+        </p:spPr>
+        <p:style>
+          <a:lnRef idx="1">
+            <a:schemeClr val="accent1"/>
+          </a:lnRef>
+          <a:fillRef idx="3">
+            <a:schemeClr val="accent1"/>
+          </a:fillRef>
+          <a:effectRef idx="2">
+            <a:schemeClr val="accent1"/>
+          </a:effectRef>
+          <a:fontRef idx="minor">
+            <a:schemeClr val="lt1"/>
+          </a:fontRef>
+        </p:style>
+        <p:txBody>
+          <a:bodyPr rtlCol="0" anchor="ctr" lIns="72000" rIns="36000" tIns="28800" bIns="28800"/>
+          <a:lstStyle/>
+          <a:p>
+            <a:pPr algn="ctr"/>
+            <a:r>
+              <a:rPr sz="1000" b="0">
+                <a:solidFill>
+                  <a:srgbClr val="222222"/>
+                </a:solidFill>
+                <a:ea typeface="Malgun Gothic"/>
+                <a:latin typeface="Malgun Gothic"/>
+              </a:rPr>
+              <a:t>0.88</a:t>
+            </a:r>
+          </a:p>
+        </p:txBody>
+      </p:sp>
+      <p:sp>
+        <p:nvSpPr>
+          <p:cNvPr id="36" name="Rectangle 35"/>
+          <p:cNvSpPr/>
+          <p:nvPr/>
+        </p:nvSpPr>
+        <p:spPr>
+          <a:xfrm>
+            <a:off x="8856000" y="3114000"/>
+            <a:ext cx="2880000" cy="342000"/>
+          </a:xfrm>
+          <a:prstGeom prst="rect">
+            <a:avLst/>
+          </a:prstGeom>
+          <a:solidFill>
+            <a:srgbClr val="F8F9FB"/>
+          </a:solidFill>
+          <a:ln>
+            <a:solidFill>
+              <a:srgbClr val="CCCCCC"/>
+            </a:solidFill>
+          </a:ln>
+        </p:spPr>
+        <p:style>
+          <a:lnRef idx="1">
+            <a:schemeClr val="accent1"/>
+          </a:lnRef>
+          <a:fillRef idx="3">
+            <a:schemeClr val="accent1"/>
+          </a:fillRef>
+          <a:effectRef idx="2">
+            <a:schemeClr val="accent1"/>
+          </a:effectRef>
+          <a:fontRef idx="minor">
+            <a:schemeClr val="lt1"/>
+          </a:fontRef>
+        </p:style>
+        <p:txBody>
+          <a:bodyPr rtlCol="0" anchor="ctr" lIns="72000" rIns="36000" tIns="28800" bIns="28800"/>
+          <a:lstStyle/>
+          <a:p>
+            <a:pPr algn="ctr"/>
+            <a:r>
+              <a:rPr sz="1000" b="0">
+                <a:solidFill>
+                  <a:srgbClr val="222222"/>
+                </a:solidFill>
+                <a:ea typeface="Malgun Gothic"/>
+                <a:latin typeface="Malgun Gothic"/>
+              </a:rPr>
+              <a:t>4-mode 1 위 (0.59 → 0.90)</a:t>
+            </a:r>
+          </a:p>
+        </p:txBody>
+      </p:sp>
+      <p:sp>
+        <p:nvSpPr>
+          <p:cNvPr id="37" name="Rectangle 36"/>
+          <p:cNvSpPr/>
+          <p:nvPr/>
+        </p:nvSpPr>
+        <p:spPr>
+          <a:xfrm>
+            <a:off x="360000" y="3456000"/>
+            <a:ext cx="1800000" cy="342000"/>
+          </a:xfrm>
+          <a:prstGeom prst="rect">
+            <a:avLst/>
+          </a:prstGeom>
+          <a:solidFill>
+            <a:srgbClr val="FFFFFF"/>
+          </a:solidFill>
+          <a:ln>
+            <a:solidFill>
+              <a:srgbClr val="CCCCCC"/>
+            </a:solidFill>
+          </a:ln>
+        </p:spPr>
+        <p:style>
+          <a:lnRef idx="1">
+            <a:schemeClr val="accent1"/>
+          </a:lnRef>
+          <a:fillRef idx="3">
+            <a:schemeClr val="accent1"/>
+          </a:fillRef>
+          <a:effectRef idx="2">
+            <a:schemeClr val="accent1"/>
+          </a:effectRef>
+          <a:fontRef idx="minor">
+            <a:schemeClr val="lt1"/>
+          </a:fontRef>
+        </p:style>
+        <p:txBody>
+          <a:bodyPr rtlCol="0" anchor="ctr" lIns="72000" rIns="36000" tIns="28800" bIns="28800"/>
+          <a:lstStyle/>
+          <a:p>
+            <a:pPr algn="ctr"/>
+            <a:r>
+              <a:rPr sz="1000" b="0">
+                <a:solidFill>
+                  <a:srgbClr val="222222"/>
+                </a:solidFill>
+                <a:ea typeface="Malgun Gothic"/>
+                <a:latin typeface="Malgun Gothic"/>
+              </a:rPr>
+              <a:t>충실성</a:t>
+            </a:r>
+          </a:p>
+        </p:txBody>
+      </p:sp>
+      <p:sp>
+        <p:nvSpPr>
+          <p:cNvPr id="38" name="Rectangle 37"/>
+          <p:cNvSpPr/>
+          <p:nvPr/>
+        </p:nvSpPr>
+        <p:spPr>
+          <a:xfrm>
+            <a:off x="2160000" y="3456000"/>
+            <a:ext cx="2520000" cy="342000"/>
+          </a:xfrm>
+          <a:prstGeom prst="rect">
+            <a:avLst/>
+          </a:prstGeom>
+          <a:solidFill>
+            <a:srgbClr val="FFFFFF"/>
+          </a:solidFill>
+          <a:ln>
+            <a:solidFill>
+              <a:srgbClr val="CCCCCC"/>
+            </a:solidFill>
+          </a:ln>
+        </p:spPr>
+        <p:style>
+          <a:lnRef idx="1">
+            <a:schemeClr val="accent1"/>
+          </a:lnRef>
+          <a:fillRef idx="3">
+            <a:schemeClr val="accent1"/>
+          </a:fillRef>
+          <a:effectRef idx="2">
+            <a:schemeClr val="accent1"/>
+          </a:effectRef>
+          <a:fontRef idx="minor">
+            <a:schemeClr val="lt1"/>
+          </a:fontRef>
+        </p:style>
+        <p:txBody>
+          <a:bodyPr rtlCol="0" anchor="ctr" lIns="72000" rIns="36000" tIns="28800" bIns="28800"/>
+          <a:lstStyle/>
+          <a:p>
+            <a:pPr algn="ctr"/>
+            <a:r>
+              <a:rPr sz="1000" b="0">
+                <a:solidFill>
+                  <a:srgbClr val="222222"/>
+                </a:solidFill>
+                <a:ea typeface="Malgun Gothic"/>
+                <a:latin typeface="Malgun Gothic"/>
+              </a:rPr>
+              <a:t>G-Eval Completeness 1 위</a:t>
+            </a:r>
+          </a:p>
+        </p:txBody>
+      </p:sp>
+      <p:sp>
+        <p:nvSpPr>
+          <p:cNvPr id="39" name="Rectangle 38"/>
+          <p:cNvSpPr/>
+          <p:nvPr/>
+        </p:nvSpPr>
+        <p:spPr>
+          <a:xfrm>
+            <a:off x="4680000" y="3456000"/>
+            <a:ext cx="2088000" cy="342000"/>
+          </a:xfrm>
+          <a:prstGeom prst="rect">
+            <a:avLst/>
+          </a:prstGeom>
+          <a:solidFill>
+            <a:srgbClr val="FFFFFF"/>
+          </a:solidFill>
+          <a:ln>
+            <a:solidFill>
+              <a:srgbClr val="CCCCCC"/>
+            </a:solidFill>
+          </a:ln>
+        </p:spPr>
+        <p:style>
+          <a:lnRef idx="1">
+            <a:schemeClr val="accent1"/>
+          </a:lnRef>
+          <a:fillRef idx="3">
+            <a:schemeClr val="accent1"/>
+          </a:fillRef>
+          <a:effectRef idx="2">
+            <a:schemeClr val="accent1"/>
+          </a:effectRef>
+          <a:fontRef idx="minor">
+            <a:schemeClr val="lt1"/>
+          </a:fontRef>
+        </p:style>
+        <p:txBody>
+          <a:bodyPr rtlCol="0" anchor="ctr" lIns="72000" rIns="36000" tIns="28800" bIns="28800"/>
+          <a:lstStyle/>
+          <a:p>
+            <a:pPr algn="ctr"/>
+            <a:r>
+              <a:rPr sz="1000" b="0">
+                <a:solidFill>
+                  <a:srgbClr val="222222"/>
+                </a:solidFill>
+                <a:ea typeface="Malgun Gothic"/>
+                <a:latin typeface="Malgun Gothic"/>
+              </a:rPr>
+              <a:t>fusion 4.82</a:t>
+            </a:r>
+          </a:p>
+        </p:txBody>
+      </p:sp>
+      <p:sp>
+        <p:nvSpPr>
+          <p:cNvPr id="40" name="Rectangle 39"/>
+          <p:cNvSpPr/>
+          <p:nvPr/>
+        </p:nvSpPr>
+        <p:spPr>
+          <a:xfrm>
+            <a:off x="6768000" y="3456000"/>
+            <a:ext cx="2088000" cy="342000"/>
+          </a:xfrm>
+          <a:prstGeom prst="rect">
+            <a:avLst/>
+          </a:prstGeom>
+          <a:solidFill>
+            <a:srgbClr val="FFFFFF"/>
+          </a:solidFill>
+          <a:ln>
+            <a:solidFill>
+              <a:srgbClr val="CCCCCC"/>
+            </a:solidFill>
+          </a:ln>
+        </p:spPr>
+        <p:style>
+          <a:lnRef idx="1">
+            <a:schemeClr val="accent1"/>
+          </a:lnRef>
+          <a:fillRef idx="3">
+            <a:schemeClr val="accent1"/>
+          </a:fillRef>
+          <a:effectRef idx="2">
+            <a:schemeClr val="accent1"/>
+          </a:effectRef>
+          <a:fontRef idx="minor">
+            <a:schemeClr val="lt1"/>
+          </a:fontRef>
+        </p:style>
+        <p:txBody>
+          <a:bodyPr rtlCol="0" anchor="ctr" lIns="72000" rIns="36000" tIns="28800" bIns="28800"/>
+          <a:lstStyle/>
+          <a:p>
+            <a:pPr algn="ctr"/>
+            <a:r>
+              <a:rPr sz="1000" b="0">
+                <a:solidFill>
+                  <a:srgbClr val="222222"/>
+                </a:solidFill>
+                <a:ea typeface="Malgun Gothic"/>
+                <a:latin typeface="Malgun Gothic"/>
+              </a:rPr>
+              <a:t>generic_rag 4.58</a:t>
+            </a:r>
+          </a:p>
+        </p:txBody>
+      </p:sp>
+      <p:sp>
+        <p:nvSpPr>
+          <p:cNvPr id="41" name="Rectangle 40"/>
+          <p:cNvSpPr/>
+          <p:nvPr/>
+        </p:nvSpPr>
+        <p:spPr>
+          <a:xfrm>
+            <a:off x="8856000" y="3456000"/>
+            <a:ext cx="2880000" cy="342000"/>
+          </a:xfrm>
+          <a:prstGeom prst="rect">
+            <a:avLst/>
+          </a:prstGeom>
+          <a:solidFill>
+            <a:srgbClr val="FFFFFF"/>
+          </a:solidFill>
+          <a:ln>
+            <a:solidFill>
+              <a:srgbClr val="CCCCCC"/>
+            </a:solidFill>
+          </a:ln>
+        </p:spPr>
+        <p:style>
+          <a:lnRef idx="1">
+            <a:schemeClr val="accent1"/>
+          </a:lnRef>
+          <a:fillRef idx="3">
+            <a:schemeClr val="accent1"/>
+          </a:fillRef>
+          <a:effectRef idx="2">
+            <a:schemeClr val="accent1"/>
+          </a:effectRef>
+          <a:fontRef idx="minor">
+            <a:schemeClr val="lt1"/>
+          </a:fontRef>
+        </p:style>
+        <p:txBody>
+          <a:bodyPr rtlCol="0" anchor="ctr" lIns="72000" rIns="36000" tIns="28800" bIns="28800"/>
+          <a:lstStyle/>
+          <a:p>
+            <a:pPr algn="ctr"/>
+            <a:r>
+              <a:rPr sz="1000" b="0">
+                <a:solidFill>
+                  <a:srgbClr val="222222"/>
+                </a:solidFill>
+                <a:ea typeface="Malgun Gothic"/>
+                <a:latin typeface="Malgun Gothic"/>
+              </a:rPr>
+              <a:t>데이터 복잡도 의존 ⚠</a:t>
+            </a:r>
+          </a:p>
+        </p:txBody>
+      </p:sp>
+      <p:sp>
+        <p:nvSpPr>
+          <p:cNvPr id="42" name="Rectangle 41"/>
+          <p:cNvSpPr/>
+          <p:nvPr/>
+        </p:nvSpPr>
+        <p:spPr>
+          <a:xfrm>
+            <a:off x="360000" y="3798000"/>
+            <a:ext cx="1800000" cy="342000"/>
+          </a:xfrm>
+          <a:prstGeom prst="rect">
+            <a:avLst/>
+          </a:prstGeom>
+          <a:solidFill>
+            <a:srgbClr val="F8F9FB"/>
+          </a:solidFill>
+          <a:ln>
+            <a:solidFill>
+              <a:srgbClr val="CCCCCC"/>
+            </a:solidFill>
+          </a:ln>
+        </p:spPr>
+        <p:style>
+          <a:lnRef idx="1">
+            <a:schemeClr val="accent1"/>
+          </a:lnRef>
+          <a:fillRef idx="3">
+            <a:schemeClr val="accent1"/>
+          </a:fillRef>
+          <a:effectRef idx="2">
+            <a:schemeClr val="accent1"/>
+          </a:effectRef>
+          <a:fontRef idx="minor">
+            <a:schemeClr val="lt1"/>
+          </a:fontRef>
+        </p:style>
+        <p:txBody>
+          <a:bodyPr rtlCol="0" anchor="ctr" lIns="72000" rIns="36000" tIns="28800" bIns="28800"/>
+          <a:lstStyle/>
+          <a:p>
+            <a:pPr algn="ctr"/>
+            <a:r>
+              <a:rPr sz="1000" b="0">
+                <a:solidFill>
+                  <a:srgbClr val="222222"/>
+                </a:solidFill>
+                <a:ea typeface="Malgun Gothic"/>
+                <a:latin typeface="Malgun Gothic"/>
+              </a:rPr>
+              <a:t>사람 친화성</a:t>
+            </a:r>
+          </a:p>
+        </p:txBody>
+      </p:sp>
+      <p:sp>
+        <p:nvSpPr>
+          <p:cNvPr id="43" name="Rectangle 42"/>
+          <p:cNvSpPr/>
+          <p:nvPr/>
+        </p:nvSpPr>
+        <p:spPr>
+          <a:xfrm>
+            <a:off x="2160000" y="3798000"/>
+            <a:ext cx="2520000" cy="342000"/>
+          </a:xfrm>
+          <a:prstGeom prst="rect">
+            <a:avLst/>
+          </a:prstGeom>
+          <a:solidFill>
+            <a:srgbClr val="F8F9FB"/>
+          </a:solidFill>
+          <a:ln>
+            <a:solidFill>
+              <a:srgbClr val="CCCCCC"/>
+            </a:solidFill>
+          </a:ln>
+        </p:spPr>
+        <p:style>
+          <a:lnRef idx="1">
+            <a:schemeClr val="accent1"/>
+          </a:lnRef>
+          <a:fillRef idx="3">
+            <a:schemeClr val="accent1"/>
+          </a:fillRef>
+          <a:effectRef idx="2">
+            <a:schemeClr val="accent1"/>
+          </a:effectRef>
+          <a:fontRef idx="minor">
+            <a:schemeClr val="lt1"/>
+          </a:fontRef>
+        </p:style>
+        <p:txBody>
+          <a:bodyPr rtlCol="0" anchor="ctr" lIns="72000" rIns="36000" tIns="28800" bIns="28800"/>
+          <a:lstStyle/>
+          <a:p>
+            <a:pPr algn="ctr"/>
+            <a:r>
+              <a:rPr sz="1000" b="0">
+                <a:solidFill>
+                  <a:srgbClr val="222222"/>
+                </a:solidFill>
+                <a:ea typeface="Malgun Gothic"/>
+                <a:latin typeface="Malgun Gothic"/>
+              </a:rPr>
+              <a:t>Persona Trust 1 위</a:t>
+            </a:r>
+          </a:p>
+        </p:txBody>
+      </p:sp>
+      <p:sp>
+        <p:nvSpPr>
+          <p:cNvPr id="44" name="Rectangle 43"/>
+          <p:cNvSpPr/>
+          <p:nvPr/>
+        </p:nvSpPr>
+        <p:spPr>
+          <a:xfrm>
+            <a:off x="4680000" y="3798000"/>
+            <a:ext cx="2088000" cy="342000"/>
+          </a:xfrm>
+          <a:prstGeom prst="rect">
+            <a:avLst/>
+          </a:prstGeom>
+          <a:solidFill>
+            <a:srgbClr val="F8F9FB"/>
+          </a:solidFill>
+          <a:ln>
+            <a:solidFill>
+              <a:srgbClr val="CCCCCC"/>
+            </a:solidFill>
+          </a:ln>
+        </p:spPr>
+        <p:style>
+          <a:lnRef idx="1">
+            <a:schemeClr val="accent1"/>
+          </a:lnRef>
+          <a:fillRef idx="3">
+            <a:schemeClr val="accent1"/>
+          </a:fillRef>
+          <a:effectRef idx="2">
+            <a:schemeClr val="accent1"/>
+          </a:effectRef>
+          <a:fontRef idx="minor">
+            <a:schemeClr val="lt1"/>
+          </a:fontRef>
+        </p:style>
+        <p:txBody>
+          <a:bodyPr rtlCol="0" anchor="ctr" lIns="72000" rIns="36000" tIns="28800" bIns="28800"/>
+          <a:lstStyle/>
+          <a:p>
+            <a:pPr algn="ctr"/>
+            <a:r>
+              <a:rPr sz="1000" b="0">
+                <a:solidFill>
+                  <a:srgbClr val="222222"/>
+                </a:solidFill>
+                <a:ea typeface="Malgun Gothic"/>
+                <a:latin typeface="Malgun Gothic"/>
+              </a:rPr>
+              <a:t>generic_rag 4.91</a:t>
+            </a:r>
+          </a:p>
+        </p:txBody>
+      </p:sp>
+      <p:sp>
+        <p:nvSpPr>
+          <p:cNvPr id="45" name="Rectangle 44"/>
+          <p:cNvSpPr/>
+          <p:nvPr/>
+        </p:nvSpPr>
+        <p:spPr>
+          <a:xfrm>
+            <a:off x="6768000" y="3798000"/>
+            <a:ext cx="2088000" cy="342000"/>
+          </a:xfrm>
+          <a:prstGeom prst="rect">
+            <a:avLst/>
+          </a:prstGeom>
+          <a:solidFill>
+            <a:srgbClr val="F8F9FB"/>
+          </a:solidFill>
+          <a:ln>
+            <a:solidFill>
+              <a:srgbClr val="CCCCCC"/>
+            </a:solidFill>
+          </a:ln>
+        </p:spPr>
+        <p:style>
+          <a:lnRef idx="1">
+            <a:schemeClr val="accent1"/>
+          </a:lnRef>
+          <a:fillRef idx="3">
+            <a:schemeClr val="accent1"/>
+          </a:fillRef>
+          <a:effectRef idx="2">
+            <a:schemeClr val="accent1"/>
+          </a:effectRef>
+          <a:fontRef idx="minor">
+            <a:schemeClr val="lt1"/>
+          </a:fontRef>
+        </p:style>
+        <p:txBody>
+          <a:bodyPr rtlCol="0" anchor="ctr" lIns="72000" rIns="36000" tIns="28800" bIns="28800"/>
+          <a:lstStyle/>
+          <a:p>
+            <a:pPr algn="ctr"/>
+            <a:r>
+              <a:rPr sz="1000" b="0">
+                <a:solidFill>
+                  <a:srgbClr val="222222"/>
+                </a:solidFill>
+                <a:ea typeface="Malgun Gothic"/>
+                <a:latin typeface="Malgun Gothic"/>
+              </a:rPr>
+              <a:t>—</a:t>
+            </a:r>
+          </a:p>
+        </p:txBody>
+      </p:sp>
+      <p:sp>
+        <p:nvSpPr>
+          <p:cNvPr id="46" name="Rectangle 45"/>
+          <p:cNvSpPr/>
+          <p:nvPr/>
+        </p:nvSpPr>
+        <p:spPr>
+          <a:xfrm>
+            <a:off x="8856000" y="3798000"/>
+            <a:ext cx="2880000" cy="342000"/>
+          </a:xfrm>
+          <a:prstGeom prst="rect">
+            <a:avLst/>
+          </a:prstGeom>
+          <a:solidFill>
+            <a:srgbClr val="F8F9FB"/>
+          </a:solidFill>
+          <a:ln>
+            <a:solidFill>
+              <a:srgbClr val="CCCCCC"/>
+            </a:solidFill>
+          </a:ln>
+        </p:spPr>
+        <p:style>
+          <a:lnRef idx="1">
+            <a:schemeClr val="accent1"/>
+          </a:lnRef>
+          <a:fillRef idx="3">
+            <a:schemeClr val="accent1"/>
+          </a:fillRef>
+          <a:effectRef idx="2">
+            <a:schemeClr val="accent1"/>
+          </a:effectRef>
+          <a:fontRef idx="minor">
+            <a:schemeClr val="lt1"/>
+          </a:fontRef>
+        </p:style>
+        <p:txBody>
+          <a:bodyPr rtlCol="0" anchor="ctr" lIns="72000" rIns="36000" tIns="28800" bIns="28800"/>
+          <a:lstStyle/>
+          <a:p>
+            <a:pPr algn="ctr"/>
+            <a:r>
+              <a:rPr sz="1000" b="0">
+                <a:solidFill>
+                  <a:srgbClr val="222222"/>
+                </a:solidFill>
+                <a:ea typeface="Malgun Gothic"/>
+                <a:latin typeface="Malgun Gothic"/>
+              </a:rPr>
+              <a:t>fusion 2 위 (4.31) — Trade-off ★</a:t>
+            </a:r>
+          </a:p>
+        </p:txBody>
+      </p:sp>
+      <p:sp>
+        <p:nvSpPr>
+          <p:cNvPr id="47" name="Rectangle 46"/>
+          <p:cNvSpPr/>
+          <p:nvPr/>
+        </p:nvSpPr>
+        <p:spPr>
+          <a:xfrm>
+            <a:off x="360000" y="4140000"/>
+            <a:ext cx="1800000" cy="342000"/>
+          </a:xfrm>
+          <a:prstGeom prst="rect">
+            <a:avLst/>
+          </a:prstGeom>
+          <a:solidFill>
+            <a:srgbClr val="FFFFFF"/>
+          </a:solidFill>
+          <a:ln>
+            <a:solidFill>
+              <a:srgbClr val="CCCCCC"/>
+            </a:solidFill>
+          </a:ln>
+        </p:spPr>
+        <p:style>
+          <a:lnRef idx="1">
+            <a:schemeClr val="accent1"/>
+          </a:lnRef>
+          <a:fillRef idx="3">
+            <a:schemeClr val="accent1"/>
+          </a:fillRef>
+          <a:effectRef idx="2">
+            <a:schemeClr val="accent1"/>
+          </a:effectRef>
+          <a:fontRef idx="minor">
+            <a:schemeClr val="lt1"/>
+          </a:fontRef>
+        </p:style>
+        <p:txBody>
+          <a:bodyPr rtlCol="0" anchor="ctr" lIns="72000" rIns="36000" tIns="28800" bIns="28800"/>
+          <a:lstStyle/>
+          <a:p>
+            <a:pPr algn="ctr"/>
+            <a:r>
+              <a:rPr sz="1000" b="0">
+                <a:solidFill>
+                  <a:srgbClr val="222222"/>
+                </a:solidFill>
+                <a:ea typeface="Malgun Gothic"/>
+                <a:latin typeface="Malgun Gothic"/>
+              </a:rPr>
+              <a:t>공정성</a:t>
+            </a:r>
+          </a:p>
+        </p:txBody>
+      </p:sp>
+      <p:sp>
+        <p:nvSpPr>
+          <p:cNvPr id="48" name="Rectangle 47"/>
+          <p:cNvSpPr/>
+          <p:nvPr/>
+        </p:nvSpPr>
+        <p:spPr>
+          <a:xfrm>
+            <a:off x="2160000" y="4140000"/>
+            <a:ext cx="2520000" cy="342000"/>
+          </a:xfrm>
+          <a:prstGeom prst="rect">
+            <a:avLst/>
+          </a:prstGeom>
+          <a:solidFill>
+            <a:srgbClr val="FFFFFF"/>
+          </a:solidFill>
+          <a:ln>
+            <a:solidFill>
+              <a:srgbClr val="CCCCCC"/>
+            </a:solidFill>
+          </a:ln>
+        </p:spPr>
+        <p:style>
+          <a:lnRef idx="1">
+            <a:schemeClr val="accent1"/>
+          </a:lnRef>
+          <a:fillRef idx="3">
+            <a:schemeClr val="accent1"/>
+          </a:fillRef>
+          <a:effectRef idx="2">
+            <a:schemeClr val="accent1"/>
+          </a:effectRef>
+          <a:fontRef idx="minor">
+            <a:schemeClr val="lt1"/>
+          </a:fontRef>
+        </p:style>
+        <p:txBody>
+          <a:bodyPr rtlCol="0" anchor="ctr" lIns="72000" rIns="36000" tIns="28800" bIns="28800"/>
+          <a:lstStyle/>
+          <a:p>
+            <a:pPr algn="ctr"/>
+            <a:r>
+              <a:rPr sz="1000" b="0">
+                <a:solidFill>
+                  <a:srgbClr val="222222"/>
+                </a:solidFill>
+                <a:ea typeface="Malgun Gothic"/>
+                <a:latin typeface="Malgun Gothic"/>
+              </a:rPr>
+              <a:t>DI ratio (Reweighing)</a:t>
+            </a:r>
+          </a:p>
+        </p:txBody>
+      </p:sp>
+      <p:sp>
+        <p:nvSpPr>
+          <p:cNvPr id="49" name="Rectangle 48"/>
+          <p:cNvSpPr/>
+          <p:nvPr/>
+        </p:nvSpPr>
+        <p:spPr>
+          <a:xfrm>
+            <a:off x="4680000" y="4140000"/>
+            <a:ext cx="2088000" cy="342000"/>
+          </a:xfrm>
+          <a:prstGeom prst="rect">
+            <a:avLst/>
+          </a:prstGeom>
+          <a:solidFill>
+            <a:srgbClr val="FFFFFF"/>
+          </a:solidFill>
+          <a:ln>
+            <a:solidFill>
+              <a:srgbClr val="CCCCCC"/>
+            </a:solidFill>
+          </a:ln>
+        </p:spPr>
+        <p:style>
+          <a:lnRef idx="1">
+            <a:schemeClr val="accent1"/>
+          </a:lnRef>
+          <a:fillRef idx="3">
+            <a:schemeClr val="accent1"/>
+          </a:fillRef>
+          <a:effectRef idx="2">
+            <a:schemeClr val="accent1"/>
+          </a:effectRef>
+          <a:fontRef idx="minor">
+            <a:schemeClr val="lt1"/>
+          </a:fontRef>
+        </p:style>
+        <p:txBody>
+          <a:bodyPr rtlCol="0" anchor="ctr" lIns="72000" rIns="36000" tIns="28800" bIns="28800"/>
+          <a:lstStyle/>
+          <a:p>
+            <a:pPr algn="ctr"/>
+            <a:r>
+              <a:rPr sz="1000" b="0">
+                <a:solidFill>
+                  <a:srgbClr val="222222"/>
+                </a:solidFill>
+                <a:ea typeface="Malgun Gothic"/>
+                <a:latin typeface="Malgun Gothic"/>
+              </a:rPr>
+              <a:t>0.62 → 0.90</a:t>
+            </a:r>
+          </a:p>
+        </p:txBody>
+      </p:sp>
+      <p:sp>
+        <p:nvSpPr>
+          <p:cNvPr id="50" name="Rectangle 49"/>
+          <p:cNvSpPr/>
+          <p:nvPr/>
+        </p:nvSpPr>
+        <p:spPr>
+          <a:xfrm>
+            <a:off x="6768000" y="4140000"/>
+            <a:ext cx="2088000" cy="342000"/>
+          </a:xfrm>
+          <a:prstGeom prst="rect">
+            <a:avLst/>
+          </a:prstGeom>
+          <a:solidFill>
+            <a:srgbClr val="FFFFFF"/>
+          </a:solidFill>
+          <a:ln>
+            <a:solidFill>
+              <a:srgbClr val="CCCCCC"/>
+            </a:solidFill>
+          </a:ln>
+        </p:spPr>
+        <p:style>
+          <a:lnRef idx="1">
+            <a:schemeClr val="accent1"/>
+          </a:lnRef>
+          <a:fillRef idx="3">
+            <a:schemeClr val="accent1"/>
+          </a:fillRef>
+          <a:effectRef idx="2">
+            <a:schemeClr val="accent1"/>
+          </a:effectRef>
+          <a:fontRef idx="minor">
+            <a:schemeClr val="lt1"/>
+          </a:fontRef>
+        </p:style>
+        <p:txBody>
+          <a:bodyPr rtlCol="0" anchor="ctr" lIns="72000" rIns="36000" tIns="28800" bIns="28800"/>
+          <a:lstStyle/>
+          <a:p>
+            <a:pPr algn="ctr"/>
+            <a:r>
+              <a:rPr sz="1000" b="0">
+                <a:solidFill>
+                  <a:srgbClr val="222222"/>
+                </a:solidFill>
+                <a:ea typeface="Malgun Gothic"/>
+                <a:latin typeface="Malgun Gothic"/>
+              </a:rPr>
+              <a:t>—</a:t>
+            </a:r>
+          </a:p>
+        </p:txBody>
+      </p:sp>
+      <p:sp>
+        <p:nvSpPr>
+          <p:cNvPr id="51" name="Rectangle 50"/>
+          <p:cNvSpPr/>
+          <p:nvPr/>
+        </p:nvSpPr>
+        <p:spPr>
+          <a:xfrm>
+            <a:off x="8856000" y="4140000"/>
+            <a:ext cx="2880000" cy="342000"/>
+          </a:xfrm>
+          <a:prstGeom prst="rect">
+            <a:avLst/>
+          </a:prstGeom>
+          <a:solidFill>
+            <a:srgbClr val="FFFFFF"/>
+          </a:solidFill>
+          <a:ln>
+            <a:solidFill>
+              <a:srgbClr val="CCCCCC"/>
+            </a:solidFill>
+          </a:ln>
+        </p:spPr>
+        <p:style>
+          <a:lnRef idx="1">
+            <a:schemeClr val="accent1"/>
+          </a:lnRef>
+          <a:fillRef idx="3">
+            <a:schemeClr val="accent1"/>
+          </a:fillRef>
+          <a:effectRef idx="2">
+            <a:schemeClr val="accent1"/>
+          </a:effectRef>
+          <a:fontRef idx="minor">
+            <a:schemeClr val="lt1"/>
+          </a:fontRef>
+        </p:style>
+        <p:txBody>
+          <a:bodyPr rtlCol="0" anchor="ctr" lIns="72000" rIns="36000" tIns="28800" bIns="28800"/>
+          <a:lstStyle/>
+          <a:p>
+            <a:pPr algn="ctr"/>
+            <a:r>
+              <a:rPr sz="1000" b="0">
+                <a:solidFill>
+                  <a:srgbClr val="222222"/>
+                </a:solidFill>
+                <a:ea typeface="Malgun Gothic"/>
+                <a:latin typeface="Malgun Gothic"/>
+              </a:rPr>
+              <a:t>4/4 통과, AUROC Δ ±0.003</a:t>
+            </a:r>
+          </a:p>
+        </p:txBody>
+      </p:sp>
+      <p:sp>
+        <p:nvSpPr>
+          <p:cNvPr id="52" name="Rectangle 51"/>
+          <p:cNvSpPr/>
+          <p:nvPr/>
+        </p:nvSpPr>
+        <p:spPr>
+          <a:xfrm>
+            <a:off x="360000" y="4482000"/>
+            <a:ext cx="1800000" cy="342000"/>
+          </a:xfrm>
+          <a:prstGeom prst="rect">
+            <a:avLst/>
+          </a:prstGeom>
+          <a:solidFill>
+            <a:srgbClr val="F8F9FB"/>
+          </a:solidFill>
+          <a:ln>
+            <a:solidFill>
+              <a:srgbClr val="CCCCCC"/>
+            </a:solidFill>
+          </a:ln>
+        </p:spPr>
+        <p:style>
+          <a:lnRef idx="1">
+            <a:schemeClr val="accent1"/>
+          </a:lnRef>
+          <a:fillRef idx="3">
+            <a:schemeClr val="accent1"/>
+          </a:fillRef>
+          <a:effectRef idx="2">
+            <a:schemeClr val="accent1"/>
+          </a:effectRef>
+          <a:fontRef idx="minor">
+            <a:schemeClr val="lt1"/>
+          </a:fontRef>
+        </p:style>
+        <p:txBody>
+          <a:bodyPr rtlCol="0" anchor="ctr" lIns="72000" rIns="36000" tIns="28800" bIns="28800"/>
+          <a:lstStyle/>
+          <a:p>
+            <a:pPr algn="ctr"/>
+            <a:r>
+              <a:rPr sz="1000" b="0">
+                <a:solidFill>
+                  <a:srgbClr val="222222"/>
+                </a:solidFill>
+                <a:ea typeface="Malgun Gothic"/>
+                <a:latin typeface="Malgun Gothic"/>
+              </a:rPr>
+              <a:t>일반화</a:t>
+            </a:r>
+          </a:p>
+        </p:txBody>
+      </p:sp>
+      <p:sp>
+        <p:nvSpPr>
+          <p:cNvPr id="53" name="Rectangle 52"/>
+          <p:cNvSpPr/>
+          <p:nvPr/>
+        </p:nvSpPr>
+        <p:spPr>
+          <a:xfrm>
+            <a:off x="2160000" y="4482000"/>
+            <a:ext cx="2520000" cy="342000"/>
+          </a:xfrm>
+          <a:prstGeom prst="rect">
+            <a:avLst/>
+          </a:prstGeom>
+          <a:solidFill>
+            <a:srgbClr val="F8F9FB"/>
+          </a:solidFill>
+          <a:ln>
+            <a:solidFill>
+              <a:srgbClr val="CCCCCC"/>
+            </a:solidFill>
+          </a:ln>
+        </p:spPr>
+        <p:style>
+          <a:lnRef idx="1">
+            <a:schemeClr val="accent1"/>
+          </a:lnRef>
+          <a:fillRef idx="3">
+            <a:schemeClr val="accent1"/>
+          </a:fillRef>
+          <a:effectRef idx="2">
+            <a:schemeClr val="accent1"/>
+          </a:effectRef>
+          <a:fontRef idx="minor">
+            <a:schemeClr val="lt1"/>
+          </a:fontRef>
+        </p:style>
+        <p:txBody>
+          <a:bodyPr rtlCol="0" anchor="ctr" lIns="72000" rIns="36000" tIns="28800" bIns="28800"/>
+          <a:lstStyle/>
+          <a:p>
+            <a:pPr algn="ctr"/>
+            <a:r>
+              <a:rPr sz="1000" b="0">
+                <a:solidFill>
+                  <a:srgbClr val="222222"/>
+                </a:solidFill>
+                <a:ea typeface="Malgun Gothic"/>
+                <a:latin typeface="Malgun Gothic"/>
+              </a:rPr>
+              <a:t>양 데이터셋 일관성</a:t>
+            </a:r>
+          </a:p>
+        </p:txBody>
+      </p:sp>
+      <p:sp>
+        <p:nvSpPr>
+          <p:cNvPr id="54" name="Rectangle 53"/>
+          <p:cNvSpPr/>
+          <p:nvPr/>
+        </p:nvSpPr>
+        <p:spPr>
+          <a:xfrm>
+            <a:off x="4680000" y="4482000"/>
+            <a:ext cx="2088000" cy="342000"/>
+          </a:xfrm>
+          <a:prstGeom prst="rect">
+            <a:avLst/>
+          </a:prstGeom>
+          <a:solidFill>
+            <a:srgbClr val="F8F9FB"/>
+          </a:solidFill>
+          <a:ln>
+            <a:solidFill>
+              <a:srgbClr val="CCCCCC"/>
+            </a:solidFill>
+          </a:ln>
+        </p:spPr>
+        <p:style>
+          <a:lnRef idx="1">
+            <a:schemeClr val="accent1"/>
+          </a:lnRef>
+          <a:fillRef idx="3">
+            <a:schemeClr val="accent1"/>
+          </a:fillRef>
+          <a:effectRef idx="2">
+            <a:schemeClr val="accent1"/>
+          </a:effectRef>
+          <a:fontRef idx="minor">
+            <a:schemeClr val="lt1"/>
+          </a:fontRef>
+        </p:style>
+        <p:txBody>
+          <a:bodyPr rtlCol="0" anchor="ctr" lIns="72000" rIns="36000" tIns="28800" bIns="28800"/>
+          <a:lstStyle/>
+          <a:p>
+            <a:pPr algn="ctr"/>
+            <a:r>
+              <a:rPr sz="1000" b="0">
+                <a:solidFill>
+                  <a:srgbClr val="222222"/>
+                </a:solidFill>
+                <a:ea typeface="Malgun Gothic"/>
+                <a:latin typeface="Malgun Gothic"/>
+              </a:rPr>
+              <a:t>기준</a:t>
+            </a:r>
+          </a:p>
+        </p:txBody>
+      </p:sp>
+      <p:sp>
+        <p:nvSpPr>
+          <p:cNvPr id="55" name="Rectangle 54"/>
+          <p:cNvSpPr/>
+          <p:nvPr/>
+        </p:nvSpPr>
+        <p:spPr>
+          <a:xfrm>
+            <a:off x="6768000" y="4482000"/>
+            <a:ext cx="2088000" cy="342000"/>
+          </a:xfrm>
+          <a:prstGeom prst="rect">
+            <a:avLst/>
+          </a:prstGeom>
+          <a:solidFill>
+            <a:srgbClr val="F8F9FB"/>
+          </a:solidFill>
+          <a:ln>
+            <a:solidFill>
+              <a:srgbClr val="CCCCCC"/>
+            </a:solidFill>
+          </a:ln>
+        </p:spPr>
+        <p:style>
+          <a:lnRef idx="1">
+            <a:schemeClr val="accent1"/>
+          </a:lnRef>
+          <a:fillRef idx="3">
+            <a:schemeClr val="accent1"/>
+          </a:fillRef>
+          <a:effectRef idx="2">
+            <a:schemeClr val="accent1"/>
+          </a:effectRef>
+          <a:fontRef idx="minor">
+            <a:schemeClr val="lt1"/>
+          </a:fontRef>
+        </p:style>
+        <p:txBody>
+          <a:bodyPr rtlCol="0" anchor="ctr" lIns="72000" rIns="36000" tIns="28800" bIns="28800"/>
+          <a:lstStyle/>
+          <a:p>
+            <a:pPr algn="ctr"/>
+            <a:r>
+              <a:rPr sz="1000" b="0">
+                <a:solidFill>
+                  <a:srgbClr val="222222"/>
+                </a:solidFill>
+                <a:ea typeface="Malgun Gothic"/>
+                <a:latin typeface="Malgun Gothic"/>
+              </a:rPr>
+              <a:t>메커니즘 일관</a:t>
+            </a:r>
+          </a:p>
+        </p:txBody>
+      </p:sp>
+      <p:sp>
+        <p:nvSpPr>
+          <p:cNvPr id="56" name="Rectangle 55"/>
+          <p:cNvSpPr/>
+          <p:nvPr/>
+        </p:nvSpPr>
+        <p:spPr>
+          <a:xfrm>
+            <a:off x="8856000" y="4482000"/>
+            <a:ext cx="2880000" cy="342000"/>
+          </a:xfrm>
+          <a:prstGeom prst="rect">
+            <a:avLst/>
+          </a:prstGeom>
+          <a:solidFill>
+            <a:srgbClr val="F8F9FB"/>
+          </a:solidFill>
+          <a:ln>
+            <a:solidFill>
+              <a:srgbClr val="CCCCCC"/>
+            </a:solidFill>
+          </a:ln>
+        </p:spPr>
+        <p:style>
+          <a:lnRef idx="1">
+            <a:schemeClr val="accent1"/>
+          </a:lnRef>
+          <a:fillRef idx="3">
+            <a:schemeClr val="accent1"/>
+          </a:fillRef>
+          <a:effectRef idx="2">
+            <a:schemeClr val="accent1"/>
+          </a:effectRef>
+          <a:fontRef idx="minor">
+            <a:schemeClr val="lt1"/>
+          </a:fontRef>
+        </p:style>
+        <p:txBody>
+          <a:bodyPr rtlCol="0" anchor="ctr" lIns="72000" rIns="36000" tIns="28800" bIns="28800"/>
+          <a:lstStyle/>
+          <a:p>
+            <a:pPr algn="ctr"/>
+            <a:r>
+              <a:rPr sz="1000" b="0">
+                <a:solidFill>
+                  <a:srgbClr val="222222"/>
+                </a:solidFill>
+                <a:ea typeface="Malgun Gothic"/>
+                <a:latin typeface="Malgun Gothic"/>
+              </a:rPr>
+              <a:t>★ 본 연구 contribution</a:t>
+            </a:r>
+          </a:p>
+        </p:txBody>
+      </p:sp>
+      <p:sp>
+        <p:nvSpPr>
+          <p:cNvPr id="57" name="TextBox 56"/>
           <p:cNvSpPr txBox="1"/>
           <p:nvPr/>
         </p:nvSpPr>
         <p:spPr>
           <a:xfrm>
-            <a:off x="1620000" y="1656000"/>
-            <a:ext cx="10080000" cy="900000"/>
+            <a:off x="360000" y="6534000"/>
+            <a:ext cx="7920000" cy="216000"/>
           </a:xfrm>
           <a:prstGeom prst="rect">
             <a:avLst/>
@@ -17215,81 +19913,28 @@
           <a:lstStyle/>
           <a:p>
             <a:r>
-              <a:rPr sz="1200" b="0">
-                <a:solidFill>
-                  <a:srgbClr val="222222"/>
-                </a:solidFill>
-                <a:ea typeface="Malgun Gothic"/>
-                <a:latin typeface="Malgun Gothic"/>
-              </a:rPr>
-              <a:t>양 데이터셋(Home 0.625, German 0.711) 모두에서 no_shap &lt; generic_rag &lt; shaponly &lt; fusion 단조증가 패턴 — Agreement-aware 융합의 효과 정량 확인</a:t>
-            </a:r>
-          </a:p>
-        </p:txBody>
-      </p:sp>
-      <p:sp>
-        <p:nvSpPr>
-          <p:cNvPr id="9" name="Oval 8"/>
-          <p:cNvSpPr/>
-          <p:nvPr/>
-        </p:nvSpPr>
-        <p:spPr>
-          <a:xfrm>
-            <a:off x="540000" y="2700000"/>
-            <a:ext cx="792000" cy="792000"/>
-          </a:xfrm>
-          <a:prstGeom prst="ellipse">
-            <a:avLst/>
-          </a:prstGeom>
-          <a:solidFill>
-            <a:srgbClr val="1F3A68"/>
-          </a:solidFill>
-          <a:ln>
-            <a:noFill/>
-          </a:ln>
-        </p:spPr>
-        <p:style>
-          <a:lnRef idx="1">
-            <a:schemeClr val="accent1"/>
-          </a:lnRef>
-          <a:fillRef idx="3">
-            <a:schemeClr val="accent1"/>
-          </a:fillRef>
-          <a:effectRef idx="2">
-            <a:schemeClr val="accent1"/>
-          </a:effectRef>
-          <a:fontRef idx="minor">
-            <a:schemeClr val="lt1"/>
-          </a:fontRef>
-        </p:style>
-        <p:txBody>
-          <a:bodyPr rtlCol="0" anchor="ctr"/>
-          <a:lstStyle/>
-          <a:p>
-            <a:pPr algn="ctr"/>
-            <a:r>
-              <a:rPr sz="2600" b="1">
-                <a:solidFill>
-                  <a:srgbClr val="FFFFFF"/>
-                </a:solidFill>
-                <a:ea typeface="Malgun Gothic"/>
-                <a:latin typeface="Malgun Gothic"/>
-              </a:rPr>
-              <a:t>②</a:t>
-            </a:r>
-          </a:p>
-        </p:txBody>
-      </p:sp>
-      <p:sp>
-        <p:nvSpPr>
-          <p:cNvPr id="10" name="TextBox 9"/>
+              <a:rPr sz="900" b="0">
+                <a:solidFill>
+                  <a:srgbClr val="555555"/>
+                </a:solidFill>
+                <a:ea typeface="Malgun Gothic"/>
+                <a:latin typeface="Malgun Gothic"/>
+              </a:rPr>
+              <a:t>TabNet × SHAP × LLM XAI-RAG  |  A70067 오현택</a:t>
+            </a:r>
+          </a:p>
+        </p:txBody>
+      </p:sp>
+      <p:sp>
+        <p:nvSpPr>
+          <p:cNvPr id="58" name="TextBox 57"/>
           <p:cNvSpPr txBox="1"/>
           <p:nvPr/>
         </p:nvSpPr>
         <p:spPr>
           <a:xfrm>
-            <a:off x="1620000" y="2700000"/>
-            <a:ext cx="10080000" cy="360000"/>
+            <a:off x="11111695" y="6534000"/>
+            <a:ext cx="720000" cy="216000"/>
           </a:xfrm>
           <a:prstGeom prst="rect">
             <a:avLst/>
@@ -17302,199 +19947,7 @@
           </a:bodyPr>
           <a:lstStyle/>
           <a:p>
-            <a:r>
-              <a:rPr sz="1700" b="1">
-                <a:solidFill>
-                  <a:srgbClr val="1F3A68"/>
-                </a:solidFill>
-                <a:ea typeface="Malgun Gothic"/>
-                <a:latin typeface="Malgun Gothic"/>
-              </a:rPr>
-              <a:t>환각 차단 ≠ Fact-grounded 정확성</a:t>
-            </a:r>
-          </a:p>
-        </p:txBody>
-      </p:sp>
-      <p:sp>
-        <p:nvSpPr>
-          <p:cNvPr id="11" name="TextBox 10"/>
-          <p:cNvSpPr txBox="1"/>
-          <p:nvPr/>
-        </p:nvSpPr>
-        <p:spPr>
-          <a:xfrm>
-            <a:off x="1620000" y="3096000"/>
-            <a:ext cx="10080000" cy="900000"/>
-          </a:xfrm>
-          <a:prstGeom prst="rect">
-            <a:avLst/>
-          </a:prstGeom>
-          <a:noFill/>
-        </p:spPr>
-        <p:txBody>
-          <a:bodyPr wrap="square">
-            <a:spAutoFit/>
-          </a:bodyPr>
-          <a:lstStyle/>
-          <a:p>
-            <a:r>
-              <a:rPr sz="1200" b="0">
-                <a:solidFill>
-                  <a:srgbClr val="222222"/>
-                </a:solidFill>
-                <a:ea typeface="Malgun Gothic"/>
-                <a:latin typeface="Malgun Gothic"/>
-              </a:rPr>
-              <a:t>Hard constraints만으로도 4-mode × 2 LLM 모든 환각률 0 % 달성 — Fusion의 차별성은 환각 차단이 아닌 NLI 함의도와 Value Match Rate에서 입증</a:t>
-            </a:r>
-          </a:p>
-        </p:txBody>
-      </p:sp>
-      <p:sp>
-        <p:nvSpPr>
-          <p:cNvPr id="12" name="Oval 11"/>
-          <p:cNvSpPr/>
-          <p:nvPr/>
-        </p:nvSpPr>
-        <p:spPr>
-          <a:xfrm>
-            <a:off x="540000" y="4140000"/>
-            <a:ext cx="792000" cy="792000"/>
-          </a:xfrm>
-          <a:prstGeom prst="ellipse">
-            <a:avLst/>
-          </a:prstGeom>
-          <a:solidFill>
-            <a:srgbClr val="C44E52"/>
-          </a:solidFill>
-          <a:ln>
-            <a:noFill/>
-          </a:ln>
-        </p:spPr>
-        <p:style>
-          <a:lnRef idx="1">
-            <a:schemeClr val="accent1"/>
-          </a:lnRef>
-          <a:fillRef idx="3">
-            <a:schemeClr val="accent1"/>
-          </a:fillRef>
-          <a:effectRef idx="2">
-            <a:schemeClr val="accent1"/>
-          </a:effectRef>
-          <a:fontRef idx="minor">
-            <a:schemeClr val="lt1"/>
-          </a:fontRef>
-        </p:style>
-        <p:txBody>
-          <a:bodyPr rtlCol="0" anchor="ctr"/>
-          <a:lstStyle/>
-          <a:p>
-            <a:pPr algn="ctr"/>
-            <a:r>
-              <a:rPr sz="2600" b="1">
-                <a:solidFill>
-                  <a:srgbClr val="FFFFFF"/>
-                </a:solidFill>
-                <a:ea typeface="Malgun Gothic"/>
-                <a:latin typeface="Malgun Gothic"/>
-              </a:rPr>
-              <a:t>③</a:t>
-            </a:r>
-          </a:p>
-        </p:txBody>
-      </p:sp>
-      <p:sp>
-        <p:nvSpPr>
-          <p:cNvPr id="13" name="TextBox 12"/>
-          <p:cNvSpPr txBox="1"/>
-          <p:nvPr/>
-        </p:nvSpPr>
-        <p:spPr>
-          <a:xfrm>
-            <a:off x="1620000" y="4140000"/>
-            <a:ext cx="10080000" cy="360000"/>
-          </a:xfrm>
-          <a:prstGeom prst="rect">
-            <a:avLst/>
-          </a:prstGeom>
-          <a:noFill/>
-        </p:spPr>
-        <p:txBody>
-          <a:bodyPr wrap="square">
-            <a:spAutoFit/>
-          </a:bodyPr>
-          <a:lstStyle/>
-          <a:p>
-            <a:r>
-              <a:rPr sz="1700" b="1">
-                <a:solidFill>
-                  <a:srgbClr val="C44E52"/>
-                </a:solidFill>
-                <a:ea typeface="Malgun Gothic"/>
-                <a:latin typeface="Malgun Gothic"/>
-              </a:rPr>
-              <a:t>Mode 선택 = 응용 시나리오 × 데이터 복잡도 trade-off</a:t>
-            </a:r>
-          </a:p>
-        </p:txBody>
-      </p:sp>
-      <p:sp>
-        <p:nvSpPr>
-          <p:cNvPr id="14" name="TextBox 13"/>
-          <p:cNvSpPr txBox="1"/>
-          <p:nvPr/>
-        </p:nvSpPr>
-        <p:spPr>
-          <a:xfrm>
-            <a:off x="1620000" y="4536000"/>
-            <a:ext cx="10080000" cy="900000"/>
-          </a:xfrm>
-          <a:prstGeom prst="rect">
-            <a:avLst/>
-          </a:prstGeom>
-          <a:noFill/>
-        </p:spPr>
-        <p:txBody>
-          <a:bodyPr wrap="square">
-            <a:spAutoFit/>
-          </a:bodyPr>
-          <a:lstStyle/>
-          <a:p>
-            <a:r>
-              <a:rPr sz="1200" b="0">
-                <a:solidFill>
-                  <a:srgbClr val="222222"/>
-                </a:solidFill>
-                <a:ea typeface="Malgun Gothic"/>
-                <a:latin typeface="Malgun Gothic"/>
-              </a:rPr>
-              <a:t>사실성 1 위 = fusion, 사람 친근성 1 위 = generic_rag (Persona) — Home에서 fusion 우월, German에서 generic_rag 우월 (G-Eval Completeness)</a:t>
-            </a:r>
-          </a:p>
-        </p:txBody>
-      </p:sp>
-      <p:sp>
-        <p:nvSpPr>
-          <p:cNvPr id="15" name="TextBox 14"/>
-          <p:cNvSpPr txBox="1"/>
-          <p:nvPr/>
-        </p:nvSpPr>
-        <p:spPr>
-          <a:xfrm>
-            <a:off x="360000" y="6534000"/>
-            <a:ext cx="7920000" cy="216000"/>
-          </a:xfrm>
-          <a:prstGeom prst="rect">
-            <a:avLst/>
-          </a:prstGeom>
-          <a:noFill/>
-        </p:spPr>
-        <p:txBody>
-          <a:bodyPr wrap="square">
-            <a:spAutoFit/>
-          </a:bodyPr>
-          <a:lstStyle/>
-          <a:p>
+            <a:pPr algn="r"/>
             <a:r>
               <a:rPr sz="900" b="0">
                 <a:solidFill>
@@ -17503,43 +19956,7 @@
                 <a:ea typeface="Malgun Gothic"/>
                 <a:latin typeface="Malgun Gothic"/>
               </a:rPr>
-              <a:t>TabNet × SHAP × LLM XAI-RAG  |  A70067 오현택</a:t>
-            </a:r>
-          </a:p>
-        </p:txBody>
-      </p:sp>
-      <p:sp>
-        <p:nvSpPr>
-          <p:cNvPr id="16" name="TextBox 15"/>
-          <p:cNvSpPr txBox="1"/>
-          <p:nvPr/>
-        </p:nvSpPr>
-        <p:spPr>
-          <a:xfrm>
-            <a:off x="11111695" y="6534000"/>
-            <a:ext cx="720000" cy="216000"/>
-          </a:xfrm>
-          <a:prstGeom prst="rect">
-            <a:avLst/>
-          </a:prstGeom>
-          <a:noFill/>
-        </p:spPr>
-        <p:txBody>
-          <a:bodyPr wrap="square">
-            <a:spAutoFit/>
-          </a:bodyPr>
-          <a:lstStyle/>
-          <a:p>
-            <a:pPr algn="r"/>
-            <a:r>
-              <a:rPr sz="900" b="0">
-                <a:solidFill>
-                  <a:srgbClr val="555555"/>
-                </a:solidFill>
-                <a:ea typeface="Malgun Gothic"/>
-                <a:latin typeface="Malgun Gothic"/>
-              </a:rPr>
-              <a:t>22 / 26</a:t>
+              <a:t>22 / 27</a:t>
             </a:r>
           </a:p>
         </p:txBody>
@@ -17635,7 +20052,7 @@
                 <a:ea typeface="Malgun Gothic"/>
                 <a:latin typeface="Malgun Gothic"/>
               </a:rPr>
-              <a:t>21. Honest Reporting — 연구의 한계</a:t>
+              <a:t>21. 본 연구의 5 가지 학술적 기여</a:t>
             </a:r>
           </a:p>
         </p:txBody>
@@ -17670,7 +20087,7 @@
                 <a:ea typeface="Malgun Gothic"/>
                 <a:latin typeface="Malgun Gothic"/>
               </a:rPr>
-              <a:t>학술 논문의 정직성 표준에 따라 명시적 한계 보고</a:t>
+              <a:t>각 기여를 정량 결과로 입증 — 도입 RQ(슬라이드 5)에 대한 답</a:t>
             </a:r>
           </a:p>
         </p:txBody>
@@ -17726,8 +20143,8 @@
         </p:nvSpPr>
         <p:spPr>
           <a:xfrm>
-            <a:off x="360000" y="1188000"/>
-            <a:ext cx="720000" cy="540000"/>
+            <a:off x="360000" y="1080000"/>
+            <a:ext cx="11160000" cy="251999"/>
           </a:xfrm>
           <a:prstGeom prst="rect">
             <a:avLst/>
@@ -17741,28 +20158,1028 @@
           <a:lstStyle/>
           <a:p>
             <a:r>
-              <a:rPr sz="2200" b="1">
-                <a:solidFill>
-                  <a:srgbClr val="C44E52"/>
-                </a:solidFill>
-                <a:ea typeface="Malgun Gothic"/>
-                <a:latin typeface="Malgun Gothic"/>
-              </a:rPr>
-              <a:t>L1</a:t>
-            </a:r>
-          </a:p>
-        </p:txBody>
-      </p:sp>
-      <p:sp>
-        <p:nvSpPr>
-          <p:cNvPr id="7" name="TextBox 6"/>
+              <a:rPr sz="1300" b="1">
+                <a:solidFill>
+                  <a:srgbClr val="1F3A68"/>
+                </a:solidFill>
+                <a:ea typeface="Malgun Gothic"/>
+                <a:latin typeface="Malgun Gothic"/>
+              </a:rPr>
+              <a:t>C1 ~ C5 기여 정리 + 정량 입증 근거 매핑</a:t>
+            </a:r>
+          </a:p>
+        </p:txBody>
+      </p:sp>
+      <p:sp>
+        <p:nvSpPr>
+          <p:cNvPr id="7" name="Rectangle 6"/>
+          <p:cNvSpPr/>
+          <p:nvPr/>
+        </p:nvSpPr>
+        <p:spPr>
+          <a:xfrm>
+            <a:off x="360000" y="1404000"/>
+            <a:ext cx="720000" cy="396000"/>
+          </a:xfrm>
+          <a:prstGeom prst="rect">
+            <a:avLst/>
+          </a:prstGeom>
+          <a:solidFill>
+            <a:srgbClr val="1F3A68"/>
+          </a:solidFill>
+          <a:ln>
+            <a:solidFill>
+              <a:srgbClr val="CCCCCC"/>
+            </a:solidFill>
+          </a:ln>
+        </p:spPr>
+        <p:style>
+          <a:lnRef idx="1">
+            <a:schemeClr val="accent1"/>
+          </a:lnRef>
+          <a:fillRef idx="3">
+            <a:schemeClr val="accent1"/>
+          </a:fillRef>
+          <a:effectRef idx="2">
+            <a:schemeClr val="accent1"/>
+          </a:effectRef>
+          <a:fontRef idx="minor">
+            <a:schemeClr val="lt1"/>
+          </a:fontRef>
+        </p:style>
+        <p:txBody>
+          <a:bodyPr rtlCol="0" anchor="ctr" lIns="72000" rIns="36000" tIns="28800" bIns="28800"/>
+          <a:lstStyle/>
+          <a:p>
+            <a:pPr algn="ctr"/>
+            <a:r>
+              <a:rPr sz="1100" b="1">
+                <a:solidFill>
+                  <a:srgbClr val="FFFFFF"/>
+                </a:solidFill>
+                <a:ea typeface="Malgun Gothic"/>
+                <a:latin typeface="Malgun Gothic"/>
+              </a:rPr>
+              <a:t>기여</a:t>
+            </a:r>
+          </a:p>
+        </p:txBody>
+      </p:sp>
+      <p:sp>
+        <p:nvSpPr>
+          <p:cNvPr id="8" name="Rectangle 7"/>
+          <p:cNvSpPr/>
+          <p:nvPr/>
+        </p:nvSpPr>
+        <p:spPr>
+          <a:xfrm>
+            <a:off x="1080000" y="1404000"/>
+            <a:ext cx="5400000" cy="396000"/>
+          </a:xfrm>
+          <a:prstGeom prst="rect">
+            <a:avLst/>
+          </a:prstGeom>
+          <a:solidFill>
+            <a:srgbClr val="1F3A68"/>
+          </a:solidFill>
+          <a:ln>
+            <a:solidFill>
+              <a:srgbClr val="CCCCCC"/>
+            </a:solidFill>
+          </a:ln>
+        </p:spPr>
+        <p:style>
+          <a:lnRef idx="1">
+            <a:schemeClr val="accent1"/>
+          </a:lnRef>
+          <a:fillRef idx="3">
+            <a:schemeClr val="accent1"/>
+          </a:fillRef>
+          <a:effectRef idx="2">
+            <a:schemeClr val="accent1"/>
+          </a:effectRef>
+          <a:fontRef idx="minor">
+            <a:schemeClr val="lt1"/>
+          </a:fontRef>
+        </p:style>
+        <p:txBody>
+          <a:bodyPr rtlCol="0" anchor="ctr" lIns="72000" rIns="36000" tIns="28800" bIns="28800"/>
+          <a:lstStyle/>
+          <a:p>
+            <a:pPr algn="ctr"/>
+            <a:r>
+              <a:rPr sz="1100" b="1">
+                <a:solidFill>
+                  <a:srgbClr val="FFFFFF"/>
+                </a:solidFill>
+                <a:ea typeface="Malgun Gothic"/>
+                <a:latin typeface="Malgun Gothic"/>
+              </a:rPr>
+              <a:t>내용</a:t>
+            </a:r>
+          </a:p>
+        </p:txBody>
+      </p:sp>
+      <p:sp>
+        <p:nvSpPr>
+          <p:cNvPr id="9" name="Rectangle 8"/>
+          <p:cNvSpPr/>
+          <p:nvPr/>
+        </p:nvSpPr>
+        <p:spPr>
+          <a:xfrm>
+            <a:off x="6480000" y="1404000"/>
+            <a:ext cx="5220000" cy="396000"/>
+          </a:xfrm>
+          <a:prstGeom prst="rect">
+            <a:avLst/>
+          </a:prstGeom>
+          <a:solidFill>
+            <a:srgbClr val="1F3A68"/>
+          </a:solidFill>
+          <a:ln>
+            <a:solidFill>
+              <a:srgbClr val="CCCCCC"/>
+            </a:solidFill>
+          </a:ln>
+        </p:spPr>
+        <p:style>
+          <a:lnRef idx="1">
+            <a:schemeClr val="accent1"/>
+          </a:lnRef>
+          <a:fillRef idx="3">
+            <a:schemeClr val="accent1"/>
+          </a:fillRef>
+          <a:effectRef idx="2">
+            <a:schemeClr val="accent1"/>
+          </a:effectRef>
+          <a:fontRef idx="minor">
+            <a:schemeClr val="lt1"/>
+          </a:fontRef>
+        </p:style>
+        <p:txBody>
+          <a:bodyPr rtlCol="0" anchor="ctr" lIns="72000" rIns="36000" tIns="28800" bIns="28800"/>
+          <a:lstStyle/>
+          <a:p>
+            <a:pPr algn="ctr"/>
+            <a:r>
+              <a:rPr sz="1100" b="1">
+                <a:solidFill>
+                  <a:srgbClr val="FFFFFF"/>
+                </a:solidFill>
+                <a:ea typeface="Malgun Gothic"/>
+                <a:latin typeface="Malgun Gothic"/>
+              </a:rPr>
+              <a:t>정량 입증 근거</a:t>
+            </a:r>
+          </a:p>
+        </p:txBody>
+      </p:sp>
+      <p:sp>
+        <p:nvSpPr>
+          <p:cNvPr id="10" name="Rectangle 9"/>
+          <p:cNvSpPr/>
+          <p:nvPr/>
+        </p:nvSpPr>
+        <p:spPr>
+          <a:xfrm>
+            <a:off x="360000" y="1800000"/>
+            <a:ext cx="720000" cy="792000"/>
+          </a:xfrm>
+          <a:prstGeom prst="rect">
+            <a:avLst/>
+          </a:prstGeom>
+          <a:solidFill>
+            <a:srgbClr val="F8F9FB"/>
+          </a:solidFill>
+          <a:ln>
+            <a:solidFill>
+              <a:srgbClr val="CCCCCC"/>
+            </a:solidFill>
+          </a:ln>
+        </p:spPr>
+        <p:style>
+          <a:lnRef idx="1">
+            <a:schemeClr val="accent1"/>
+          </a:lnRef>
+          <a:fillRef idx="3">
+            <a:schemeClr val="accent1"/>
+          </a:fillRef>
+          <a:effectRef idx="2">
+            <a:schemeClr val="accent1"/>
+          </a:effectRef>
+          <a:fontRef idx="minor">
+            <a:schemeClr val="lt1"/>
+          </a:fontRef>
+        </p:style>
+        <p:txBody>
+          <a:bodyPr rtlCol="0" anchor="ctr" lIns="72000" rIns="36000" tIns="28800" bIns="28800"/>
+          <a:lstStyle/>
+          <a:p>
+            <a:pPr algn="ctr"/>
+            <a:r>
+              <a:rPr sz="1100" b="0">
+                <a:solidFill>
+                  <a:srgbClr val="222222"/>
+                </a:solidFill>
+                <a:ea typeface="Malgun Gothic"/>
+                <a:latin typeface="Malgun Gothic"/>
+              </a:rPr>
+              <a:t>C1</a:t>
+            </a:r>
+          </a:p>
+        </p:txBody>
+      </p:sp>
+      <p:sp>
+        <p:nvSpPr>
+          <p:cNvPr id="11" name="Rectangle 10"/>
+          <p:cNvSpPr/>
+          <p:nvPr/>
+        </p:nvSpPr>
+        <p:spPr>
+          <a:xfrm>
+            <a:off x="1080000" y="1800000"/>
+            <a:ext cx="5400000" cy="792000"/>
+          </a:xfrm>
+          <a:prstGeom prst="rect">
+            <a:avLst/>
+          </a:prstGeom>
+          <a:solidFill>
+            <a:srgbClr val="F8F9FB"/>
+          </a:solidFill>
+          <a:ln>
+            <a:solidFill>
+              <a:srgbClr val="CCCCCC"/>
+            </a:solidFill>
+          </a:ln>
+        </p:spPr>
+        <p:style>
+          <a:lnRef idx="1">
+            <a:schemeClr val="accent1"/>
+          </a:lnRef>
+          <a:fillRef idx="3">
+            <a:schemeClr val="accent1"/>
+          </a:fillRef>
+          <a:effectRef idx="2">
+            <a:schemeClr val="accent1"/>
+          </a:effectRef>
+          <a:fontRef idx="minor">
+            <a:schemeClr val="lt1"/>
+          </a:fontRef>
+        </p:style>
+        <p:txBody>
+          <a:bodyPr rtlCol="0" anchor="ctr" lIns="72000" rIns="36000" tIns="28800" bIns="28800"/>
+          <a:lstStyle/>
+          <a:p>
+            <a:pPr algn="ctr"/>
+            <a:r>
+              <a:rPr sz="1100" b="0">
+                <a:solidFill>
+                  <a:srgbClr val="222222"/>
+                </a:solidFill>
+                <a:ea typeface="Malgun Gothic"/>
+                <a:latin typeface="Malgun Gothic"/>
+              </a:rPr>
+              <a:t>Agreement-aware Fusion Context 신규 설계
+(agreed · shap_only · attention_only 3 그룹 분해)</a:t>
+            </a:r>
+          </a:p>
+        </p:txBody>
+      </p:sp>
+      <p:sp>
+        <p:nvSpPr>
+          <p:cNvPr id="12" name="Rectangle 11"/>
+          <p:cNvSpPr/>
+          <p:nvPr/>
+        </p:nvSpPr>
+        <p:spPr>
+          <a:xfrm>
+            <a:off x="6480000" y="1800000"/>
+            <a:ext cx="5220000" cy="792000"/>
+          </a:xfrm>
+          <a:prstGeom prst="rect">
+            <a:avLst/>
+          </a:prstGeom>
+          <a:solidFill>
+            <a:srgbClr val="F8F9FB"/>
+          </a:solidFill>
+          <a:ln>
+            <a:solidFill>
+              <a:srgbClr val="CCCCCC"/>
+            </a:solidFill>
+          </a:ln>
+        </p:spPr>
+        <p:style>
+          <a:lnRef idx="1">
+            <a:schemeClr val="accent1"/>
+          </a:lnRef>
+          <a:fillRef idx="3">
+            <a:schemeClr val="accent1"/>
+          </a:fillRef>
+          <a:effectRef idx="2">
+            <a:schemeClr val="accent1"/>
+          </a:effectRef>
+          <a:fontRef idx="minor">
+            <a:schemeClr val="lt1"/>
+          </a:fontRef>
+        </p:style>
+        <p:txBody>
+          <a:bodyPr rtlCol="0" anchor="ctr" lIns="72000" rIns="36000" tIns="28800" bIns="28800"/>
+          <a:lstStyle/>
+          <a:p>
+            <a:pPr algn="ctr"/>
+            <a:r>
+              <a:rPr sz="1100" b="0">
+                <a:solidFill>
+                  <a:srgbClr val="222222"/>
+                </a:solidFill>
+                <a:ea typeface="Malgun Gothic"/>
+                <a:latin typeface="Malgun Gothic"/>
+              </a:rPr>
+              <a:t>SHAP × Attn ρ 0.117 / 0.114 (보완성)
+Agreement mean = 2.12 (n=100)</a:t>
+            </a:r>
+          </a:p>
+        </p:txBody>
+      </p:sp>
+      <p:sp>
+        <p:nvSpPr>
+          <p:cNvPr id="13" name="Rectangle 12"/>
+          <p:cNvSpPr/>
+          <p:nvPr/>
+        </p:nvSpPr>
+        <p:spPr>
+          <a:xfrm>
+            <a:off x="360000" y="2592000"/>
+            <a:ext cx="720000" cy="792000"/>
+          </a:xfrm>
+          <a:prstGeom prst="rect">
+            <a:avLst/>
+          </a:prstGeom>
+          <a:solidFill>
+            <a:srgbClr val="FFFFFF"/>
+          </a:solidFill>
+          <a:ln>
+            <a:solidFill>
+              <a:srgbClr val="CCCCCC"/>
+            </a:solidFill>
+          </a:ln>
+        </p:spPr>
+        <p:style>
+          <a:lnRef idx="1">
+            <a:schemeClr val="accent1"/>
+          </a:lnRef>
+          <a:fillRef idx="3">
+            <a:schemeClr val="accent1"/>
+          </a:fillRef>
+          <a:effectRef idx="2">
+            <a:schemeClr val="accent1"/>
+          </a:effectRef>
+          <a:fontRef idx="minor">
+            <a:schemeClr val="lt1"/>
+          </a:fontRef>
+        </p:style>
+        <p:txBody>
+          <a:bodyPr rtlCol="0" anchor="ctr" lIns="72000" rIns="36000" tIns="28800" bIns="28800"/>
+          <a:lstStyle/>
+          <a:p>
+            <a:pPr algn="ctr"/>
+            <a:r>
+              <a:rPr sz="1100" b="0">
+                <a:solidFill>
+                  <a:srgbClr val="222222"/>
+                </a:solidFill>
+                <a:ea typeface="Malgun Gothic"/>
+                <a:latin typeface="Malgun Gothic"/>
+              </a:rPr>
+              <a:t>C2</a:t>
+            </a:r>
+          </a:p>
+        </p:txBody>
+      </p:sp>
+      <p:sp>
+        <p:nvSpPr>
+          <p:cNvPr id="14" name="Rectangle 13"/>
+          <p:cNvSpPr/>
+          <p:nvPr/>
+        </p:nvSpPr>
+        <p:spPr>
+          <a:xfrm>
+            <a:off x="1080000" y="2592000"/>
+            <a:ext cx="5400000" cy="792000"/>
+          </a:xfrm>
+          <a:prstGeom prst="rect">
+            <a:avLst/>
+          </a:prstGeom>
+          <a:solidFill>
+            <a:srgbClr val="FFFFFF"/>
+          </a:solidFill>
+          <a:ln>
+            <a:solidFill>
+              <a:srgbClr val="CCCCCC"/>
+            </a:solidFill>
+          </a:ln>
+        </p:spPr>
+        <p:style>
+          <a:lnRef idx="1">
+            <a:schemeClr val="accent1"/>
+          </a:lnRef>
+          <a:fillRef idx="3">
+            <a:schemeClr val="accent1"/>
+          </a:fillRef>
+          <a:effectRef idx="2">
+            <a:schemeClr val="accent1"/>
+          </a:effectRef>
+          <a:fontRef idx="minor">
+            <a:schemeClr val="lt1"/>
+          </a:fontRef>
+        </p:style>
+        <p:txBody>
+          <a:bodyPr rtlCol="0" anchor="ctr" lIns="72000" rIns="36000" tIns="28800" bIns="28800"/>
+          <a:lstStyle/>
+          <a:p>
+            <a:pPr algn="ctr"/>
+            <a:r>
+              <a:rPr sz="1100" b="0">
+                <a:solidFill>
+                  <a:srgbClr val="222222"/>
+                </a:solidFill>
+                <a:ea typeface="Malgun Gothic"/>
+                <a:latin typeface="Malgun Gothic"/>
+              </a:rPr>
+              <a:t>4-tier 다중 평가 프레임워크 구축
+(Rules + NLI + Cross-Judge G-Eval + Persona)</a:t>
+            </a:r>
+          </a:p>
+        </p:txBody>
+      </p:sp>
+      <p:sp>
+        <p:nvSpPr>
+          <p:cNvPr id="15" name="Rectangle 14"/>
+          <p:cNvSpPr/>
+          <p:nvPr/>
+        </p:nvSpPr>
+        <p:spPr>
+          <a:xfrm>
+            <a:off x="6480000" y="2592000"/>
+            <a:ext cx="5220000" cy="792000"/>
+          </a:xfrm>
+          <a:prstGeom prst="rect">
+            <a:avLst/>
+          </a:prstGeom>
+          <a:solidFill>
+            <a:srgbClr val="FFFFFF"/>
+          </a:solidFill>
+          <a:ln>
+            <a:solidFill>
+              <a:srgbClr val="CCCCCC"/>
+            </a:solidFill>
+          </a:ln>
+        </p:spPr>
+        <p:style>
+          <a:lnRef idx="1">
+            <a:schemeClr val="accent1"/>
+          </a:lnRef>
+          <a:fillRef idx="3">
+            <a:schemeClr val="accent1"/>
+          </a:fillRef>
+          <a:effectRef idx="2">
+            <a:schemeClr val="accent1"/>
+          </a:effectRef>
+          <a:fontRef idx="minor">
+            <a:schemeClr val="lt1"/>
+          </a:fontRef>
+        </p:style>
+        <p:txBody>
+          <a:bodyPr rtlCol="0" anchor="ctr" lIns="72000" rIns="36000" tIns="28800" bIns="28800"/>
+          <a:lstStyle/>
+          <a:p>
+            <a:pPr algn="ctr"/>
+            <a:r>
+              <a:rPr sz="1100" b="0">
+                <a:solidFill>
+                  <a:srgbClr val="222222"/>
+                </a:solidFill>
+                <a:ea typeface="Malgun Gothic"/>
+                <a:latin typeface="Malgun Gothic"/>
+              </a:rPr>
+              <a:t>NLI 0.625, G-Eval +0.67 Completeness
+Persona 3 차원 × 5 점 척도</a:t>
+            </a:r>
+          </a:p>
+        </p:txBody>
+      </p:sp>
+      <p:sp>
+        <p:nvSpPr>
+          <p:cNvPr id="16" name="Rectangle 15"/>
+          <p:cNvSpPr/>
+          <p:nvPr/>
+        </p:nvSpPr>
+        <p:spPr>
+          <a:xfrm>
+            <a:off x="360000" y="3384000"/>
+            <a:ext cx="720000" cy="792000"/>
+          </a:xfrm>
+          <a:prstGeom prst="rect">
+            <a:avLst/>
+          </a:prstGeom>
+          <a:solidFill>
+            <a:srgbClr val="F8F9FB"/>
+          </a:solidFill>
+          <a:ln>
+            <a:solidFill>
+              <a:srgbClr val="CCCCCC"/>
+            </a:solidFill>
+          </a:ln>
+        </p:spPr>
+        <p:style>
+          <a:lnRef idx="1">
+            <a:schemeClr val="accent1"/>
+          </a:lnRef>
+          <a:fillRef idx="3">
+            <a:schemeClr val="accent1"/>
+          </a:fillRef>
+          <a:effectRef idx="2">
+            <a:schemeClr val="accent1"/>
+          </a:effectRef>
+          <a:fontRef idx="minor">
+            <a:schemeClr val="lt1"/>
+          </a:fontRef>
+        </p:style>
+        <p:txBody>
+          <a:bodyPr rtlCol="0" anchor="ctr" lIns="72000" rIns="36000" tIns="28800" bIns="28800"/>
+          <a:lstStyle/>
+          <a:p>
+            <a:pPr algn="ctr"/>
+            <a:r>
+              <a:rPr sz="1100" b="0">
+                <a:solidFill>
+                  <a:srgbClr val="222222"/>
+                </a:solidFill>
+                <a:ea typeface="Malgun Gothic"/>
+                <a:latin typeface="Malgun Gothic"/>
+              </a:rPr>
+              <a:t>C3</a:t>
+            </a:r>
+          </a:p>
+        </p:txBody>
+      </p:sp>
+      <p:sp>
+        <p:nvSpPr>
+          <p:cNvPr id="17" name="Rectangle 16"/>
+          <p:cNvSpPr/>
+          <p:nvPr/>
+        </p:nvSpPr>
+        <p:spPr>
+          <a:xfrm>
+            <a:off x="1080000" y="3384000"/>
+            <a:ext cx="5400000" cy="792000"/>
+          </a:xfrm>
+          <a:prstGeom prst="rect">
+            <a:avLst/>
+          </a:prstGeom>
+          <a:solidFill>
+            <a:srgbClr val="F8F9FB"/>
+          </a:solidFill>
+          <a:ln>
+            <a:solidFill>
+              <a:srgbClr val="CCCCCC"/>
+            </a:solidFill>
+          </a:ln>
+        </p:spPr>
+        <p:style>
+          <a:lnRef idx="1">
+            <a:schemeClr val="accent1"/>
+          </a:lnRef>
+          <a:fillRef idx="3">
+            <a:schemeClr val="accent1"/>
+          </a:fillRef>
+          <a:effectRef idx="2">
+            <a:schemeClr val="accent1"/>
+          </a:effectRef>
+          <a:fontRef idx="minor">
+            <a:schemeClr val="lt1"/>
+          </a:fontRef>
+        </p:style>
+        <p:txBody>
+          <a:bodyPr rtlCol="0" anchor="ctr" lIns="72000" rIns="36000" tIns="28800" bIns="28800"/>
+          <a:lstStyle/>
+          <a:p>
+            <a:pPr algn="ctr"/>
+            <a:r>
+              <a:rPr sz="1100" b="0">
+                <a:solidFill>
+                  <a:srgbClr val="222222"/>
+                </a:solidFill>
+                <a:ea typeface="Malgun Gothic"/>
+                <a:latin typeface="Malgun Gothic"/>
+              </a:rPr>
+              <a:t>4-mode 비교로 차별성 입증
+(환각 차단 ≠ fact-grounded 정확성)</a:t>
+            </a:r>
+          </a:p>
+        </p:txBody>
+      </p:sp>
+      <p:sp>
+        <p:nvSpPr>
+          <p:cNvPr id="18" name="Rectangle 17"/>
+          <p:cNvSpPr/>
+          <p:nvPr/>
+        </p:nvSpPr>
+        <p:spPr>
+          <a:xfrm>
+            <a:off x="6480000" y="3384000"/>
+            <a:ext cx="5220000" cy="792000"/>
+          </a:xfrm>
+          <a:prstGeom prst="rect">
+            <a:avLst/>
+          </a:prstGeom>
+          <a:solidFill>
+            <a:srgbClr val="F8F9FB"/>
+          </a:solidFill>
+          <a:ln>
+            <a:solidFill>
+              <a:srgbClr val="CCCCCC"/>
+            </a:solidFill>
+          </a:ln>
+        </p:spPr>
+        <p:style>
+          <a:lnRef idx="1">
+            <a:schemeClr val="accent1"/>
+          </a:lnRef>
+          <a:fillRef idx="3">
+            <a:schemeClr val="accent1"/>
+          </a:fillRef>
+          <a:effectRef idx="2">
+            <a:schemeClr val="accent1"/>
+          </a:effectRef>
+          <a:fontRef idx="minor">
+            <a:schemeClr val="lt1"/>
+          </a:fontRef>
+        </p:style>
+        <p:txBody>
+          <a:bodyPr rtlCol="0" anchor="ctr" lIns="72000" rIns="36000" tIns="28800" bIns="28800"/>
+          <a:lstStyle/>
+          <a:p>
+            <a:pPr algn="ctr"/>
+            <a:r>
+              <a:rPr sz="1100" b="0">
+                <a:solidFill>
+                  <a:srgbClr val="222222"/>
+                </a:solidFill>
+                <a:ea typeface="Malgun Gothic"/>
+                <a:latin typeface="Malgun Gothic"/>
+              </a:rPr>
+              <a:t>환각 0 % (모든 mode) vs NLI 단조증가
+Value Match 0.59 → 0.90 (no_shap → fusion)</a:t>
+            </a:r>
+          </a:p>
+        </p:txBody>
+      </p:sp>
+      <p:sp>
+        <p:nvSpPr>
+          <p:cNvPr id="19" name="Rectangle 18"/>
+          <p:cNvSpPr/>
+          <p:nvPr/>
+        </p:nvSpPr>
+        <p:spPr>
+          <a:xfrm>
+            <a:off x="360000" y="4176000"/>
+            <a:ext cx="720000" cy="792000"/>
+          </a:xfrm>
+          <a:prstGeom prst="rect">
+            <a:avLst/>
+          </a:prstGeom>
+          <a:solidFill>
+            <a:srgbClr val="FFFFFF"/>
+          </a:solidFill>
+          <a:ln>
+            <a:solidFill>
+              <a:srgbClr val="CCCCCC"/>
+            </a:solidFill>
+          </a:ln>
+        </p:spPr>
+        <p:style>
+          <a:lnRef idx="1">
+            <a:schemeClr val="accent1"/>
+          </a:lnRef>
+          <a:fillRef idx="3">
+            <a:schemeClr val="accent1"/>
+          </a:fillRef>
+          <a:effectRef idx="2">
+            <a:schemeClr val="accent1"/>
+          </a:effectRef>
+          <a:fontRef idx="minor">
+            <a:schemeClr val="lt1"/>
+          </a:fontRef>
+        </p:style>
+        <p:txBody>
+          <a:bodyPr rtlCol="0" anchor="ctr" lIns="72000" rIns="36000" tIns="28800" bIns="28800"/>
+          <a:lstStyle/>
+          <a:p>
+            <a:pPr algn="ctr"/>
+            <a:r>
+              <a:rPr sz="1100" b="0">
+                <a:solidFill>
+                  <a:srgbClr val="222222"/>
+                </a:solidFill>
+                <a:ea typeface="Malgun Gothic"/>
+                <a:latin typeface="Malgun Gothic"/>
+              </a:rPr>
+              <a:t>C4</a:t>
+            </a:r>
+          </a:p>
+        </p:txBody>
+      </p:sp>
+      <p:sp>
+        <p:nvSpPr>
+          <p:cNvPr id="20" name="Rectangle 19"/>
+          <p:cNvSpPr/>
+          <p:nvPr/>
+        </p:nvSpPr>
+        <p:spPr>
+          <a:xfrm>
+            <a:off x="1080000" y="4176000"/>
+            <a:ext cx="5400000" cy="792000"/>
+          </a:xfrm>
+          <a:prstGeom prst="rect">
+            <a:avLst/>
+          </a:prstGeom>
+          <a:solidFill>
+            <a:srgbClr val="FFFFFF"/>
+          </a:solidFill>
+          <a:ln>
+            <a:solidFill>
+              <a:srgbClr val="CCCCCC"/>
+            </a:solidFill>
+          </a:ln>
+        </p:spPr>
+        <p:style>
+          <a:lnRef idx="1">
+            <a:schemeClr val="accent1"/>
+          </a:lnRef>
+          <a:fillRef idx="3">
+            <a:schemeClr val="accent1"/>
+          </a:fillRef>
+          <a:effectRef idx="2">
+            <a:schemeClr val="accent1"/>
+          </a:effectRef>
+          <a:fontRef idx="minor">
+            <a:schemeClr val="lt1"/>
+          </a:fontRef>
+        </p:style>
+        <p:txBody>
+          <a:bodyPr rtlCol="0" anchor="ctr" lIns="72000" rIns="36000" tIns="28800" bIns="28800"/>
+          <a:lstStyle/>
+          <a:p>
+            <a:pPr algn="ctr"/>
+            <a:r>
+              <a:rPr sz="1100" b="0">
+                <a:solidFill>
+                  <a:srgbClr val="222222"/>
+                </a:solidFill>
+                <a:ea typeface="Malgun Gothic"/>
+                <a:latin typeface="Malgun Gothic"/>
+              </a:rPr>
+              <a:t>두 데이터셋 일반화 검증
+(Home Credit + UCI German Credit)</a:t>
+            </a:r>
+          </a:p>
+        </p:txBody>
+      </p:sp>
+      <p:sp>
+        <p:nvSpPr>
+          <p:cNvPr id="21" name="Rectangle 20"/>
+          <p:cNvSpPr/>
+          <p:nvPr/>
+        </p:nvSpPr>
+        <p:spPr>
+          <a:xfrm>
+            <a:off x="6480000" y="4176000"/>
+            <a:ext cx="5220000" cy="792000"/>
+          </a:xfrm>
+          <a:prstGeom prst="rect">
+            <a:avLst/>
+          </a:prstGeom>
+          <a:solidFill>
+            <a:srgbClr val="FFFFFF"/>
+          </a:solidFill>
+          <a:ln>
+            <a:solidFill>
+              <a:srgbClr val="CCCCCC"/>
+            </a:solidFill>
+          </a:ln>
+        </p:spPr>
+        <p:style>
+          <a:lnRef idx="1">
+            <a:schemeClr val="accent1"/>
+          </a:lnRef>
+          <a:fillRef idx="3">
+            <a:schemeClr val="accent1"/>
+          </a:fillRef>
+          <a:effectRef idx="2">
+            <a:schemeClr val="accent1"/>
+          </a:effectRef>
+          <a:fontRef idx="minor">
+            <a:schemeClr val="lt1"/>
+          </a:fontRef>
+        </p:style>
+        <p:txBody>
+          <a:bodyPr rtlCol="0" anchor="ctr" lIns="72000" rIns="36000" tIns="28800" bIns="28800"/>
+          <a:lstStyle/>
+          <a:p>
+            <a:pPr algn="ctr"/>
+            <a:r>
+              <a:rPr sz="1100" b="0">
+                <a:solidFill>
+                  <a:srgbClr val="222222"/>
+                </a:solidFill>
+                <a:ea typeface="Malgun Gothic"/>
+                <a:latin typeface="Malgun Gothic"/>
+              </a:rPr>
+              <a:t>양 데이터셋 SHAP × Attn ρ 거의 동일
+NLI 4-mode 단조증가 패턴 일관</a:t>
+            </a:r>
+          </a:p>
+        </p:txBody>
+      </p:sp>
+      <p:sp>
+        <p:nvSpPr>
+          <p:cNvPr id="22" name="Rectangle 21"/>
+          <p:cNvSpPr/>
+          <p:nvPr/>
+        </p:nvSpPr>
+        <p:spPr>
+          <a:xfrm>
+            <a:off x="360000" y="4968000"/>
+            <a:ext cx="720000" cy="792000"/>
+          </a:xfrm>
+          <a:prstGeom prst="rect">
+            <a:avLst/>
+          </a:prstGeom>
+          <a:solidFill>
+            <a:srgbClr val="F8F9FB"/>
+          </a:solidFill>
+          <a:ln>
+            <a:solidFill>
+              <a:srgbClr val="CCCCCC"/>
+            </a:solidFill>
+          </a:ln>
+        </p:spPr>
+        <p:style>
+          <a:lnRef idx="1">
+            <a:schemeClr val="accent1"/>
+          </a:lnRef>
+          <a:fillRef idx="3">
+            <a:schemeClr val="accent1"/>
+          </a:fillRef>
+          <a:effectRef idx="2">
+            <a:schemeClr val="accent1"/>
+          </a:effectRef>
+          <a:fontRef idx="minor">
+            <a:schemeClr val="lt1"/>
+          </a:fontRef>
+        </p:style>
+        <p:txBody>
+          <a:bodyPr rtlCol="0" anchor="ctr" lIns="72000" rIns="36000" tIns="28800" bIns="28800"/>
+          <a:lstStyle/>
+          <a:p>
+            <a:pPr algn="ctr"/>
+            <a:r>
+              <a:rPr sz="1100" b="0">
+                <a:solidFill>
+                  <a:srgbClr val="222222"/>
+                </a:solidFill>
+                <a:ea typeface="Malgun Gothic"/>
+                <a:latin typeface="Malgun Gothic"/>
+              </a:rPr>
+              <a:t>C5</a:t>
+            </a:r>
+          </a:p>
+        </p:txBody>
+      </p:sp>
+      <p:sp>
+        <p:nvSpPr>
+          <p:cNvPr id="23" name="Rectangle 22"/>
+          <p:cNvSpPr/>
+          <p:nvPr/>
+        </p:nvSpPr>
+        <p:spPr>
+          <a:xfrm>
+            <a:off x="1080000" y="4968000"/>
+            <a:ext cx="5400000" cy="792000"/>
+          </a:xfrm>
+          <a:prstGeom prst="rect">
+            <a:avLst/>
+          </a:prstGeom>
+          <a:solidFill>
+            <a:srgbClr val="F8F9FB"/>
+          </a:solidFill>
+          <a:ln>
+            <a:solidFill>
+              <a:srgbClr val="CCCCCC"/>
+            </a:solidFill>
+          </a:ln>
+        </p:spPr>
+        <p:style>
+          <a:lnRef idx="1">
+            <a:schemeClr val="accent1"/>
+          </a:lnRef>
+          <a:fillRef idx="3">
+            <a:schemeClr val="accent1"/>
+          </a:fillRef>
+          <a:effectRef idx="2">
+            <a:schemeClr val="accent1"/>
+          </a:effectRef>
+          <a:fontRef idx="minor">
+            <a:schemeClr val="lt1"/>
+          </a:fontRef>
+        </p:style>
+        <p:txBody>
+          <a:bodyPr rtlCol="0" anchor="ctr" lIns="72000" rIns="36000" tIns="28800" bIns="28800"/>
+          <a:lstStyle/>
+          <a:p>
+            <a:pPr algn="ctr"/>
+            <a:r>
+              <a:rPr sz="1100" b="0">
+                <a:solidFill>
+                  <a:srgbClr val="222222"/>
+                </a:solidFill>
+                <a:ea typeface="Malgun Gothic"/>
+                <a:latin typeface="Malgun Gothic"/>
+              </a:rPr>
+              <a:t>Reweighing 무손실 공정성 보정
+(4 / 4 조합 모두 4/5 규칙 통과)</a:t>
+            </a:r>
+          </a:p>
+        </p:txBody>
+      </p:sp>
+      <p:sp>
+        <p:nvSpPr>
+          <p:cNvPr id="24" name="Rectangle 23"/>
+          <p:cNvSpPr/>
+          <p:nvPr/>
+        </p:nvSpPr>
+        <p:spPr>
+          <a:xfrm>
+            <a:off x="6480000" y="4968000"/>
+            <a:ext cx="5220000" cy="792000"/>
+          </a:xfrm>
+          <a:prstGeom prst="rect">
+            <a:avLst/>
+          </a:prstGeom>
+          <a:solidFill>
+            <a:srgbClr val="F8F9FB"/>
+          </a:solidFill>
+          <a:ln>
+            <a:solidFill>
+              <a:srgbClr val="CCCCCC"/>
+            </a:solidFill>
+          </a:ln>
+        </p:spPr>
+        <p:style>
+          <a:lnRef idx="1">
+            <a:schemeClr val="accent1"/>
+          </a:lnRef>
+          <a:fillRef idx="3">
+            <a:schemeClr val="accent1"/>
+          </a:fillRef>
+          <a:effectRef idx="2">
+            <a:schemeClr val="accent1"/>
+          </a:effectRef>
+          <a:fontRef idx="minor">
+            <a:schemeClr val="lt1"/>
+          </a:fontRef>
+        </p:style>
+        <p:txBody>
+          <a:bodyPr rtlCol="0" anchor="ctr" lIns="72000" rIns="36000" tIns="28800" bIns="28800"/>
+          <a:lstStyle/>
+          <a:p>
+            <a:pPr algn="ctr"/>
+            <a:r>
+              <a:rPr sz="1100" b="0">
+                <a:solidFill>
+                  <a:srgbClr val="222222"/>
+                </a:solidFill>
+                <a:ea typeface="Malgun Gothic"/>
+                <a:latin typeface="Malgun Gothic"/>
+              </a:rPr>
+              <a:t>DI 0.62 → 0.90, 0.56 → 0.90
+AUROC 손실 ≤ 0.004</a:t>
+            </a:r>
+          </a:p>
+        </p:txBody>
+      </p:sp>
+      <p:sp>
+        <p:nvSpPr>
+          <p:cNvPr id="25" name="TextBox 24"/>
           <p:cNvSpPr txBox="1"/>
           <p:nvPr/>
         </p:nvSpPr>
         <p:spPr>
           <a:xfrm>
-            <a:off x="1080000" y="1188000"/>
-            <a:ext cx="10440000" cy="360000"/>
+            <a:off x="360000" y="6534000"/>
+            <a:ext cx="7920000" cy="216000"/>
           </a:xfrm>
           <a:prstGeom prst="rect">
             <a:avLst/>
@@ -17776,28 +21193,28 @@
           <a:lstStyle/>
           <a:p>
             <a:r>
-              <a:rPr sz="1600" b="1">
-                <a:solidFill>
-                  <a:srgbClr val="1F3A68"/>
-                </a:solidFill>
-                <a:ea typeface="Malgun Gothic"/>
-                <a:latin typeface="Malgun Gothic"/>
-              </a:rPr>
-              <a:t>표본 크기 30 인스턴스</a:t>
-            </a:r>
-          </a:p>
-        </p:txBody>
-      </p:sp>
-      <p:sp>
-        <p:nvSpPr>
-          <p:cNvPr id="8" name="TextBox 7"/>
+              <a:rPr sz="900" b="0">
+                <a:solidFill>
+                  <a:srgbClr val="555555"/>
+                </a:solidFill>
+                <a:ea typeface="Malgun Gothic"/>
+                <a:latin typeface="Malgun Gothic"/>
+              </a:rPr>
+              <a:t>TabNet × SHAP × LLM XAI-RAG  |  A70067 오현택</a:t>
+            </a:r>
+          </a:p>
+        </p:txBody>
+      </p:sp>
+      <p:sp>
+        <p:nvSpPr>
+          <p:cNvPr id="26" name="TextBox 25"/>
           <p:cNvSpPr txBox="1"/>
           <p:nvPr/>
         </p:nvSpPr>
         <p:spPr>
           <a:xfrm>
-            <a:off x="1080000" y="1512000"/>
-            <a:ext cx="10440000" cy="720000"/>
+            <a:off x="11111695" y="6534000"/>
+            <a:ext cx="720000" cy="216000"/>
           </a:xfrm>
           <a:prstGeom prst="rect">
             <a:avLst/>
@@ -17810,360 +21227,7 @@
           </a:bodyPr>
           <a:lstStyle/>
           <a:p>
-            <a:r>
-              <a:rPr sz="1100" b="0">
-                <a:solidFill>
-                  <a:srgbClr val="222222"/>
-                </a:solidFill>
-                <a:ea typeface="Malgun Gothic"/>
-                <a:latin typeface="Malgun Gothic"/>
-              </a:rPr>
-              <a:t>4-mode × 2 LLM × 30 = 240 explanations — 통계적 의의는 trends 수준
-→ Future work: 표본 100+ 확장, 정식 통계 검정 (Wilcoxon paired)</a:t>
-            </a:r>
-          </a:p>
-        </p:txBody>
-      </p:sp>
-      <p:sp>
-        <p:nvSpPr>
-          <p:cNvPr id="9" name="TextBox 8"/>
-          <p:cNvSpPr txBox="1"/>
-          <p:nvPr/>
-        </p:nvSpPr>
-        <p:spPr>
-          <a:xfrm>
-            <a:off x="360000" y="2268000"/>
-            <a:ext cx="720000" cy="540000"/>
-          </a:xfrm>
-          <a:prstGeom prst="rect">
-            <a:avLst/>
-          </a:prstGeom>
-          <a:noFill/>
-        </p:spPr>
-        <p:txBody>
-          <a:bodyPr wrap="square">
-            <a:spAutoFit/>
-          </a:bodyPr>
-          <a:lstStyle/>
-          <a:p>
-            <a:r>
-              <a:rPr sz="2200" b="1">
-                <a:solidFill>
-                  <a:srgbClr val="C44E52"/>
-                </a:solidFill>
-                <a:ea typeface="Malgun Gothic"/>
-                <a:latin typeface="Malgun Gothic"/>
-              </a:rPr>
-              <a:t>L2</a:t>
-            </a:r>
-          </a:p>
-        </p:txBody>
-      </p:sp>
-      <p:sp>
-        <p:nvSpPr>
-          <p:cNvPr id="10" name="TextBox 9"/>
-          <p:cNvSpPr txBox="1"/>
-          <p:nvPr/>
-        </p:nvSpPr>
-        <p:spPr>
-          <a:xfrm>
-            <a:off x="1080000" y="2268000"/>
-            <a:ext cx="10440000" cy="360000"/>
-          </a:xfrm>
-          <a:prstGeom prst="rect">
-            <a:avLst/>
-          </a:prstGeom>
-          <a:noFill/>
-        </p:spPr>
-        <p:txBody>
-          <a:bodyPr wrap="square">
-            <a:spAutoFit/>
-          </a:bodyPr>
-          <a:lstStyle/>
-          <a:p>
-            <a:r>
-              <a:rPr sz="1600" b="1">
-                <a:solidFill>
-                  <a:srgbClr val="1F3A68"/>
-                </a:solidFill>
-                <a:ea typeface="Malgun Gothic"/>
-                <a:latin typeface="Malgun Gothic"/>
-              </a:rPr>
-              <a:t>정식 IRB 인간평가 부재</a:t>
-            </a:r>
-          </a:p>
-        </p:txBody>
-      </p:sp>
-      <p:sp>
-        <p:nvSpPr>
-          <p:cNvPr id="11" name="TextBox 10"/>
-          <p:cNvSpPr txBox="1"/>
-          <p:nvPr/>
-        </p:nvSpPr>
-        <p:spPr>
-          <a:xfrm>
-            <a:off x="1080000" y="2592000"/>
-            <a:ext cx="10440000" cy="720000"/>
-          </a:xfrm>
-          <a:prstGeom prst="rect">
-            <a:avLst/>
-          </a:prstGeom>
-          <a:noFill/>
-        </p:spPr>
-        <p:txBody>
-          <a:bodyPr wrap="square">
-            <a:spAutoFit/>
-          </a:bodyPr>
-          <a:lstStyle/>
-          <a:p>
-            <a:r>
-              <a:rPr sz="1100" b="0">
-                <a:solidFill>
-                  <a:srgbClr val="222222"/>
-                </a:solidFill>
-                <a:ea typeface="Malgun Gothic"/>
-                <a:latin typeface="Malgun Gothic"/>
-              </a:rPr>
-              <a:t>현 평가는 LLM-proxy persona (Claude judge) — 실제 사용자 데이터 X
-→ Future work: IRB 간소판 + 다수 평가자 + Cohen's κ</a:t>
-            </a:r>
-          </a:p>
-        </p:txBody>
-      </p:sp>
-      <p:sp>
-        <p:nvSpPr>
-          <p:cNvPr id="12" name="TextBox 11"/>
-          <p:cNvSpPr txBox="1"/>
-          <p:nvPr/>
-        </p:nvSpPr>
-        <p:spPr>
-          <a:xfrm>
-            <a:off x="360000" y="3348000"/>
-            <a:ext cx="720000" cy="540000"/>
-          </a:xfrm>
-          <a:prstGeom prst="rect">
-            <a:avLst/>
-          </a:prstGeom>
-          <a:noFill/>
-        </p:spPr>
-        <p:txBody>
-          <a:bodyPr wrap="square">
-            <a:spAutoFit/>
-          </a:bodyPr>
-          <a:lstStyle/>
-          <a:p>
-            <a:r>
-              <a:rPr sz="2200" b="1">
-                <a:solidFill>
-                  <a:srgbClr val="C44E52"/>
-                </a:solidFill>
-                <a:ea typeface="Malgun Gothic"/>
-                <a:latin typeface="Malgun Gothic"/>
-              </a:rPr>
-              <a:t>L3</a:t>
-            </a:r>
-          </a:p>
-        </p:txBody>
-      </p:sp>
-      <p:sp>
-        <p:nvSpPr>
-          <p:cNvPr id="13" name="TextBox 12"/>
-          <p:cNvSpPr txBox="1"/>
-          <p:nvPr/>
-        </p:nvSpPr>
-        <p:spPr>
-          <a:xfrm>
-            <a:off x="1080000" y="3348000"/>
-            <a:ext cx="10440000" cy="360000"/>
-          </a:xfrm>
-          <a:prstGeom prst="rect">
-            <a:avLst/>
-          </a:prstGeom>
-          <a:noFill/>
-        </p:spPr>
-        <p:txBody>
-          <a:bodyPr wrap="square">
-            <a:spAutoFit/>
-          </a:bodyPr>
-          <a:lstStyle/>
-          <a:p>
-            <a:r>
-              <a:rPr sz="1600" b="1">
-                <a:solidFill>
-                  <a:srgbClr val="1F3A68"/>
-                </a:solidFill>
-                <a:ea typeface="Malgun Gothic"/>
-                <a:latin typeface="Malgun Gothic"/>
-              </a:rPr>
-              <a:t>Fusion의 Customer Clarity 약점</a:t>
-            </a:r>
-          </a:p>
-        </p:txBody>
-      </p:sp>
-      <p:sp>
-        <p:nvSpPr>
-          <p:cNvPr id="14" name="TextBox 13"/>
-          <p:cNvSpPr txBox="1"/>
-          <p:nvPr/>
-        </p:nvSpPr>
-        <p:spPr>
-          <a:xfrm>
-            <a:off x="1080000" y="3672000"/>
-            <a:ext cx="10440000" cy="720000"/>
-          </a:xfrm>
-          <a:prstGeom prst="rect">
-            <a:avLst/>
-          </a:prstGeom>
-          <a:noFill/>
-        </p:spPr>
-        <p:txBody>
-          <a:bodyPr wrap="square">
-            <a:spAutoFit/>
-          </a:bodyPr>
-          <a:lstStyle/>
-          <a:p>
-            <a:r>
-              <a:rPr sz="1100" b="0">
-                <a:solidFill>
-                  <a:srgbClr val="222222"/>
-                </a:solidFill>
-                <a:ea typeface="Malgun Gothic"/>
-                <a:latin typeface="Malgun Gothic"/>
-              </a:rPr>
-              <a:t>Customer persona 기준 fusion 2.67 vs generic_rag 4.93 (큰 격차)
-→ Future work: Customer-friendly 표현 정제, hybrid fusion 모드</a:t>
-            </a:r>
-          </a:p>
-        </p:txBody>
-      </p:sp>
-      <p:sp>
-        <p:nvSpPr>
-          <p:cNvPr id="15" name="TextBox 14"/>
-          <p:cNvSpPr txBox="1"/>
-          <p:nvPr/>
-        </p:nvSpPr>
-        <p:spPr>
-          <a:xfrm>
-            <a:off x="360000" y="4428000"/>
-            <a:ext cx="720000" cy="540000"/>
-          </a:xfrm>
-          <a:prstGeom prst="rect">
-            <a:avLst/>
-          </a:prstGeom>
-          <a:noFill/>
-        </p:spPr>
-        <p:txBody>
-          <a:bodyPr wrap="square">
-            <a:spAutoFit/>
-          </a:bodyPr>
-          <a:lstStyle/>
-          <a:p>
-            <a:r>
-              <a:rPr sz="2200" b="1">
-                <a:solidFill>
-                  <a:srgbClr val="C44E52"/>
-                </a:solidFill>
-                <a:ea typeface="Malgun Gothic"/>
-                <a:latin typeface="Malgun Gothic"/>
-              </a:rPr>
-              <a:t>L4</a:t>
-            </a:r>
-          </a:p>
-        </p:txBody>
-      </p:sp>
-      <p:sp>
-        <p:nvSpPr>
-          <p:cNvPr id="16" name="TextBox 15"/>
-          <p:cNvSpPr txBox="1"/>
-          <p:nvPr/>
-        </p:nvSpPr>
-        <p:spPr>
-          <a:xfrm>
-            <a:off x="1080000" y="4428000"/>
-            <a:ext cx="10440000" cy="360000"/>
-          </a:xfrm>
-          <a:prstGeom prst="rect">
-            <a:avLst/>
-          </a:prstGeom>
-          <a:noFill/>
-        </p:spPr>
-        <p:txBody>
-          <a:bodyPr wrap="square">
-            <a:spAutoFit/>
-          </a:bodyPr>
-          <a:lstStyle/>
-          <a:p>
-            <a:r>
-              <a:rPr sz="1600" b="1">
-                <a:solidFill>
-                  <a:srgbClr val="1F3A68"/>
-                </a:solidFill>
-                <a:ea typeface="Malgun Gothic"/>
-                <a:latin typeface="Malgun Gothic"/>
-              </a:rPr>
-              <a:t>Hard Constraint 의존성</a:t>
-            </a:r>
-          </a:p>
-        </p:txBody>
-      </p:sp>
-      <p:sp>
-        <p:nvSpPr>
-          <p:cNvPr id="17" name="TextBox 16"/>
-          <p:cNvSpPr txBox="1"/>
-          <p:nvPr/>
-        </p:nvSpPr>
-        <p:spPr>
-          <a:xfrm>
-            <a:off x="1080000" y="4752000"/>
-            <a:ext cx="10440000" cy="720000"/>
-          </a:xfrm>
-          <a:prstGeom prst="rect">
-            <a:avLst/>
-          </a:prstGeom>
-          <a:noFill/>
-        </p:spPr>
-        <p:txBody>
-          <a:bodyPr wrap="square">
-            <a:spAutoFit/>
-          </a:bodyPr>
-          <a:lstStyle/>
-          <a:p>
-            <a:r>
-              <a:rPr sz="1100" b="0">
-                <a:solidFill>
-                  <a:srgbClr val="222222"/>
-                </a:solidFill>
-                <a:ea typeface="Malgun Gothic"/>
-                <a:latin typeface="Malgun Gothic"/>
-              </a:rPr>
-              <a:t>환각 차단은 hard constraints에 의존 — 제거 시 baseline no_shap 45.5 % 환각 확인
-→ Constraint 강도와 일반화 가능성 추가 검증 필요</a:t>
-            </a:r>
-          </a:p>
-        </p:txBody>
-      </p:sp>
-      <p:sp>
-        <p:nvSpPr>
-          <p:cNvPr id="18" name="TextBox 17"/>
-          <p:cNvSpPr txBox="1"/>
-          <p:nvPr/>
-        </p:nvSpPr>
-        <p:spPr>
-          <a:xfrm>
-            <a:off x="360000" y="6534000"/>
-            <a:ext cx="7920000" cy="216000"/>
-          </a:xfrm>
-          <a:prstGeom prst="rect">
-            <a:avLst/>
-          </a:prstGeom>
-          <a:noFill/>
-        </p:spPr>
-        <p:txBody>
-          <a:bodyPr wrap="square">
-            <a:spAutoFit/>
-          </a:bodyPr>
-          <a:lstStyle/>
-          <a:p>
+            <a:pPr algn="r"/>
             <a:r>
               <a:rPr sz="900" b="0">
                 <a:solidFill>
@@ -18172,43 +21236,7 @@
                 <a:ea typeface="Malgun Gothic"/>
                 <a:latin typeface="Malgun Gothic"/>
               </a:rPr>
-              <a:t>TabNet × SHAP × LLM XAI-RAG  |  A70067 오현택</a:t>
-            </a:r>
-          </a:p>
-        </p:txBody>
-      </p:sp>
-      <p:sp>
-        <p:nvSpPr>
-          <p:cNvPr id="19" name="TextBox 18"/>
-          <p:cNvSpPr txBox="1"/>
-          <p:nvPr/>
-        </p:nvSpPr>
-        <p:spPr>
-          <a:xfrm>
-            <a:off x="11111695" y="6534000"/>
-            <a:ext cx="720000" cy="216000"/>
-          </a:xfrm>
-          <a:prstGeom prst="rect">
-            <a:avLst/>
-          </a:prstGeom>
-          <a:noFill/>
-        </p:spPr>
-        <p:txBody>
-          <a:bodyPr wrap="square">
-            <a:spAutoFit/>
-          </a:bodyPr>
-          <a:lstStyle/>
-          <a:p>
-            <a:pPr algn="r"/>
-            <a:r>
-              <a:rPr sz="900" b="0">
-                <a:solidFill>
-                  <a:srgbClr val="555555"/>
-                </a:solidFill>
-                <a:ea typeface="Malgun Gothic"/>
-                <a:latin typeface="Malgun Gothic"/>
-              </a:rPr>
-              <a:t>23 / 26</a:t>
+              <a:t>23 / 27</a:t>
             </a:r>
           </a:p>
         </p:txBody>
@@ -18304,7 +21332,7 @@
                 <a:ea typeface="Malgun Gothic"/>
                 <a:latin typeface="Malgun Gothic"/>
               </a:rPr>
-              <a:t>22. 응용 시나리오별 Mode 선택 가이드</a:t>
+              <a:t>22. Honest Reporting — 연구의 한계</a:t>
             </a:r>
           </a:p>
         </p:txBody>
@@ -18339,7 +21367,7 @@
                 <a:ea typeface="Malgun Gothic"/>
                 <a:latin typeface="Malgun Gothic"/>
               </a:rPr>
-              <a:t>본 연구가 제시하는 실무 적용 권고</a:t>
+              <a:t>학술 논문의 정직성 표준에 따라 명시적 한계 보고</a:t>
             </a:r>
           </a:p>
         </p:txBody>
@@ -18389,382 +21417,14 @@
       </p:sp>
       <p:sp>
         <p:nvSpPr>
-          <p:cNvPr id="6" name="Rounded Rectangle 5"/>
-          <p:cNvSpPr/>
-          <p:nvPr/>
-        </p:nvSpPr>
-        <p:spPr>
-          <a:xfrm>
-            <a:off x="360000" y="1260000"/>
-            <a:ext cx="5580000" cy="2160000"/>
-          </a:xfrm>
-          <a:prstGeom prst="roundRect">
-            <a:avLst/>
-          </a:prstGeom>
-          <a:solidFill>
-            <a:srgbClr val="55A868"/>
-          </a:solidFill>
-          <a:ln>
-            <a:noFill/>
-          </a:ln>
-        </p:spPr>
-        <p:style>
-          <a:lnRef idx="1">
-            <a:schemeClr val="accent1"/>
-          </a:lnRef>
-          <a:fillRef idx="3">
-            <a:schemeClr val="accent1"/>
-          </a:fillRef>
-          <a:effectRef idx="2">
-            <a:schemeClr val="accent1"/>
-          </a:effectRef>
-          <a:fontRef idx="minor">
-            <a:schemeClr val="lt1"/>
-          </a:fontRef>
-        </p:style>
-        <p:txBody>
-          <a:bodyPr rtlCol="0" anchor="t" lIns="144000" tIns="108000"/>
-          <a:lstStyle/>
-          <a:p>
-            <a:pPr algn="ctr"/>
-            <a:r>
-              <a:rPr sz="1500" b="1">
-                <a:solidFill>
-                  <a:srgbClr val="FFFFFF"/>
-                </a:solidFill>
-                <a:ea typeface="Malgun Gothic"/>
-                <a:latin typeface="Malgun Gothic"/>
-              </a:rPr>
-              <a:t>Audit / Regulation</a:t>
-            </a:r>
-          </a:p>
-          <a:p>
-            <a:r>
-              <a:rPr sz="1100" b="0">
-                <a:solidFill>
-                  <a:srgbClr val="FFFFFF"/>
-                </a:solidFill>
-                <a:ea typeface="Malgun Gothic"/>
-                <a:latin typeface="Malgun Gothic"/>
-              </a:rPr>
-              <a:t>기준: 사실성 우선, 추적 가능성 필수</a:t>
-            </a:r>
-          </a:p>
-          <a:p>
-            <a:r>
-              <a:rPr sz="1400" b="1">
-                <a:solidFill>
-                  <a:srgbClr val="FFFFFF"/>
-                </a:solidFill>
-                <a:ea typeface="Malgun Gothic"/>
-                <a:latin typeface="Malgun Gothic"/>
-              </a:rPr>
-              <a:t>
-★ fusion 권장</a:t>
-            </a:r>
-          </a:p>
-          <a:p>
-            <a:r>
-              <a:rPr sz="1000" b="0">
-                <a:solidFill>
-                  <a:srgbClr val="FFFFFF"/>
-                </a:solidFill>
-                <a:ea typeface="Malgun Gothic"/>
-                <a:latin typeface="Malgun Gothic"/>
-              </a:rPr>
-              <a:t>
-Agreement 라벨 + Value Match 0.90
-→ 감사·규제 대응 적합</a:t>
-            </a:r>
-          </a:p>
-        </p:txBody>
-      </p:sp>
-      <p:sp>
-        <p:nvSpPr>
-          <p:cNvPr id="7" name="Rounded Rectangle 6"/>
-          <p:cNvSpPr/>
-          <p:nvPr/>
-        </p:nvSpPr>
-        <p:spPr>
-          <a:xfrm>
-            <a:off x="6120000" y="1260000"/>
-            <a:ext cx="5580000" cy="2160000"/>
-          </a:xfrm>
-          <a:prstGeom prst="roundRect">
-            <a:avLst/>
-          </a:prstGeom>
-          <a:solidFill>
-            <a:srgbClr val="1F3A68"/>
-          </a:solidFill>
-          <a:ln>
-            <a:noFill/>
-          </a:ln>
-        </p:spPr>
-        <p:style>
-          <a:lnRef idx="1">
-            <a:schemeClr val="accent1"/>
-          </a:lnRef>
-          <a:fillRef idx="3">
-            <a:schemeClr val="accent1"/>
-          </a:fillRef>
-          <a:effectRef idx="2">
-            <a:schemeClr val="accent1"/>
-          </a:effectRef>
-          <a:fontRef idx="minor">
-            <a:schemeClr val="lt1"/>
-          </a:fontRef>
-        </p:style>
-        <p:txBody>
-          <a:bodyPr rtlCol="0" anchor="t" lIns="144000" tIns="108000"/>
-          <a:lstStyle/>
-          <a:p>
-            <a:pPr algn="ctr"/>
-            <a:r>
-              <a:rPr sz="1500" b="1">
-                <a:solidFill>
-                  <a:srgbClr val="FFFFFF"/>
-                </a:solidFill>
-                <a:ea typeface="Malgun Gothic"/>
-                <a:latin typeface="Malgun Gothic"/>
-              </a:rPr>
-              <a:t>Customer-facing</a:t>
-            </a:r>
-          </a:p>
-          <a:p>
-            <a:r>
-              <a:rPr sz="1100" b="0">
-                <a:solidFill>
-                  <a:srgbClr val="FFFFFF"/>
-                </a:solidFill>
-                <a:ea typeface="Malgun Gothic"/>
-                <a:latin typeface="Malgun Gothic"/>
-              </a:rPr>
-              <a:t>기준: 이해 용이성·친근함 우선</a:t>
-            </a:r>
-          </a:p>
-          <a:p>
-            <a:r>
-              <a:rPr sz="1400" b="1">
-                <a:solidFill>
-                  <a:srgbClr val="FFFFFF"/>
-                </a:solidFill>
-                <a:ea typeface="Malgun Gothic"/>
-                <a:latin typeface="Malgun Gothic"/>
-              </a:rPr>
-              <a:t>
-★ generic_rag 권장</a:t>
-            </a:r>
-          </a:p>
-          <a:p>
-            <a:r>
-              <a:rPr sz="1000" b="0">
-                <a:solidFill>
-                  <a:srgbClr val="FFFFFF"/>
-                </a:solidFill>
-                <a:ea typeface="Malgun Gothic"/>
-                <a:latin typeface="Malgun Gothic"/>
-              </a:rPr>
-              <a:t>
-Customer clarity 4.93
-→ 일반 차주 대상 안내·고객센터</a:t>
-            </a:r>
-          </a:p>
-        </p:txBody>
-      </p:sp>
-      <p:sp>
-        <p:nvSpPr>
-          <p:cNvPr id="8" name="Rounded Rectangle 7"/>
-          <p:cNvSpPr/>
-          <p:nvPr/>
-        </p:nvSpPr>
-        <p:spPr>
-          <a:xfrm>
-            <a:off x="360000" y="3600000"/>
-            <a:ext cx="5580000" cy="2160000"/>
-          </a:xfrm>
-          <a:prstGeom prst="roundRect">
-            <a:avLst/>
-          </a:prstGeom>
-          <a:solidFill>
-            <a:srgbClr val="DD8852"/>
-          </a:solidFill>
-          <a:ln>
-            <a:noFill/>
-          </a:ln>
-        </p:spPr>
-        <p:style>
-          <a:lnRef idx="1">
-            <a:schemeClr val="accent1"/>
-          </a:lnRef>
-          <a:fillRef idx="3">
-            <a:schemeClr val="accent1"/>
-          </a:fillRef>
-          <a:effectRef idx="2">
-            <a:schemeClr val="accent1"/>
-          </a:effectRef>
-          <a:fontRef idx="minor">
-            <a:schemeClr val="lt1"/>
-          </a:fontRef>
-        </p:style>
-        <p:txBody>
-          <a:bodyPr rtlCol="0" anchor="t" lIns="144000" tIns="108000"/>
-          <a:lstStyle/>
-          <a:p>
-            <a:pPr algn="ctr"/>
-            <a:r>
-              <a:rPr sz="1500" b="1">
-                <a:solidFill>
-                  <a:srgbClr val="FFFFFF"/>
-                </a:solidFill>
-                <a:ea typeface="Malgun Gothic"/>
-                <a:latin typeface="Malgun Gothic"/>
-              </a:rPr>
-              <a:t>복잡 도메인 (Home Credit급)</a:t>
-            </a:r>
-          </a:p>
-          <a:p>
-            <a:r>
-              <a:rPr sz="1100" b="0">
-                <a:solidFill>
-                  <a:srgbClr val="FFFFFF"/>
-                </a:solidFill>
-                <a:ea typeface="Malgun Gothic"/>
-                <a:latin typeface="Malgun Gothic"/>
-              </a:rPr>
-              <a:t>기준: 고차원·다변수·다양 관계</a:t>
-            </a:r>
-          </a:p>
-          <a:p>
-            <a:r>
-              <a:rPr sz="1400" b="1">
-                <a:solidFill>
-                  <a:srgbClr val="FFFFFF"/>
-                </a:solidFill>
-                <a:ea typeface="Malgun Gothic"/>
-                <a:latin typeface="Malgun Gothic"/>
-              </a:rPr>
-              <a:t>
-★ fusion 권장</a:t>
-            </a:r>
-          </a:p>
-          <a:p>
-            <a:r>
-              <a:rPr sz="1000" b="0">
-                <a:solidFill>
-                  <a:srgbClr val="FFFFFF"/>
-                </a:solidFill>
-                <a:ea typeface="Malgun Gothic"/>
-                <a:latin typeface="Malgun Gothic"/>
-              </a:rPr>
-              <a:t>
-G-Eval Completeness 1위
-→ 정보량이 많을수록 fusion 유리</a:t>
-            </a:r>
-          </a:p>
-        </p:txBody>
-      </p:sp>
-      <p:sp>
-        <p:nvSpPr>
-          <p:cNvPr id="9" name="Rounded Rectangle 8"/>
-          <p:cNvSpPr/>
-          <p:nvPr/>
-        </p:nvSpPr>
-        <p:spPr>
-          <a:xfrm>
-            <a:off x="6120000" y="3600000"/>
-            <a:ext cx="5580000" cy="2160000"/>
-          </a:xfrm>
-          <a:prstGeom prst="roundRect">
-            <a:avLst/>
-          </a:prstGeom>
-          <a:solidFill>
-            <a:srgbClr val="8C6BB1"/>
-          </a:solidFill>
-          <a:ln>
-            <a:noFill/>
-          </a:ln>
-        </p:spPr>
-        <p:style>
-          <a:lnRef idx="1">
-            <a:schemeClr val="accent1"/>
-          </a:lnRef>
-          <a:fillRef idx="3">
-            <a:schemeClr val="accent1"/>
-          </a:fillRef>
-          <a:effectRef idx="2">
-            <a:schemeClr val="accent1"/>
-          </a:effectRef>
-          <a:fontRef idx="minor">
-            <a:schemeClr val="lt1"/>
-          </a:fontRef>
-        </p:style>
-        <p:txBody>
-          <a:bodyPr rtlCol="0" anchor="t" lIns="144000" tIns="108000"/>
-          <a:lstStyle/>
-          <a:p>
-            <a:pPr algn="ctr"/>
-            <a:r>
-              <a:rPr sz="1500" b="1">
-                <a:solidFill>
-                  <a:srgbClr val="FFFFFF"/>
-                </a:solidFill>
-                <a:ea typeface="Malgun Gothic"/>
-                <a:latin typeface="Malgun Gothic"/>
-              </a:rPr>
-              <a:t>단순 도메인 (German Credit급)</a:t>
-            </a:r>
-          </a:p>
-          <a:p>
-            <a:r>
-              <a:rPr sz="1100" b="0">
-                <a:solidFill>
-                  <a:srgbClr val="FFFFFF"/>
-                </a:solidFill>
-                <a:ea typeface="Malgun Gothic"/>
-                <a:latin typeface="Malgun Gothic"/>
-              </a:rPr>
-              <a:t>기준: 저차원·소표본</a:t>
-            </a:r>
-          </a:p>
-          <a:p>
-            <a:r>
-              <a:rPr sz="1400" b="1">
-                <a:solidFill>
-                  <a:srgbClr val="FFFFFF"/>
-                </a:solidFill>
-                <a:ea typeface="Malgun Gothic"/>
-                <a:latin typeface="Malgun Gothic"/>
-              </a:rPr>
-              <a:t>
-★ generic_rag 권장</a:t>
-            </a:r>
-          </a:p>
-          <a:p>
-            <a:r>
-              <a:rPr sz="1000" b="0">
-                <a:solidFill>
-                  <a:srgbClr val="FFFFFF"/>
-                </a:solidFill>
-                <a:ea typeface="Malgun Gothic"/>
-                <a:latin typeface="Malgun Gothic"/>
-              </a:rPr>
-              <a:t>
-G-Eval Completeness 1위
-→ 도메인 지식 chunks가 보완</a:t>
-            </a:r>
-          </a:p>
-        </p:txBody>
-      </p:sp>
-      <p:sp>
-        <p:nvSpPr>
-          <p:cNvPr id="10" name="TextBox 9"/>
+          <p:cNvPr id="6" name="TextBox 5"/>
           <p:cNvSpPr txBox="1"/>
           <p:nvPr/>
         </p:nvSpPr>
         <p:spPr>
           <a:xfrm>
-            <a:off x="360000" y="6534000"/>
-            <a:ext cx="7920000" cy="216000"/>
+            <a:off x="360000" y="1188000"/>
+            <a:ext cx="720000" cy="540000"/>
           </a:xfrm>
           <a:prstGeom prst="rect">
             <a:avLst/>
@@ -18778,28 +21438,28 @@
           <a:lstStyle/>
           <a:p>
             <a:r>
-              <a:rPr sz="900" b="0">
-                <a:solidFill>
-                  <a:srgbClr val="555555"/>
-                </a:solidFill>
-                <a:ea typeface="Malgun Gothic"/>
-                <a:latin typeface="Malgun Gothic"/>
-              </a:rPr>
-              <a:t>TabNet × SHAP × LLM XAI-RAG  |  A70067 오현택</a:t>
-            </a:r>
-          </a:p>
-        </p:txBody>
-      </p:sp>
-      <p:sp>
-        <p:nvSpPr>
-          <p:cNvPr id="11" name="TextBox 10"/>
+              <a:rPr sz="2200" b="1">
+                <a:solidFill>
+                  <a:srgbClr val="C44E52"/>
+                </a:solidFill>
+                <a:ea typeface="Malgun Gothic"/>
+                <a:latin typeface="Malgun Gothic"/>
+              </a:rPr>
+              <a:t>L1</a:t>
+            </a:r>
+          </a:p>
+        </p:txBody>
+      </p:sp>
+      <p:sp>
+        <p:nvSpPr>
+          <p:cNvPr id="7" name="TextBox 6"/>
           <p:cNvSpPr txBox="1"/>
           <p:nvPr/>
         </p:nvSpPr>
         <p:spPr>
           <a:xfrm>
-            <a:off x="11111695" y="6534000"/>
-            <a:ext cx="720000" cy="216000"/>
+            <a:off x="1080000" y="1188000"/>
+            <a:ext cx="10440000" cy="360000"/>
           </a:xfrm>
           <a:prstGeom prst="rect">
             <a:avLst/>
@@ -18812,6 +21472,430 @@
           </a:bodyPr>
           <a:lstStyle/>
           <a:p>
+            <a:r>
+              <a:rPr sz="1600" b="1">
+                <a:solidFill>
+                  <a:srgbClr val="1F3A68"/>
+                </a:solidFill>
+                <a:ea typeface="Malgun Gothic"/>
+                <a:latin typeface="Malgun Gothic"/>
+              </a:rPr>
+              <a:t>표본 크기 30 인스턴스</a:t>
+            </a:r>
+          </a:p>
+        </p:txBody>
+      </p:sp>
+      <p:sp>
+        <p:nvSpPr>
+          <p:cNvPr id="8" name="TextBox 7"/>
+          <p:cNvSpPr txBox="1"/>
+          <p:nvPr/>
+        </p:nvSpPr>
+        <p:spPr>
+          <a:xfrm>
+            <a:off x="1080000" y="1512000"/>
+            <a:ext cx="10440000" cy="720000"/>
+          </a:xfrm>
+          <a:prstGeom prst="rect">
+            <a:avLst/>
+          </a:prstGeom>
+          <a:noFill/>
+        </p:spPr>
+        <p:txBody>
+          <a:bodyPr wrap="square">
+            <a:spAutoFit/>
+          </a:bodyPr>
+          <a:lstStyle/>
+          <a:p>
+            <a:r>
+              <a:rPr sz="1100" b="0">
+                <a:solidFill>
+                  <a:srgbClr val="222222"/>
+                </a:solidFill>
+                <a:ea typeface="Malgun Gothic"/>
+                <a:latin typeface="Malgun Gothic"/>
+              </a:rPr>
+              <a:t>4-mode × 2 LLM × 30 = 240 explanations — 통계적 의의는 trends 수준
+→ Future work: 표본 100+ 확장, 정식 통계 검정 (Wilcoxon paired)</a:t>
+            </a:r>
+          </a:p>
+        </p:txBody>
+      </p:sp>
+      <p:sp>
+        <p:nvSpPr>
+          <p:cNvPr id="9" name="TextBox 8"/>
+          <p:cNvSpPr txBox="1"/>
+          <p:nvPr/>
+        </p:nvSpPr>
+        <p:spPr>
+          <a:xfrm>
+            <a:off x="360000" y="2268000"/>
+            <a:ext cx="720000" cy="540000"/>
+          </a:xfrm>
+          <a:prstGeom prst="rect">
+            <a:avLst/>
+          </a:prstGeom>
+          <a:noFill/>
+        </p:spPr>
+        <p:txBody>
+          <a:bodyPr wrap="square">
+            <a:spAutoFit/>
+          </a:bodyPr>
+          <a:lstStyle/>
+          <a:p>
+            <a:r>
+              <a:rPr sz="2200" b="1">
+                <a:solidFill>
+                  <a:srgbClr val="C44E52"/>
+                </a:solidFill>
+                <a:ea typeface="Malgun Gothic"/>
+                <a:latin typeface="Malgun Gothic"/>
+              </a:rPr>
+              <a:t>L2</a:t>
+            </a:r>
+          </a:p>
+        </p:txBody>
+      </p:sp>
+      <p:sp>
+        <p:nvSpPr>
+          <p:cNvPr id="10" name="TextBox 9"/>
+          <p:cNvSpPr txBox="1"/>
+          <p:nvPr/>
+        </p:nvSpPr>
+        <p:spPr>
+          <a:xfrm>
+            <a:off x="1080000" y="2268000"/>
+            <a:ext cx="10440000" cy="360000"/>
+          </a:xfrm>
+          <a:prstGeom prst="rect">
+            <a:avLst/>
+          </a:prstGeom>
+          <a:noFill/>
+        </p:spPr>
+        <p:txBody>
+          <a:bodyPr wrap="square">
+            <a:spAutoFit/>
+          </a:bodyPr>
+          <a:lstStyle/>
+          <a:p>
+            <a:r>
+              <a:rPr sz="1600" b="1">
+                <a:solidFill>
+                  <a:srgbClr val="1F3A68"/>
+                </a:solidFill>
+                <a:ea typeface="Malgun Gothic"/>
+                <a:latin typeface="Malgun Gothic"/>
+              </a:rPr>
+              <a:t>정식 IRB 인간평가 부재</a:t>
+            </a:r>
+          </a:p>
+        </p:txBody>
+      </p:sp>
+      <p:sp>
+        <p:nvSpPr>
+          <p:cNvPr id="11" name="TextBox 10"/>
+          <p:cNvSpPr txBox="1"/>
+          <p:nvPr/>
+        </p:nvSpPr>
+        <p:spPr>
+          <a:xfrm>
+            <a:off x="1080000" y="2592000"/>
+            <a:ext cx="10440000" cy="720000"/>
+          </a:xfrm>
+          <a:prstGeom prst="rect">
+            <a:avLst/>
+          </a:prstGeom>
+          <a:noFill/>
+        </p:spPr>
+        <p:txBody>
+          <a:bodyPr wrap="square">
+            <a:spAutoFit/>
+          </a:bodyPr>
+          <a:lstStyle/>
+          <a:p>
+            <a:r>
+              <a:rPr sz="1100" b="0">
+                <a:solidFill>
+                  <a:srgbClr val="222222"/>
+                </a:solidFill>
+                <a:ea typeface="Malgun Gothic"/>
+                <a:latin typeface="Malgun Gothic"/>
+              </a:rPr>
+              <a:t>현 평가는 LLM-proxy persona (Claude judge) — 실제 사용자 데이터 X
+→ Future work: IRB 간소판 + 다수 평가자 + Cohen's κ</a:t>
+            </a:r>
+          </a:p>
+        </p:txBody>
+      </p:sp>
+      <p:sp>
+        <p:nvSpPr>
+          <p:cNvPr id="12" name="TextBox 11"/>
+          <p:cNvSpPr txBox="1"/>
+          <p:nvPr/>
+        </p:nvSpPr>
+        <p:spPr>
+          <a:xfrm>
+            <a:off x="360000" y="3348000"/>
+            <a:ext cx="720000" cy="540000"/>
+          </a:xfrm>
+          <a:prstGeom prst="rect">
+            <a:avLst/>
+          </a:prstGeom>
+          <a:noFill/>
+        </p:spPr>
+        <p:txBody>
+          <a:bodyPr wrap="square">
+            <a:spAutoFit/>
+          </a:bodyPr>
+          <a:lstStyle/>
+          <a:p>
+            <a:r>
+              <a:rPr sz="2200" b="1">
+                <a:solidFill>
+                  <a:srgbClr val="C44E52"/>
+                </a:solidFill>
+                <a:ea typeface="Malgun Gothic"/>
+                <a:latin typeface="Malgun Gothic"/>
+              </a:rPr>
+              <a:t>L3</a:t>
+            </a:r>
+          </a:p>
+        </p:txBody>
+      </p:sp>
+      <p:sp>
+        <p:nvSpPr>
+          <p:cNvPr id="13" name="TextBox 12"/>
+          <p:cNvSpPr txBox="1"/>
+          <p:nvPr/>
+        </p:nvSpPr>
+        <p:spPr>
+          <a:xfrm>
+            <a:off x="1080000" y="3348000"/>
+            <a:ext cx="10440000" cy="360000"/>
+          </a:xfrm>
+          <a:prstGeom prst="rect">
+            <a:avLst/>
+          </a:prstGeom>
+          <a:noFill/>
+        </p:spPr>
+        <p:txBody>
+          <a:bodyPr wrap="square">
+            <a:spAutoFit/>
+          </a:bodyPr>
+          <a:lstStyle/>
+          <a:p>
+            <a:r>
+              <a:rPr sz="1600" b="1">
+                <a:solidFill>
+                  <a:srgbClr val="1F3A68"/>
+                </a:solidFill>
+                <a:ea typeface="Malgun Gothic"/>
+                <a:latin typeface="Malgun Gothic"/>
+              </a:rPr>
+              <a:t>Fusion의 Customer Clarity 약점</a:t>
+            </a:r>
+          </a:p>
+        </p:txBody>
+      </p:sp>
+      <p:sp>
+        <p:nvSpPr>
+          <p:cNvPr id="14" name="TextBox 13"/>
+          <p:cNvSpPr txBox="1"/>
+          <p:nvPr/>
+        </p:nvSpPr>
+        <p:spPr>
+          <a:xfrm>
+            <a:off x="1080000" y="3672000"/>
+            <a:ext cx="10440000" cy="720000"/>
+          </a:xfrm>
+          <a:prstGeom prst="rect">
+            <a:avLst/>
+          </a:prstGeom>
+          <a:noFill/>
+        </p:spPr>
+        <p:txBody>
+          <a:bodyPr wrap="square">
+            <a:spAutoFit/>
+          </a:bodyPr>
+          <a:lstStyle/>
+          <a:p>
+            <a:r>
+              <a:rPr sz="1100" b="0">
+                <a:solidFill>
+                  <a:srgbClr val="222222"/>
+                </a:solidFill>
+                <a:ea typeface="Malgun Gothic"/>
+                <a:latin typeface="Malgun Gothic"/>
+              </a:rPr>
+              <a:t>Customer persona 기준 fusion 2.67 vs generic_rag 4.93 (큰 격차)
+→ Future work: Customer-friendly 표현 정제, hybrid fusion 모드</a:t>
+            </a:r>
+          </a:p>
+        </p:txBody>
+      </p:sp>
+      <p:sp>
+        <p:nvSpPr>
+          <p:cNvPr id="15" name="TextBox 14"/>
+          <p:cNvSpPr txBox="1"/>
+          <p:nvPr/>
+        </p:nvSpPr>
+        <p:spPr>
+          <a:xfrm>
+            <a:off x="360000" y="4428000"/>
+            <a:ext cx="720000" cy="540000"/>
+          </a:xfrm>
+          <a:prstGeom prst="rect">
+            <a:avLst/>
+          </a:prstGeom>
+          <a:noFill/>
+        </p:spPr>
+        <p:txBody>
+          <a:bodyPr wrap="square">
+            <a:spAutoFit/>
+          </a:bodyPr>
+          <a:lstStyle/>
+          <a:p>
+            <a:r>
+              <a:rPr sz="2200" b="1">
+                <a:solidFill>
+                  <a:srgbClr val="C44E52"/>
+                </a:solidFill>
+                <a:ea typeface="Malgun Gothic"/>
+                <a:latin typeface="Malgun Gothic"/>
+              </a:rPr>
+              <a:t>L4</a:t>
+            </a:r>
+          </a:p>
+        </p:txBody>
+      </p:sp>
+      <p:sp>
+        <p:nvSpPr>
+          <p:cNvPr id="16" name="TextBox 15"/>
+          <p:cNvSpPr txBox="1"/>
+          <p:nvPr/>
+        </p:nvSpPr>
+        <p:spPr>
+          <a:xfrm>
+            <a:off x="1080000" y="4428000"/>
+            <a:ext cx="10440000" cy="360000"/>
+          </a:xfrm>
+          <a:prstGeom prst="rect">
+            <a:avLst/>
+          </a:prstGeom>
+          <a:noFill/>
+        </p:spPr>
+        <p:txBody>
+          <a:bodyPr wrap="square">
+            <a:spAutoFit/>
+          </a:bodyPr>
+          <a:lstStyle/>
+          <a:p>
+            <a:r>
+              <a:rPr sz="1600" b="1">
+                <a:solidFill>
+                  <a:srgbClr val="1F3A68"/>
+                </a:solidFill>
+                <a:ea typeface="Malgun Gothic"/>
+                <a:latin typeface="Malgun Gothic"/>
+              </a:rPr>
+              <a:t>Hard Constraint 의존성</a:t>
+            </a:r>
+          </a:p>
+        </p:txBody>
+      </p:sp>
+      <p:sp>
+        <p:nvSpPr>
+          <p:cNvPr id="17" name="TextBox 16"/>
+          <p:cNvSpPr txBox="1"/>
+          <p:nvPr/>
+        </p:nvSpPr>
+        <p:spPr>
+          <a:xfrm>
+            <a:off x="1080000" y="4752000"/>
+            <a:ext cx="10440000" cy="720000"/>
+          </a:xfrm>
+          <a:prstGeom prst="rect">
+            <a:avLst/>
+          </a:prstGeom>
+          <a:noFill/>
+        </p:spPr>
+        <p:txBody>
+          <a:bodyPr wrap="square">
+            <a:spAutoFit/>
+          </a:bodyPr>
+          <a:lstStyle/>
+          <a:p>
+            <a:r>
+              <a:rPr sz="1100" b="0">
+                <a:solidFill>
+                  <a:srgbClr val="222222"/>
+                </a:solidFill>
+                <a:ea typeface="Malgun Gothic"/>
+                <a:latin typeface="Malgun Gothic"/>
+              </a:rPr>
+              <a:t>환각 차단은 hard constraints에 의존 — 제거 시 baseline no_shap 45.5 % 환각 확인
+→ Constraint 강도와 일반화 가능성 추가 검증 필요</a:t>
+            </a:r>
+          </a:p>
+        </p:txBody>
+      </p:sp>
+      <p:sp>
+        <p:nvSpPr>
+          <p:cNvPr id="18" name="TextBox 17"/>
+          <p:cNvSpPr txBox="1"/>
+          <p:nvPr/>
+        </p:nvSpPr>
+        <p:spPr>
+          <a:xfrm>
+            <a:off x="360000" y="6534000"/>
+            <a:ext cx="7920000" cy="216000"/>
+          </a:xfrm>
+          <a:prstGeom prst="rect">
+            <a:avLst/>
+          </a:prstGeom>
+          <a:noFill/>
+        </p:spPr>
+        <p:txBody>
+          <a:bodyPr wrap="square">
+            <a:spAutoFit/>
+          </a:bodyPr>
+          <a:lstStyle/>
+          <a:p>
+            <a:r>
+              <a:rPr sz="900" b="0">
+                <a:solidFill>
+                  <a:srgbClr val="555555"/>
+                </a:solidFill>
+                <a:ea typeface="Malgun Gothic"/>
+                <a:latin typeface="Malgun Gothic"/>
+              </a:rPr>
+              <a:t>TabNet × SHAP × LLM XAI-RAG  |  A70067 오현택</a:t>
+            </a:r>
+          </a:p>
+        </p:txBody>
+      </p:sp>
+      <p:sp>
+        <p:nvSpPr>
+          <p:cNvPr id="19" name="TextBox 18"/>
+          <p:cNvSpPr txBox="1"/>
+          <p:nvPr/>
+        </p:nvSpPr>
+        <p:spPr>
+          <a:xfrm>
+            <a:off x="11111695" y="6534000"/>
+            <a:ext cx="720000" cy="216000"/>
+          </a:xfrm>
+          <a:prstGeom prst="rect">
+            <a:avLst/>
+          </a:prstGeom>
+          <a:noFill/>
+        </p:spPr>
+        <p:txBody>
+          <a:bodyPr wrap="square">
+            <a:spAutoFit/>
+          </a:bodyPr>
+          <a:lstStyle/>
+          <a:p>
             <a:pPr algn="r"/>
             <a:r>
               <a:rPr sz="900" b="0">
@@ -18821,7 +21905,7 @@
                 <a:ea typeface="Malgun Gothic"/>
                 <a:latin typeface="Malgun Gothic"/>
               </a:rPr>
-              <a:t>24 / 26</a:t>
+              <a:t>24 / 27</a:t>
             </a:r>
           </a:p>
         </p:txBody>
@@ -18917,7 +22001,7 @@
                 <a:ea typeface="Malgun Gothic"/>
                 <a:latin typeface="Malgun Gothic"/>
               </a:rPr>
-              <a:t>23. 향후 연구 방향</a:t>
+              <a:t>23. 응용 시나리오별 Mode 선택 가이드</a:t>
             </a:r>
           </a:p>
         </p:txBody>
@@ -18952,7 +22036,7 @@
                 <a:ea typeface="Malgun Gothic"/>
                 <a:latin typeface="Malgun Gothic"/>
               </a:rPr>
-              <a:t>본 연구를 확장할 수 있는 4 가지 방향</a:t>
+              <a:t>본 연구가 제시하는 실무 적용 권고</a:t>
             </a:r>
           </a:p>
         </p:txBody>
@@ -19002,14 +22086,382 @@
       </p:sp>
       <p:sp>
         <p:nvSpPr>
-          <p:cNvPr id="6" name="TextBox 5"/>
+          <p:cNvPr id="6" name="Rounded Rectangle 5"/>
+          <p:cNvSpPr/>
+          <p:nvPr/>
+        </p:nvSpPr>
+        <p:spPr>
+          <a:xfrm>
+            <a:off x="360000" y="1260000"/>
+            <a:ext cx="5580000" cy="2160000"/>
+          </a:xfrm>
+          <a:prstGeom prst="roundRect">
+            <a:avLst/>
+          </a:prstGeom>
+          <a:solidFill>
+            <a:srgbClr val="55A868"/>
+          </a:solidFill>
+          <a:ln>
+            <a:noFill/>
+          </a:ln>
+        </p:spPr>
+        <p:style>
+          <a:lnRef idx="1">
+            <a:schemeClr val="accent1"/>
+          </a:lnRef>
+          <a:fillRef idx="3">
+            <a:schemeClr val="accent1"/>
+          </a:fillRef>
+          <a:effectRef idx="2">
+            <a:schemeClr val="accent1"/>
+          </a:effectRef>
+          <a:fontRef idx="minor">
+            <a:schemeClr val="lt1"/>
+          </a:fontRef>
+        </p:style>
+        <p:txBody>
+          <a:bodyPr rtlCol="0" anchor="t" lIns="144000" tIns="108000"/>
+          <a:lstStyle/>
+          <a:p>
+            <a:pPr algn="ctr"/>
+            <a:r>
+              <a:rPr sz="1500" b="1">
+                <a:solidFill>
+                  <a:srgbClr val="FFFFFF"/>
+                </a:solidFill>
+                <a:ea typeface="Malgun Gothic"/>
+                <a:latin typeface="Malgun Gothic"/>
+              </a:rPr>
+              <a:t>Audit / Regulation</a:t>
+            </a:r>
+          </a:p>
+          <a:p>
+            <a:r>
+              <a:rPr sz="1100" b="0">
+                <a:solidFill>
+                  <a:srgbClr val="FFFFFF"/>
+                </a:solidFill>
+                <a:ea typeface="Malgun Gothic"/>
+                <a:latin typeface="Malgun Gothic"/>
+              </a:rPr>
+              <a:t>기준: 사실성 우선, 추적 가능성 필수</a:t>
+            </a:r>
+          </a:p>
+          <a:p>
+            <a:r>
+              <a:rPr sz="1400" b="1">
+                <a:solidFill>
+                  <a:srgbClr val="FFFFFF"/>
+                </a:solidFill>
+                <a:ea typeface="Malgun Gothic"/>
+                <a:latin typeface="Malgun Gothic"/>
+              </a:rPr>
+              <a:t>
+★ fusion 권장</a:t>
+            </a:r>
+          </a:p>
+          <a:p>
+            <a:r>
+              <a:rPr sz="1000" b="0">
+                <a:solidFill>
+                  <a:srgbClr val="FFFFFF"/>
+                </a:solidFill>
+                <a:ea typeface="Malgun Gothic"/>
+                <a:latin typeface="Malgun Gothic"/>
+              </a:rPr>
+              <a:t>
+Agreement 라벨 + Value Match 0.90
+→ 감사·규제 대응 적합</a:t>
+            </a:r>
+          </a:p>
+        </p:txBody>
+      </p:sp>
+      <p:sp>
+        <p:nvSpPr>
+          <p:cNvPr id="7" name="Rounded Rectangle 6"/>
+          <p:cNvSpPr/>
+          <p:nvPr/>
+        </p:nvSpPr>
+        <p:spPr>
+          <a:xfrm>
+            <a:off x="6120000" y="1260000"/>
+            <a:ext cx="5580000" cy="2160000"/>
+          </a:xfrm>
+          <a:prstGeom prst="roundRect">
+            <a:avLst/>
+          </a:prstGeom>
+          <a:solidFill>
+            <a:srgbClr val="1F3A68"/>
+          </a:solidFill>
+          <a:ln>
+            <a:noFill/>
+          </a:ln>
+        </p:spPr>
+        <p:style>
+          <a:lnRef idx="1">
+            <a:schemeClr val="accent1"/>
+          </a:lnRef>
+          <a:fillRef idx="3">
+            <a:schemeClr val="accent1"/>
+          </a:fillRef>
+          <a:effectRef idx="2">
+            <a:schemeClr val="accent1"/>
+          </a:effectRef>
+          <a:fontRef idx="minor">
+            <a:schemeClr val="lt1"/>
+          </a:fontRef>
+        </p:style>
+        <p:txBody>
+          <a:bodyPr rtlCol="0" anchor="t" lIns="144000" tIns="108000"/>
+          <a:lstStyle/>
+          <a:p>
+            <a:pPr algn="ctr"/>
+            <a:r>
+              <a:rPr sz="1500" b="1">
+                <a:solidFill>
+                  <a:srgbClr val="FFFFFF"/>
+                </a:solidFill>
+                <a:ea typeface="Malgun Gothic"/>
+                <a:latin typeface="Malgun Gothic"/>
+              </a:rPr>
+              <a:t>Customer-facing</a:t>
+            </a:r>
+          </a:p>
+          <a:p>
+            <a:r>
+              <a:rPr sz="1100" b="0">
+                <a:solidFill>
+                  <a:srgbClr val="FFFFFF"/>
+                </a:solidFill>
+                <a:ea typeface="Malgun Gothic"/>
+                <a:latin typeface="Malgun Gothic"/>
+              </a:rPr>
+              <a:t>기준: 이해 용이성·친근함 우선</a:t>
+            </a:r>
+          </a:p>
+          <a:p>
+            <a:r>
+              <a:rPr sz="1400" b="1">
+                <a:solidFill>
+                  <a:srgbClr val="FFFFFF"/>
+                </a:solidFill>
+                <a:ea typeface="Malgun Gothic"/>
+                <a:latin typeface="Malgun Gothic"/>
+              </a:rPr>
+              <a:t>
+★ generic_rag 권장</a:t>
+            </a:r>
+          </a:p>
+          <a:p>
+            <a:r>
+              <a:rPr sz="1000" b="0">
+                <a:solidFill>
+                  <a:srgbClr val="FFFFFF"/>
+                </a:solidFill>
+                <a:ea typeface="Malgun Gothic"/>
+                <a:latin typeface="Malgun Gothic"/>
+              </a:rPr>
+              <a:t>
+Customer clarity 4.93
+→ 일반 차주 대상 안내·고객센터</a:t>
+            </a:r>
+          </a:p>
+        </p:txBody>
+      </p:sp>
+      <p:sp>
+        <p:nvSpPr>
+          <p:cNvPr id="8" name="Rounded Rectangle 7"/>
+          <p:cNvSpPr/>
+          <p:nvPr/>
+        </p:nvSpPr>
+        <p:spPr>
+          <a:xfrm>
+            <a:off x="360000" y="3600000"/>
+            <a:ext cx="5580000" cy="2160000"/>
+          </a:xfrm>
+          <a:prstGeom prst="roundRect">
+            <a:avLst/>
+          </a:prstGeom>
+          <a:solidFill>
+            <a:srgbClr val="DD8852"/>
+          </a:solidFill>
+          <a:ln>
+            <a:noFill/>
+          </a:ln>
+        </p:spPr>
+        <p:style>
+          <a:lnRef idx="1">
+            <a:schemeClr val="accent1"/>
+          </a:lnRef>
+          <a:fillRef idx="3">
+            <a:schemeClr val="accent1"/>
+          </a:fillRef>
+          <a:effectRef idx="2">
+            <a:schemeClr val="accent1"/>
+          </a:effectRef>
+          <a:fontRef idx="minor">
+            <a:schemeClr val="lt1"/>
+          </a:fontRef>
+        </p:style>
+        <p:txBody>
+          <a:bodyPr rtlCol="0" anchor="t" lIns="144000" tIns="108000"/>
+          <a:lstStyle/>
+          <a:p>
+            <a:pPr algn="ctr"/>
+            <a:r>
+              <a:rPr sz="1500" b="1">
+                <a:solidFill>
+                  <a:srgbClr val="FFFFFF"/>
+                </a:solidFill>
+                <a:ea typeface="Malgun Gothic"/>
+                <a:latin typeface="Malgun Gothic"/>
+              </a:rPr>
+              <a:t>복잡 도메인 (Home Credit급)</a:t>
+            </a:r>
+          </a:p>
+          <a:p>
+            <a:r>
+              <a:rPr sz="1100" b="0">
+                <a:solidFill>
+                  <a:srgbClr val="FFFFFF"/>
+                </a:solidFill>
+                <a:ea typeface="Malgun Gothic"/>
+                <a:latin typeface="Malgun Gothic"/>
+              </a:rPr>
+              <a:t>기준: 고차원·다변수·다양 관계</a:t>
+            </a:r>
+          </a:p>
+          <a:p>
+            <a:r>
+              <a:rPr sz="1400" b="1">
+                <a:solidFill>
+                  <a:srgbClr val="FFFFFF"/>
+                </a:solidFill>
+                <a:ea typeface="Malgun Gothic"/>
+                <a:latin typeface="Malgun Gothic"/>
+              </a:rPr>
+              <a:t>
+★ fusion 권장</a:t>
+            </a:r>
+          </a:p>
+          <a:p>
+            <a:r>
+              <a:rPr sz="1000" b="0">
+                <a:solidFill>
+                  <a:srgbClr val="FFFFFF"/>
+                </a:solidFill>
+                <a:ea typeface="Malgun Gothic"/>
+                <a:latin typeface="Malgun Gothic"/>
+              </a:rPr>
+              <a:t>
+G-Eval Completeness 1위
+→ 정보량이 많을수록 fusion 유리</a:t>
+            </a:r>
+          </a:p>
+        </p:txBody>
+      </p:sp>
+      <p:sp>
+        <p:nvSpPr>
+          <p:cNvPr id="9" name="Rounded Rectangle 8"/>
+          <p:cNvSpPr/>
+          <p:nvPr/>
+        </p:nvSpPr>
+        <p:spPr>
+          <a:xfrm>
+            <a:off x="6120000" y="3600000"/>
+            <a:ext cx="5580000" cy="2160000"/>
+          </a:xfrm>
+          <a:prstGeom prst="roundRect">
+            <a:avLst/>
+          </a:prstGeom>
+          <a:solidFill>
+            <a:srgbClr val="8C6BB1"/>
+          </a:solidFill>
+          <a:ln>
+            <a:noFill/>
+          </a:ln>
+        </p:spPr>
+        <p:style>
+          <a:lnRef idx="1">
+            <a:schemeClr val="accent1"/>
+          </a:lnRef>
+          <a:fillRef idx="3">
+            <a:schemeClr val="accent1"/>
+          </a:fillRef>
+          <a:effectRef idx="2">
+            <a:schemeClr val="accent1"/>
+          </a:effectRef>
+          <a:fontRef idx="minor">
+            <a:schemeClr val="lt1"/>
+          </a:fontRef>
+        </p:style>
+        <p:txBody>
+          <a:bodyPr rtlCol="0" anchor="t" lIns="144000" tIns="108000"/>
+          <a:lstStyle/>
+          <a:p>
+            <a:pPr algn="ctr"/>
+            <a:r>
+              <a:rPr sz="1500" b="1">
+                <a:solidFill>
+                  <a:srgbClr val="FFFFFF"/>
+                </a:solidFill>
+                <a:ea typeface="Malgun Gothic"/>
+                <a:latin typeface="Malgun Gothic"/>
+              </a:rPr>
+              <a:t>단순 도메인 (German Credit급)</a:t>
+            </a:r>
+          </a:p>
+          <a:p>
+            <a:r>
+              <a:rPr sz="1100" b="0">
+                <a:solidFill>
+                  <a:srgbClr val="FFFFFF"/>
+                </a:solidFill>
+                <a:ea typeface="Malgun Gothic"/>
+                <a:latin typeface="Malgun Gothic"/>
+              </a:rPr>
+              <a:t>기준: 저차원·소표본</a:t>
+            </a:r>
+          </a:p>
+          <a:p>
+            <a:r>
+              <a:rPr sz="1400" b="1">
+                <a:solidFill>
+                  <a:srgbClr val="FFFFFF"/>
+                </a:solidFill>
+                <a:ea typeface="Malgun Gothic"/>
+                <a:latin typeface="Malgun Gothic"/>
+              </a:rPr>
+              <a:t>
+★ generic_rag 권장</a:t>
+            </a:r>
+          </a:p>
+          <a:p>
+            <a:r>
+              <a:rPr sz="1000" b="0">
+                <a:solidFill>
+                  <a:srgbClr val="FFFFFF"/>
+                </a:solidFill>
+                <a:ea typeface="Malgun Gothic"/>
+                <a:latin typeface="Malgun Gothic"/>
+              </a:rPr>
+              <a:t>
+G-Eval Completeness 1위
+→ 도메인 지식 chunks가 보완</a:t>
+            </a:r>
+          </a:p>
+        </p:txBody>
+      </p:sp>
+      <p:sp>
+        <p:nvSpPr>
+          <p:cNvPr id="10" name="TextBox 9"/>
           <p:cNvSpPr txBox="1"/>
           <p:nvPr/>
         </p:nvSpPr>
         <p:spPr>
           <a:xfrm>
-            <a:off x="360000" y="1188000"/>
-            <a:ext cx="11160000" cy="5040000"/>
+            <a:off x="360000" y="6534000"/>
+            <a:ext cx="7920000" cy="216000"/>
           </a:xfrm>
           <a:prstGeom prst="rect">
             <a:avLst/>
@@ -19022,199 +22474,29 @@
           </a:bodyPr>
           <a:lstStyle/>
           <a:p>
-            <a:pPr algn="l"/>
-            <a:r>
-              <a:rPr sz="1200" b="1">
-                <a:solidFill>
-                  <a:srgbClr val="C44E52"/>
-                </a:solidFill>
-                <a:ea typeface="Malgun Gothic"/>
-                <a:latin typeface="Malgun Gothic"/>
-              </a:rPr>
-              <a:t>•  정식 IRB 인간평가 (L2 한계 해소)</a:t>
-            </a:r>
-          </a:p>
-          <a:p>
-            <a:pPr lvl="1" algn="l"/>
-            <a:r>
-              <a:rPr sz="1000" b="0">
+            <a:r>
+              <a:rPr sz="900" b="0">
                 <a:solidFill>
                   <a:srgbClr val="555555"/>
                 </a:solidFill>
                 <a:ea typeface="Malgun Gothic"/>
                 <a:latin typeface="Malgun Gothic"/>
               </a:rPr>
-              <a:t>    –  IRB 간소판 + 5점 척도 + 다수 평가자(N=20~30)</a:t>
-            </a:r>
-          </a:p>
-          <a:p>
-            <a:pPr lvl="1" algn="l"/>
-            <a:r>
-              <a:rPr sz="1000" b="0">
-                <a:solidFill>
-                  <a:srgbClr val="555555"/>
-                </a:solidFill>
-                <a:ea typeface="Malgun Gothic"/>
-                <a:latin typeface="Malgun Gothic"/>
-              </a:rPr>
-              <a:t>    –  Cohen's κ 평가자 간 신뢰도</a:t>
-            </a:r>
-          </a:p>
-          <a:p>
-            <a:pPr lvl="1" algn="l"/>
-            <a:r>
-              <a:rPr sz="1000" b="0">
-                <a:solidFill>
-                  <a:srgbClr val="555555"/>
-                </a:solidFill>
-                <a:ea typeface="Malgun Gothic"/>
-                <a:latin typeface="Malgun Gothic"/>
-              </a:rPr>
-              <a:t>    –  사실성 vs 친근성 trade-off의 현실 검증 — 약점 #2 완전 해소</a:t>
-            </a:r>
-          </a:p>
-          <a:p>
-            <a:pPr algn="l"/>
-            <a:r>
-              <a:rPr sz="1200" b="1">
-                <a:solidFill>
-                  <a:srgbClr val="1F3A68"/>
-                </a:solidFill>
-                <a:ea typeface="Malgun Gothic"/>
-                <a:latin typeface="Malgun Gothic"/>
-              </a:rPr>
-              <a:t>•  추가 데이터셋 — 도메인 복잡도 stratification</a:t>
-            </a:r>
-          </a:p>
-          <a:p>
-            <a:pPr lvl="1" algn="l"/>
-            <a:r>
-              <a:rPr sz="1000" b="0">
-                <a:solidFill>
-                  <a:srgbClr val="555555"/>
-                </a:solidFill>
-                <a:ea typeface="Malgun Gothic"/>
-                <a:latin typeface="Malgun Gothic"/>
-              </a:rPr>
-              <a:t>    –  Australian Credit (UCI, 690×14, 복잡도 중간)</a:t>
-            </a:r>
-          </a:p>
-          <a:p>
-            <a:pPr lvl="1" algn="l"/>
-            <a:r>
-              <a:rPr sz="1000" b="0">
-                <a:solidFill>
-                  <a:srgbClr val="555555"/>
-                </a:solidFill>
-                <a:ea typeface="Malgun Gothic"/>
-                <a:latin typeface="Malgun Gothic"/>
-              </a:rPr>
-              <a:t>    –  Lending Club (Kaggle, ~1.3M×150)</a:t>
-            </a:r>
-          </a:p>
-          <a:p>
-            <a:pPr lvl="1" algn="l"/>
-            <a:r>
-              <a:rPr sz="1000" b="0">
-                <a:solidFill>
-                  <a:srgbClr val="555555"/>
-                </a:solidFill>
-                <a:ea typeface="Malgun Gothic"/>
-                <a:latin typeface="Malgun Gothic"/>
-              </a:rPr>
-              <a:t>    –  도메인 복잡도 × Mode 우월성 정량 매핑</a:t>
-            </a:r>
-          </a:p>
-          <a:p>
-            <a:pPr algn="l"/>
-            <a:r>
-              <a:rPr sz="1200" b="1">
-                <a:solidFill>
-                  <a:srgbClr val="55A868"/>
-                </a:solidFill>
-                <a:ea typeface="Malgun Gothic"/>
-                <a:latin typeface="Malgun Gothic"/>
-              </a:rPr>
-              <a:t>•  3-way Ablation — Attention-only 단독 검증</a:t>
-            </a:r>
-          </a:p>
-          <a:p>
-            <a:pPr lvl="1" algn="l"/>
-            <a:r>
-              <a:rPr sz="1000" b="0">
-                <a:solidFill>
-                  <a:srgbClr val="555555"/>
-                </a:solidFill>
-                <a:ea typeface="Malgun Gothic"/>
-                <a:latin typeface="Malgun Gothic"/>
-              </a:rPr>
-              <a:t>    –  현재 비교: no_shap / generic_rag / shaponly / fusion</a:t>
-            </a:r>
-          </a:p>
-          <a:p>
-            <a:pPr lvl="1" algn="l"/>
-            <a:r>
-              <a:rPr sz="1000" b="0">
-                <a:solidFill>
-                  <a:srgbClr val="555555"/>
-                </a:solidFill>
-                <a:ea typeface="Malgun Gothic"/>
-                <a:latin typeface="Malgun Gothic"/>
-              </a:rPr>
-              <a:t>    –  추가 비교: attention_only → fusion 우월성이 attention 기여인지 isolate</a:t>
-            </a:r>
-          </a:p>
-          <a:p>
-            <a:pPr algn="l"/>
-            <a:r>
-              <a:rPr sz="1200" b="1">
-                <a:solidFill>
-                  <a:srgbClr val="8C6BB1"/>
-                </a:solidFill>
-                <a:ea typeface="Malgun Gothic"/>
-                <a:latin typeface="Malgun Gothic"/>
-              </a:rPr>
-              <a:t>•  Customer-friendly Fusion 정제</a:t>
-            </a:r>
-          </a:p>
-          <a:p>
-            <a:pPr lvl="1" algn="l"/>
-            <a:r>
-              <a:rPr sz="1000" b="0">
-                <a:solidFill>
-                  <a:srgbClr val="555555"/>
-                </a:solidFill>
-                <a:ea typeface="Malgun Gothic"/>
-                <a:latin typeface="Malgun Gothic"/>
-              </a:rPr>
-              <a:t>    –  Step 5-E 시도(revert): 친근함 ↑ 사실성 ↓ 정량 입증됨</a:t>
-            </a:r>
-          </a:p>
-          <a:p>
-            <a:pPr lvl="1" algn="l"/>
-            <a:r>
-              <a:rPr sz="1000" b="0">
-                <a:solidFill>
-                  <a:srgbClr val="555555"/>
-                </a:solidFill>
-                <a:ea typeface="Malgun Gothic"/>
-                <a:latin typeface="Malgun Gothic"/>
-              </a:rPr>
-              <a:t>    –  Future: Hybrid 표현 — agreement 라벨 자연어화, 기술 용어 직관 변환</a:t>
-            </a:r>
-          </a:p>
-        </p:txBody>
-      </p:sp>
-      <p:sp>
-        <p:nvSpPr>
-          <p:cNvPr id="7" name="TextBox 6"/>
+              <a:t>TabNet × SHAP × LLM XAI-RAG  |  A70067 오현택</a:t>
+            </a:r>
+          </a:p>
+        </p:txBody>
+      </p:sp>
+      <p:sp>
+        <p:nvSpPr>
+          <p:cNvPr id="11" name="TextBox 10"/>
           <p:cNvSpPr txBox="1"/>
           <p:nvPr/>
         </p:nvSpPr>
         <p:spPr>
           <a:xfrm>
-            <a:off x="360000" y="6534000"/>
-            <a:ext cx="7920000" cy="216000"/>
+            <a:off x="11111695" y="6534000"/>
+            <a:ext cx="720000" cy="216000"/>
           </a:xfrm>
           <a:prstGeom prst="rect">
             <a:avLst/>
@@ -19227,6 +22509,7 @@
           </a:bodyPr>
           <a:lstStyle/>
           <a:p>
+            <a:pPr algn="r"/>
             <a:r>
               <a:rPr sz="900" b="0">
                 <a:solidFill>
@@ -19235,43 +22518,7 @@
                 <a:ea typeface="Malgun Gothic"/>
                 <a:latin typeface="Malgun Gothic"/>
               </a:rPr>
-              <a:t>TabNet × SHAP × LLM XAI-RAG  |  A70067 오현택</a:t>
-            </a:r>
-          </a:p>
-        </p:txBody>
-      </p:sp>
-      <p:sp>
-        <p:nvSpPr>
-          <p:cNvPr id="8" name="TextBox 7"/>
-          <p:cNvSpPr txBox="1"/>
-          <p:nvPr/>
-        </p:nvSpPr>
-        <p:spPr>
-          <a:xfrm>
-            <a:off x="11111695" y="6534000"/>
-            <a:ext cx="720000" cy="216000"/>
-          </a:xfrm>
-          <a:prstGeom prst="rect">
-            <a:avLst/>
-          </a:prstGeom>
-          <a:noFill/>
-        </p:spPr>
-        <p:txBody>
-          <a:bodyPr wrap="square">
-            <a:spAutoFit/>
-          </a:bodyPr>
-          <a:lstStyle/>
-          <a:p>
-            <a:pPr algn="r"/>
-            <a:r>
-              <a:rPr sz="900" b="0">
-                <a:solidFill>
-                  <a:srgbClr val="555555"/>
-                </a:solidFill>
-                <a:ea typeface="Malgun Gothic"/>
-                <a:latin typeface="Malgun Gothic"/>
-              </a:rPr>
-              <a:t>25 / 26</a:t>
+              <a:t>25 / 27</a:t>
             </a:r>
           </a:p>
         </p:txBody>
@@ -19303,6 +22550,456 @@
         <p:spPr>
           <a:xfrm>
             <a:off x="0" y="0"/>
+            <a:ext cx="180000" cy="720000"/>
+          </a:xfrm>
+          <a:prstGeom prst="rect">
+            <a:avLst/>
+          </a:prstGeom>
+          <a:solidFill>
+            <a:srgbClr val="1F3A68"/>
+          </a:solidFill>
+          <a:ln>
+            <a:noFill/>
+          </a:ln>
+        </p:spPr>
+        <p:style>
+          <a:lnRef idx="1">
+            <a:schemeClr val="accent1"/>
+          </a:lnRef>
+          <a:fillRef idx="3">
+            <a:schemeClr val="accent1"/>
+          </a:fillRef>
+          <a:effectRef idx="2">
+            <a:schemeClr val="accent1"/>
+          </a:effectRef>
+          <a:fontRef idx="minor">
+            <a:schemeClr val="lt1"/>
+          </a:fontRef>
+        </p:style>
+        <p:txBody>
+          <a:bodyPr rtlCol="0" anchor="ctr"/>
+          <a:lstStyle/>
+          <a:p>
+            <a:pPr algn="ctr"/>
+          </a:p>
+        </p:txBody>
+      </p:sp>
+      <p:sp>
+        <p:nvSpPr>
+          <p:cNvPr id="3" name="TextBox 2"/>
+          <p:cNvSpPr txBox="1"/>
+          <p:nvPr/>
+        </p:nvSpPr>
+        <p:spPr>
+          <a:xfrm>
+            <a:off x="360000" y="144000"/>
+            <a:ext cx="10800000" cy="360000"/>
+          </a:xfrm>
+          <a:prstGeom prst="rect">
+            <a:avLst/>
+          </a:prstGeom>
+          <a:noFill/>
+        </p:spPr>
+        <p:txBody>
+          <a:bodyPr wrap="square">
+            <a:spAutoFit/>
+          </a:bodyPr>
+          <a:lstStyle/>
+          <a:p>
+            <a:r>
+              <a:rPr sz="2400" b="1">
+                <a:solidFill>
+                  <a:srgbClr val="1F3A68"/>
+                </a:solidFill>
+                <a:ea typeface="Malgun Gothic"/>
+                <a:latin typeface="Malgun Gothic"/>
+              </a:rPr>
+              <a:t>24. 향후 연구 방향</a:t>
+            </a:r>
+          </a:p>
+        </p:txBody>
+      </p:sp>
+      <p:sp>
+        <p:nvSpPr>
+          <p:cNvPr id="4" name="TextBox 3"/>
+          <p:cNvSpPr txBox="1"/>
+          <p:nvPr/>
+        </p:nvSpPr>
+        <p:spPr>
+          <a:xfrm>
+            <a:off x="360000" y="503999"/>
+            <a:ext cx="10800000" cy="288000"/>
+          </a:xfrm>
+          <a:prstGeom prst="rect">
+            <a:avLst/>
+          </a:prstGeom>
+          <a:noFill/>
+        </p:spPr>
+        <p:txBody>
+          <a:bodyPr wrap="square">
+            <a:spAutoFit/>
+          </a:bodyPr>
+          <a:lstStyle/>
+          <a:p>
+            <a:r>
+              <a:rPr sz="1200" b="0">
+                <a:solidFill>
+                  <a:srgbClr val="555555"/>
+                </a:solidFill>
+                <a:ea typeface="Malgun Gothic"/>
+                <a:latin typeface="Malgun Gothic"/>
+              </a:rPr>
+              <a:t>본 연구를 확장할 수 있는 4 가지 방향</a:t>
+            </a:r>
+          </a:p>
+        </p:txBody>
+      </p:sp>
+      <p:sp>
+        <p:nvSpPr>
+          <p:cNvPr id="5" name="Rectangle 4"/>
+          <p:cNvSpPr/>
+          <p:nvPr/>
+        </p:nvSpPr>
+        <p:spPr>
+          <a:xfrm>
+            <a:off x="360000" y="864000"/>
+            <a:ext cx="11340000" cy="18000"/>
+          </a:xfrm>
+          <a:prstGeom prst="rect">
+            <a:avLst/>
+          </a:prstGeom>
+          <a:solidFill>
+            <a:srgbClr val="CCCCCC"/>
+          </a:solidFill>
+          <a:ln>
+            <a:noFill/>
+          </a:ln>
+        </p:spPr>
+        <p:style>
+          <a:lnRef idx="1">
+            <a:schemeClr val="accent1"/>
+          </a:lnRef>
+          <a:fillRef idx="3">
+            <a:schemeClr val="accent1"/>
+          </a:fillRef>
+          <a:effectRef idx="2">
+            <a:schemeClr val="accent1"/>
+          </a:effectRef>
+          <a:fontRef idx="minor">
+            <a:schemeClr val="lt1"/>
+          </a:fontRef>
+        </p:style>
+        <p:txBody>
+          <a:bodyPr rtlCol="0" anchor="ctr"/>
+          <a:lstStyle/>
+          <a:p>
+            <a:pPr algn="ctr"/>
+          </a:p>
+        </p:txBody>
+      </p:sp>
+      <p:sp>
+        <p:nvSpPr>
+          <p:cNvPr id="6" name="TextBox 5"/>
+          <p:cNvSpPr txBox="1"/>
+          <p:nvPr/>
+        </p:nvSpPr>
+        <p:spPr>
+          <a:xfrm>
+            <a:off x="360000" y="1188000"/>
+            <a:ext cx="11160000" cy="5040000"/>
+          </a:xfrm>
+          <a:prstGeom prst="rect">
+            <a:avLst/>
+          </a:prstGeom>
+          <a:noFill/>
+        </p:spPr>
+        <p:txBody>
+          <a:bodyPr wrap="square">
+            <a:spAutoFit/>
+          </a:bodyPr>
+          <a:lstStyle/>
+          <a:p>
+            <a:pPr algn="l"/>
+            <a:r>
+              <a:rPr sz="1200" b="1">
+                <a:solidFill>
+                  <a:srgbClr val="C44E52"/>
+                </a:solidFill>
+                <a:ea typeface="Malgun Gothic"/>
+                <a:latin typeface="Malgun Gothic"/>
+              </a:rPr>
+              <a:t>•  정식 IRB 인간평가 (L2 한계 해소)</a:t>
+            </a:r>
+          </a:p>
+          <a:p>
+            <a:pPr lvl="1" algn="l"/>
+            <a:r>
+              <a:rPr sz="1000" b="0">
+                <a:solidFill>
+                  <a:srgbClr val="555555"/>
+                </a:solidFill>
+                <a:ea typeface="Malgun Gothic"/>
+                <a:latin typeface="Malgun Gothic"/>
+              </a:rPr>
+              <a:t>    –  IRB 간소판 + 5점 척도 + 다수 평가자(N=20~30)</a:t>
+            </a:r>
+          </a:p>
+          <a:p>
+            <a:pPr lvl="1" algn="l"/>
+            <a:r>
+              <a:rPr sz="1000" b="0">
+                <a:solidFill>
+                  <a:srgbClr val="555555"/>
+                </a:solidFill>
+                <a:ea typeface="Malgun Gothic"/>
+                <a:latin typeface="Malgun Gothic"/>
+              </a:rPr>
+              <a:t>    –  Cohen's κ 평가자 간 신뢰도</a:t>
+            </a:r>
+          </a:p>
+          <a:p>
+            <a:pPr lvl="1" algn="l"/>
+            <a:r>
+              <a:rPr sz="1000" b="0">
+                <a:solidFill>
+                  <a:srgbClr val="555555"/>
+                </a:solidFill>
+                <a:ea typeface="Malgun Gothic"/>
+                <a:latin typeface="Malgun Gothic"/>
+              </a:rPr>
+              <a:t>    –  사실성 vs 친근성 trade-off의 현실 검증 — 약점 #2 완전 해소</a:t>
+            </a:r>
+          </a:p>
+          <a:p>
+            <a:pPr algn="l"/>
+            <a:r>
+              <a:rPr sz="1200" b="1">
+                <a:solidFill>
+                  <a:srgbClr val="1F3A68"/>
+                </a:solidFill>
+                <a:ea typeface="Malgun Gothic"/>
+                <a:latin typeface="Malgun Gothic"/>
+              </a:rPr>
+              <a:t>•  추가 데이터셋 — 도메인 복잡도 stratification</a:t>
+            </a:r>
+          </a:p>
+          <a:p>
+            <a:pPr lvl="1" algn="l"/>
+            <a:r>
+              <a:rPr sz="1000" b="0">
+                <a:solidFill>
+                  <a:srgbClr val="555555"/>
+                </a:solidFill>
+                <a:ea typeface="Malgun Gothic"/>
+                <a:latin typeface="Malgun Gothic"/>
+              </a:rPr>
+              <a:t>    –  Australian Credit (UCI, 690×14, 복잡도 중간)</a:t>
+            </a:r>
+          </a:p>
+          <a:p>
+            <a:pPr lvl="1" algn="l"/>
+            <a:r>
+              <a:rPr sz="1000" b="0">
+                <a:solidFill>
+                  <a:srgbClr val="555555"/>
+                </a:solidFill>
+                <a:ea typeface="Malgun Gothic"/>
+                <a:latin typeface="Malgun Gothic"/>
+              </a:rPr>
+              <a:t>    –  Lending Club (Kaggle, ~1.3M×150)</a:t>
+            </a:r>
+          </a:p>
+          <a:p>
+            <a:pPr lvl="1" algn="l"/>
+            <a:r>
+              <a:rPr sz="1000" b="0">
+                <a:solidFill>
+                  <a:srgbClr val="555555"/>
+                </a:solidFill>
+                <a:ea typeface="Malgun Gothic"/>
+                <a:latin typeface="Malgun Gothic"/>
+              </a:rPr>
+              <a:t>    –  도메인 복잡도 × Mode 우월성 정량 매핑</a:t>
+            </a:r>
+          </a:p>
+          <a:p>
+            <a:pPr algn="l"/>
+            <a:r>
+              <a:rPr sz="1200" b="1">
+                <a:solidFill>
+                  <a:srgbClr val="55A868"/>
+                </a:solidFill>
+                <a:ea typeface="Malgun Gothic"/>
+                <a:latin typeface="Malgun Gothic"/>
+              </a:rPr>
+              <a:t>•  3-way Ablation — Attention-only 단독 검증</a:t>
+            </a:r>
+          </a:p>
+          <a:p>
+            <a:pPr lvl="1" algn="l"/>
+            <a:r>
+              <a:rPr sz="1000" b="0">
+                <a:solidFill>
+                  <a:srgbClr val="555555"/>
+                </a:solidFill>
+                <a:ea typeface="Malgun Gothic"/>
+                <a:latin typeface="Malgun Gothic"/>
+              </a:rPr>
+              <a:t>    –  현재 비교: no_shap / generic_rag / shaponly / fusion</a:t>
+            </a:r>
+          </a:p>
+          <a:p>
+            <a:pPr lvl="1" algn="l"/>
+            <a:r>
+              <a:rPr sz="1000" b="0">
+                <a:solidFill>
+                  <a:srgbClr val="555555"/>
+                </a:solidFill>
+                <a:ea typeface="Malgun Gothic"/>
+                <a:latin typeface="Malgun Gothic"/>
+              </a:rPr>
+              <a:t>    –  추가 비교: attention_only → fusion 우월성이 attention 기여인지 isolate</a:t>
+            </a:r>
+          </a:p>
+          <a:p>
+            <a:pPr algn="l"/>
+            <a:r>
+              <a:rPr sz="1200" b="1">
+                <a:solidFill>
+                  <a:srgbClr val="8C6BB1"/>
+                </a:solidFill>
+                <a:ea typeface="Malgun Gothic"/>
+                <a:latin typeface="Malgun Gothic"/>
+              </a:rPr>
+              <a:t>•  Customer-friendly Fusion 정제</a:t>
+            </a:r>
+          </a:p>
+          <a:p>
+            <a:pPr lvl="1" algn="l"/>
+            <a:r>
+              <a:rPr sz="1000" b="0">
+                <a:solidFill>
+                  <a:srgbClr val="555555"/>
+                </a:solidFill>
+                <a:ea typeface="Malgun Gothic"/>
+                <a:latin typeface="Malgun Gothic"/>
+              </a:rPr>
+              <a:t>    –  Step 5-E 시도(revert): 친근함 ↑ 사실성 ↓ 정량 입증됨</a:t>
+            </a:r>
+          </a:p>
+          <a:p>
+            <a:pPr lvl="1" algn="l"/>
+            <a:r>
+              <a:rPr sz="1000" b="0">
+                <a:solidFill>
+                  <a:srgbClr val="555555"/>
+                </a:solidFill>
+                <a:ea typeface="Malgun Gothic"/>
+                <a:latin typeface="Malgun Gothic"/>
+              </a:rPr>
+              <a:t>    –  Future: Hybrid 표현 — agreement 라벨 자연어화, 기술 용어 직관 변환</a:t>
+            </a:r>
+          </a:p>
+        </p:txBody>
+      </p:sp>
+      <p:sp>
+        <p:nvSpPr>
+          <p:cNvPr id="7" name="TextBox 6"/>
+          <p:cNvSpPr txBox="1"/>
+          <p:nvPr/>
+        </p:nvSpPr>
+        <p:spPr>
+          <a:xfrm>
+            <a:off x="360000" y="6534000"/>
+            <a:ext cx="7920000" cy="216000"/>
+          </a:xfrm>
+          <a:prstGeom prst="rect">
+            <a:avLst/>
+          </a:prstGeom>
+          <a:noFill/>
+        </p:spPr>
+        <p:txBody>
+          <a:bodyPr wrap="square">
+            <a:spAutoFit/>
+          </a:bodyPr>
+          <a:lstStyle/>
+          <a:p>
+            <a:r>
+              <a:rPr sz="900" b="0">
+                <a:solidFill>
+                  <a:srgbClr val="555555"/>
+                </a:solidFill>
+                <a:ea typeface="Malgun Gothic"/>
+                <a:latin typeface="Malgun Gothic"/>
+              </a:rPr>
+              <a:t>TabNet × SHAP × LLM XAI-RAG  |  A70067 오현택</a:t>
+            </a:r>
+          </a:p>
+        </p:txBody>
+      </p:sp>
+      <p:sp>
+        <p:nvSpPr>
+          <p:cNvPr id="8" name="TextBox 7"/>
+          <p:cNvSpPr txBox="1"/>
+          <p:nvPr/>
+        </p:nvSpPr>
+        <p:spPr>
+          <a:xfrm>
+            <a:off x="11111695" y="6534000"/>
+            <a:ext cx="720000" cy="216000"/>
+          </a:xfrm>
+          <a:prstGeom prst="rect">
+            <a:avLst/>
+          </a:prstGeom>
+          <a:noFill/>
+        </p:spPr>
+        <p:txBody>
+          <a:bodyPr wrap="square">
+            <a:spAutoFit/>
+          </a:bodyPr>
+          <a:lstStyle/>
+          <a:p>
+            <a:pPr algn="r"/>
+            <a:r>
+              <a:rPr sz="900" b="0">
+                <a:solidFill>
+                  <a:srgbClr val="555555"/>
+                </a:solidFill>
+                <a:ea typeface="Malgun Gothic"/>
+                <a:latin typeface="Malgun Gothic"/>
+              </a:rPr>
+              <a:t>26 / 27</a:t>
+            </a:r>
+          </a:p>
+        </p:txBody>
+      </p:sp>
+    </p:spTree>
+  </p:cSld>
+  <p:clrMapOvr>
+    <a:masterClrMapping/>
+  </p:clrMapOvr>
+</p:sld>
+</file>
+
+<file path=ppt/slides/slide27.xml><?xml version="1.0" encoding="utf-8"?>
+<p:sld xmlns:a="http://schemas.openxmlformats.org/drawingml/2006/main" xmlns:p="http://schemas.openxmlformats.org/presentationml/2006/main" xmlns:r="http://schemas.openxmlformats.org/officeDocument/2006/relationships">
+  <p:cSld>
+    <p:spTree>
+      <p:nvGrpSpPr>
+        <p:cNvPr id="1" name=""/>
+        <p:cNvGrpSpPr/>
+        <p:nvPr/>
+      </p:nvGrpSpPr>
+      <p:grpSpPr/>
+      <p:sp>
+        <p:nvSpPr>
+          <p:cNvPr id="2" name="Rectangle 1"/>
+          <p:cNvSpPr/>
+          <p:nvPr/>
+        </p:nvSpPr>
+        <p:spPr>
+          <a:xfrm>
+            <a:off x="0" y="0"/>
             <a:ext cx="12191695" cy="6858000"/>
           </a:xfrm>
           <a:prstGeom prst="rect">
@@ -19923,7 +23620,7 @@
                 <a:ea typeface="Malgun Gothic"/>
                 <a:latin typeface="Malgun Gothic"/>
               </a:rPr>
-              <a:t>3 / 26</a:t>
+              <a:t>3 / 27</a:t>
             </a:r>
           </a:p>
         </p:txBody>
@@ -20693,7 +24390,7 @@
                 <a:ea typeface="Malgun Gothic"/>
                 <a:latin typeface="Malgun Gothic"/>
               </a:rPr>
-              <a:t>4 / 26</a:t>
+              <a:t>4 / 27</a:t>
             </a:r>
           </a:p>
         </p:txBody>
@@ -21171,7 +24868,7 @@
                 <a:ea typeface="Malgun Gothic"/>
                 <a:latin typeface="Malgun Gothic"/>
               </a:rPr>
-              <a:t>5 / 26</a:t>
+              <a:t>5 / 27</a:t>
             </a:r>
           </a:p>
         </p:txBody>
@@ -21493,7 +25190,7 @@
                 <a:ea typeface="Malgun Gothic"/>
                 <a:latin typeface="Malgun Gothic"/>
               </a:rPr>
-              <a:t>6 / 26</a:t>
+              <a:t>6 / 27</a:t>
             </a:r>
           </a:p>
         </p:txBody>
@@ -23276,7 +26973,7 @@
                 <a:ea typeface="Malgun Gothic"/>
                 <a:latin typeface="Malgun Gothic"/>
               </a:rPr>
-              <a:t>7 / 26</a:t>
+              <a:t>7 / 27</a:t>
             </a:r>
           </a:p>
         </p:txBody>
@@ -25571,7 +29268,7 @@
                 <a:ea typeface="Malgun Gothic"/>
                 <a:latin typeface="Malgun Gothic"/>
               </a:rPr>
-              <a:t>8 / 26</a:t>
+              <a:t>8 / 27</a:t>
             </a:r>
           </a:p>
         </p:txBody>
@@ -26066,7 +29763,7 @@
                 <a:ea typeface="Malgun Gothic"/>
                 <a:latin typeface="Malgun Gothic"/>
               </a:rPr>
-              <a:t>9 / 26</a:t>
+              <a:t>9 / 27</a:t>
             </a:r>
           </a:p>
         </p:txBody>
